--- a/프로젝트/부동산_웹플랫폼_제작결과_발표.pptx
+++ b/프로젝트/부동산_웹플랫폼_제작결과_발표.pptx
@@ -16,7 +16,7 @@
     <p:sldId id="264" r:id="rId15"/>
     <p:sldId id="265" r:id="rId16"/>
   </p:sldIdLst>
-  <p:sldSz cx="9144000" cy="6858000" type="screen4x3"/>
+  <p:sldSz cx="12191695" cy="6858000" type="screen4x3"/>
   <p:notesSz cx="6858000" cy="9144000"/>
   <p:defaultTextStyle>
     <a:defPPr>
@@ -3090,14 +3090,6 @@
 <file path=ppt/slides/slide1.xml><?xml version="1.0" encoding="utf-8"?>
 <p:sld xmlns:a="http://schemas.openxmlformats.org/drawingml/2006/main" xmlns:p="http://schemas.openxmlformats.org/presentationml/2006/main" xmlns:r="http://schemas.openxmlformats.org/officeDocument/2006/relationships">
   <p:cSld>
-    <p:bg>
-      <p:bgPr>
-        <a:solidFill>
-          <a:srgbClr val="1A3A5C"/>
-        </a:solidFill>
-        <a:effectLst/>
-      </p:bgPr>
-    </p:bg>
     <p:spTree>
       <p:nvGrpSpPr>
         <p:cNvPr id="1" name=""/>
@@ -3113,14 +3105,14 @@
         </p:nvSpPr>
         <p:spPr>
           <a:xfrm>
-            <a:off x="0" y="4389120"/>
-            <a:ext cx="9144000" cy="73152"/>
+            <a:off x="0" y="0"/>
+            <a:ext cx="12191695" cy="6858000"/>
           </a:xfrm>
           <a:prstGeom prst="rect">
             <a:avLst/>
           </a:prstGeom>
           <a:solidFill>
-            <a:srgbClr val="009688"/>
+            <a:srgbClr val="1A568E"/>
           </a:solidFill>
           <a:ln>
             <a:noFill/>
@@ -3150,14 +3142,57 @@
       </p:sp>
       <p:sp>
         <p:nvSpPr>
-          <p:cNvPr id="3" name="TextBox 2"/>
+          <p:cNvPr id="3" name="Rectangle 2"/>
+          <p:cNvSpPr/>
+          <p:nvPr/>
+        </p:nvSpPr>
+        <p:spPr>
+          <a:xfrm>
+            <a:off x="0" y="6217920"/>
+            <a:ext cx="12191695" cy="640080"/>
+          </a:xfrm>
+          <a:prstGeom prst="rect">
+            <a:avLst/>
+          </a:prstGeom>
+          <a:solidFill>
+            <a:srgbClr val="00A87E"/>
+          </a:solidFill>
+          <a:ln>
+            <a:noFill/>
+          </a:ln>
+        </p:spPr>
+        <p:style>
+          <a:lnRef idx="1">
+            <a:schemeClr val="accent1"/>
+          </a:lnRef>
+          <a:fillRef idx="3">
+            <a:schemeClr val="accent1"/>
+          </a:fillRef>
+          <a:effectRef idx="2">
+            <a:schemeClr val="accent1"/>
+          </a:effectRef>
+          <a:fontRef idx="minor">
+            <a:schemeClr val="lt1"/>
+          </a:fontRef>
+        </p:style>
+        <p:txBody>
+          <a:bodyPr rtlCol="0" anchor="ctr"/>
+          <a:lstStyle/>
+          <a:p>
+            <a:pPr algn="ctr"/>
+          </a:p>
+        </p:txBody>
+      </p:sp>
+      <p:sp>
+        <p:nvSpPr>
+          <p:cNvPr id="4" name="TextBox 3"/>
           <p:cNvSpPr txBox="1"/>
           <p:nvPr/>
         </p:nvSpPr>
         <p:spPr>
           <a:xfrm>
-            <a:off x="731520" y="1645920"/>
-            <a:ext cx="7680960" cy="1371600"/>
+            <a:off x="914400" y="2011680"/>
+            <a:ext cx="10058400" cy="1371600"/>
           </a:xfrm>
           <a:prstGeom prst="rect">
             <a:avLst/>
@@ -3171,11 +3206,10 @@
           <a:lstStyle/>
           <a:p>
             <a:pPr algn="ctr">
-              <a:defRPr sz="4400" b="1">
+              <a:defRPr sz="4800" b="1">
                 <a:solidFill>
                   <a:srgbClr val="FFFFFF"/>
                 </a:solidFill>
-                <a:latin typeface="맑은 고딕"/>
               </a:defRPr>
             </a:pPr>
             <a:r>
@@ -3186,14 +3220,14 @@
       </p:sp>
       <p:sp>
         <p:nvSpPr>
-          <p:cNvPr id="4" name="TextBox 3"/>
+          <p:cNvPr id="5" name="TextBox 4"/>
           <p:cNvSpPr txBox="1"/>
           <p:nvPr/>
         </p:nvSpPr>
         <p:spPr>
           <a:xfrm>
-            <a:off x="731520" y="2926080"/>
-            <a:ext cx="7680960" cy="731520"/>
+            <a:off x="914400" y="3200400"/>
+            <a:ext cx="10058400" cy="731520"/>
           </a:xfrm>
           <a:prstGeom prst="rect">
             <a:avLst/>
@@ -3209,9 +3243,8 @@
             <a:pPr algn="ctr">
               <a:defRPr sz="3200">
                 <a:solidFill>
-                  <a:srgbClr val="009688"/>
-                </a:solidFill>
-                <a:latin typeface="맑은 고딕"/>
+                  <a:srgbClr val="E0F2FE"/>
+                </a:solidFill>
               </a:defRPr>
             </a:pPr>
             <a:r>
@@ -3222,14 +3255,14 @@
       </p:sp>
       <p:sp>
         <p:nvSpPr>
-          <p:cNvPr id="5" name="TextBox 4"/>
+          <p:cNvPr id="6" name="TextBox 5"/>
           <p:cNvSpPr txBox="1"/>
           <p:nvPr/>
         </p:nvSpPr>
         <p:spPr>
           <a:xfrm>
-            <a:off x="731520" y="4754880"/>
-            <a:ext cx="7680960" cy="1371600"/>
+            <a:off x="914400" y="4572000"/>
+            <a:ext cx="10058400" cy="1097280"/>
           </a:xfrm>
           <a:prstGeom prst="rect">
             <a:avLst/>
@@ -3243,50 +3276,26 @@
           <a:lstStyle/>
           <a:p>
             <a:pPr algn="ctr">
-              <a:spcAft>
-                <a:spcPts val="600"/>
-              </a:spcAft>
+              <a:defRPr sz="1800">
+                <a:solidFill>
+                  <a:srgbClr val="FFFFFF"/>
+                </a:solidFill>
+              </a:defRPr>
+            </a:pPr>
+            <a:r>
+              <a:t>팀원: 김길동 · 홍길동 · 박미금 · 김서연</a:t>
+            </a:r>
+          </a:p>
+          <a:p>
+            <a:pPr algn="ctr">
               <a:defRPr sz="1600">
                 <a:solidFill>
-                  <a:srgbClr val="F0F4F8"/>
-                </a:solidFill>
-                <a:latin typeface="맑은 고딕"/>
-              </a:defRPr>
-            </a:pPr>
-            <a:r>
-              <a:t>발표 시간: 20분  |  슬라이드: 10장</a:t>
-            </a:r>
-          </a:p>
-          <a:p>
-            <a:pPr algn="ctr">
-              <a:spcAft>
-                <a:spcPts val="600"/>
-              </a:spcAft>
-              <a:defRPr sz="1600">
-                <a:solidFill>
-                  <a:srgbClr val="F0F4F8"/>
-                </a:solidFill>
-                <a:latin typeface="맑은 고딕"/>
-              </a:defRPr>
-            </a:pPr>
-            <a:r>
-              <a:t>팀: 김길동 · 홍길동 · 박미금 · 김서연</a:t>
-            </a:r>
-          </a:p>
-          <a:p>
-            <a:pPr algn="ctr">
-              <a:spcAft>
-                <a:spcPts val="600"/>
-              </a:spcAft>
-              <a:defRPr sz="1600">
-                <a:solidFill>
-                  <a:srgbClr val="F0F4F8"/>
-                </a:solidFill>
-                <a:latin typeface="맑은 고딕"/>
-              </a:defRPr>
-            </a:pPr>
-            <a:r>
-              <a:t>2026년 7월</a:t>
+                  <a:srgbClr val="E0F2FE"/>
+                </a:solidFill>
+              </a:defRPr>
+            </a:pPr>
+            <a:r>
+              <a:t>발표 시간: 20분  |  2026</a:t>
             </a:r>
           </a:p>
         </p:txBody>
@@ -3302,14 +3311,6 @@
 <file path=ppt/slides/slide10.xml><?xml version="1.0" encoding="utf-8"?>
 <p:sld xmlns:a="http://schemas.openxmlformats.org/drawingml/2006/main" xmlns:p="http://schemas.openxmlformats.org/presentationml/2006/main" xmlns:r="http://schemas.openxmlformats.org/officeDocument/2006/relationships">
   <p:cSld>
-    <p:bg>
-      <p:bgPr>
-        <a:solidFill>
-          <a:srgbClr val="F0F4F8"/>
-        </a:solidFill>
-        <a:effectLst/>
-      </p:bgPr>
-    </p:bg>
     <p:spTree>
       <p:nvGrpSpPr>
         <p:cNvPr id="1" name=""/>
@@ -3326,13 +3327,13 @@
         <p:spPr>
           <a:xfrm>
             <a:off x="0" y="0"/>
-            <a:ext cx="9144000" cy="1005840"/>
+            <a:ext cx="12191695" cy="6858000"/>
           </a:xfrm>
           <a:prstGeom prst="rect">
             <a:avLst/>
           </a:prstGeom>
           <a:solidFill>
-            <a:srgbClr val="1A3A5C"/>
+            <a:srgbClr val="1A568E"/>
           </a:solidFill>
           <a:ln>
             <a:noFill/>
@@ -3368,8 +3369,8 @@
         </p:nvSpPr>
         <p:spPr>
           <a:xfrm>
-            <a:off x="457200" y="201168"/>
-            <a:ext cx="8229600" cy="640080"/>
+            <a:off x="914400" y="1645920"/>
+            <a:ext cx="10058400" cy="914400"/>
           </a:xfrm>
           <a:prstGeom prst="rect">
             <a:avLst/>
@@ -3382,16 +3383,15 @@
           </a:bodyPr>
           <a:lstStyle/>
           <a:p>
-            <a:pPr>
-              <a:defRPr sz="2800" b="1">
+            <a:pPr algn="ctr">
+              <a:defRPr sz="4000" b="1">
                 <a:solidFill>
                   <a:srgbClr val="FFFFFF"/>
                 </a:solidFill>
-                <a:latin typeface="맑은 고딕"/>
-              </a:defRPr>
-            </a:pPr>
-            <a:r>
-              <a:t>8~10. 구현 결과 · 배포 · 결론</a:t>
+              </a:defRPr>
+            </a:pPr>
+            <a:r>
+              <a:t>결론 및 Q&amp;A</a:t>
             </a:r>
           </a:p>
         </p:txBody>
@@ -3404,8 +3404,106 @@
         </p:nvSpPr>
         <p:spPr>
           <a:xfrm>
-            <a:off x="365760" y="1188720"/>
-            <a:ext cx="2651760" cy="411480"/>
+            <a:off x="2286000" y="2743200"/>
+            <a:ext cx="7772400" cy="2286000"/>
+          </a:xfrm>
+          <a:prstGeom prst="rect">
+            <a:avLst/>
+          </a:prstGeom>
+          <a:noFill/>
+        </p:spPr>
+        <p:txBody>
+          <a:bodyPr wrap="square">
+            <a:spAutoFit/>
+          </a:bodyPr>
+          <a:lstStyle/>
+          <a:p>
+            <a:pPr algn="l">
+              <a:spcAft>
+                <a:spcPts val="1000"/>
+              </a:spcAft>
+              <a:defRPr sz="1800">
+                <a:solidFill>
+                  <a:srgbClr val="E0F2FE"/>
+                </a:solidFill>
+              </a:defRPr>
+            </a:pPr>
+            <a:r>
+              <a:t>✓  부동산 매물 검색·등록·관리 웹 플랫폼 완성</a:t>
+            </a:r>
+          </a:p>
+          <a:p>
+            <a:pPr algn="l">
+              <a:spcAft>
+                <a:spcPts val="1000"/>
+              </a:spcAft>
+              <a:defRPr sz="1800">
+                <a:solidFill>
+                  <a:srgbClr val="E0F2FE"/>
+                </a:solidFill>
+              </a:defRPr>
+            </a:pPr>
+            <a:r>
+              <a:t>✓  Spring Boot + MySQL 기반 안정적 백엔드 구현</a:t>
+            </a:r>
+          </a:p>
+          <a:p>
+            <a:pPr algn="l">
+              <a:spcAft>
+                <a:spcPts val="1000"/>
+              </a:spcAft>
+              <a:defRPr sz="1800">
+                <a:solidFill>
+                  <a:srgbClr val="E0F2FE"/>
+                </a:solidFill>
+              </a:defRPr>
+            </a:pPr>
+            <a:r>
+              <a:t>✓  Bootstrap 5 반응형 프론트엔드 UI 적용</a:t>
+            </a:r>
+          </a:p>
+          <a:p>
+            <a:pPr algn="l">
+              <a:spcAft>
+                <a:spcPts val="1000"/>
+              </a:spcAft>
+              <a:defRPr sz="1800">
+                <a:solidFill>
+                  <a:srgbClr val="E0F2FE"/>
+                </a:solidFill>
+              </a:defRPr>
+            </a:pPr>
+            <a:r>
+              <a:t>✓  RPA/AI 연동으로 데이터 기반 분석 기능 확보</a:t>
+            </a:r>
+          </a:p>
+          <a:p>
+            <a:pPr algn="l">
+              <a:spcAft>
+                <a:spcPts val="1000"/>
+              </a:spcAft>
+              <a:defRPr sz="1800">
+                <a:solidFill>
+                  <a:srgbClr val="E0F2FE"/>
+                </a:solidFill>
+              </a:defRPr>
+            </a:pPr>
+            <a:r>
+              <a:t>✓  TiDB · Render/EC2 클라우드 배포 완료</a:t>
+            </a:r>
+          </a:p>
+        </p:txBody>
+      </p:sp>
+      <p:sp>
+        <p:nvSpPr>
+          <p:cNvPr id="5" name="TextBox 4"/>
+          <p:cNvSpPr txBox="1"/>
+          <p:nvPr/>
+        </p:nvSpPr>
+        <p:spPr>
+          <a:xfrm>
+            <a:off x="914400" y="5303520"/>
+            <a:ext cx="10058400" cy="731520"/>
           </a:xfrm>
           <a:prstGeom prst="rect">
             <a:avLst/>
@@ -3418,103 +3516,15 @@
           </a:bodyPr>
           <a:lstStyle/>
           <a:p>
-            <a:pPr>
-              <a:defRPr sz="1700" b="1">
-                <a:solidFill>
-                  <a:srgbClr val="009688"/>
-                </a:solidFill>
-                <a:latin typeface="맑은 고딕"/>
-              </a:defRPr>
-            </a:pPr>
-            <a:r>
-              <a:t>주요 구현 기능</a:t>
-            </a:r>
-          </a:p>
-        </p:txBody>
-      </p:sp>
-      <p:sp>
-        <p:nvSpPr>
-          <p:cNvPr id="5" name="TextBox 4"/>
-          <p:cNvSpPr txBox="1"/>
-          <p:nvPr/>
-        </p:nvSpPr>
-        <p:spPr>
-          <a:xfrm>
-            <a:off x="365760" y="1645920"/>
-            <a:ext cx="2651760" cy="4389120"/>
-          </a:xfrm>
-          <a:prstGeom prst="rect">
-            <a:avLst/>
-          </a:prstGeom>
-          <a:noFill/>
-        </p:spPr>
-        <p:txBody>
-          <a:bodyPr wrap="square">
-            <a:spAutoFit/>
-          </a:bodyPr>
-          <a:lstStyle/>
-          <a:p>
-            <a:pPr>
-              <a:spcAft>
-                <a:spcPts val="600"/>
-              </a:spcAft>
-              <a:defRPr sz="1300">
-                <a:solidFill>
-                  <a:srgbClr val="2C3E50"/>
-                </a:solidFill>
-                <a:latin typeface="맑은 고딕"/>
-              </a:defRPr>
-            </a:pPr>
-            <a:r>
-              <a:t>• 매물 검색·상세·등록·수정·삭제</a:t>
-            </a:r>
-          </a:p>
-          <a:p>
-            <a:pPr>
-              <a:spcAft>
-                <a:spcPts val="600"/>
-              </a:spcAft>
-              <a:defRPr sz="1300">
-                <a:solidFill>
-                  <a:srgbClr val="2C3E50"/>
-                </a:solidFill>
-                <a:latin typeface="맑은 고딕"/>
-              </a:defRPr>
-            </a:pPr>
-            <a:r>
-              <a:t>• 회원가입/로그인 (BCrypt 암호화)</a:t>
-            </a:r>
-          </a:p>
-          <a:p>
-            <a:pPr>
-              <a:spcAft>
-                <a:spcPts val="600"/>
-              </a:spcAft>
-              <a:defRPr sz="1300">
-                <a:solidFill>
-                  <a:srgbClr val="2C3E50"/>
-                </a:solidFill>
-                <a:latin typeface="맑은 고딕"/>
-              </a:defRPr>
-            </a:pPr>
-            <a:r>
-              <a:t>• 관리자 권한별 페이지 접근 제어</a:t>
-            </a:r>
-          </a:p>
-          <a:p>
-            <a:pPr>
-              <a:spcAft>
-                <a:spcPts val="600"/>
-              </a:spcAft>
-              <a:defRPr sz="1300">
-                <a:solidFill>
-                  <a:srgbClr val="2C3E50"/>
-                </a:solidFill>
-                <a:latin typeface="맑은 고딕"/>
-              </a:defRPr>
-            </a:pPr>
-            <a:r>
-              <a:t>• RPA 데이터 수집 + AI 시세 분석</a:t>
+            <a:pPr algn="ctr">
+              <a:defRPr sz="2800" b="1">
+                <a:solidFill>
+                  <a:srgbClr val="00A87E"/>
+                </a:solidFill>
+              </a:defRPr>
+            </a:pPr>
+            <a:r>
+              <a:t>감사합니다  |  Q &amp; A</a:t>
             </a:r>
           </a:p>
         </p:txBody>
@@ -3527,8 +3537,8 @@
         </p:nvSpPr>
         <p:spPr>
           <a:xfrm>
-            <a:off x="3246120" y="1188720"/>
-            <a:ext cx="2651760" cy="411480"/>
+            <a:off x="914400" y="5943600"/>
+            <a:ext cx="10058400" cy="457200"/>
           </a:xfrm>
           <a:prstGeom prst="rect">
             <a:avLst/>
@@ -3541,226 +3551,15 @@
           </a:bodyPr>
           <a:lstStyle/>
           <a:p>
-            <a:pPr>
-              <a:defRPr sz="1700" b="1">
-                <a:solidFill>
-                  <a:srgbClr val="009688"/>
-                </a:solidFill>
-                <a:latin typeface="맑은 고딕"/>
-              </a:defRPr>
-            </a:pPr>
-            <a:r>
-              <a:t>배포 환경</a:t>
-            </a:r>
-          </a:p>
-        </p:txBody>
-      </p:sp>
-      <p:sp>
-        <p:nvSpPr>
-          <p:cNvPr id="7" name="TextBox 6"/>
-          <p:cNvSpPr txBox="1"/>
-          <p:nvPr/>
-        </p:nvSpPr>
-        <p:spPr>
-          <a:xfrm>
-            <a:off x="3246120" y="1645920"/>
-            <a:ext cx="2651760" cy="4389120"/>
-          </a:xfrm>
-          <a:prstGeom prst="rect">
-            <a:avLst/>
-          </a:prstGeom>
-          <a:noFill/>
-        </p:spPr>
-        <p:txBody>
-          <a:bodyPr wrap="square">
-            <a:spAutoFit/>
-          </a:bodyPr>
-          <a:lstStyle/>
-          <a:p>
-            <a:pPr>
-              <a:spcAft>
-                <a:spcPts val="600"/>
-              </a:spcAft>
-              <a:defRPr sz="1300">
-                <a:solidFill>
-                  <a:srgbClr val="2C3E50"/>
-                </a:solidFill>
-                <a:latin typeface="맑은 고딕"/>
-              </a:defRPr>
-            </a:pPr>
-            <a:r>
-              <a:t>• DB: TiDB (MySQL 호환 분산 DB)</a:t>
-            </a:r>
-          </a:p>
-          <a:p>
-            <a:pPr>
-              <a:spcAft>
-                <a:spcPts val="600"/>
-              </a:spcAft>
-              <a:defRPr sz="1300">
-                <a:solidFill>
-                  <a:srgbClr val="2C3E50"/>
-                </a:solidFill>
-                <a:latin typeface="맑은 고딕"/>
-              </a:defRPr>
-            </a:pPr>
-            <a:r>
-              <a:t>• 서버: Render 또는 AWS EC2</a:t>
-            </a:r>
-          </a:p>
-          <a:p>
-            <a:pPr>
-              <a:spcAft>
-                <a:spcPts val="600"/>
-              </a:spcAft>
-              <a:defRPr sz="1300">
-                <a:solidFill>
-                  <a:srgbClr val="2C3E50"/>
-                </a:solidFill>
-                <a:latin typeface="맑은 고딕"/>
-              </a:defRPr>
-            </a:pPr>
-            <a:r>
-              <a:t>• 빌드: Gradle → JAR/WAR 배포</a:t>
-            </a:r>
-          </a:p>
-          <a:p>
-            <a:pPr>
-              <a:spcAft>
-                <a:spcPts val="600"/>
-              </a:spcAft>
-              <a:defRPr sz="1300">
-                <a:solidFill>
-                  <a:srgbClr val="2C3E50"/>
-                </a:solidFill>
-                <a:latin typeface="맑은 고딕"/>
-              </a:defRPr>
-            </a:pPr>
-            <a:r>
-              <a:t>• HTTPS + 환경변수 기반 설정</a:t>
-            </a:r>
-          </a:p>
-        </p:txBody>
-      </p:sp>
-      <p:sp>
-        <p:nvSpPr>
-          <p:cNvPr id="8" name="TextBox 7"/>
-          <p:cNvSpPr txBox="1"/>
-          <p:nvPr/>
-        </p:nvSpPr>
-        <p:spPr>
-          <a:xfrm>
-            <a:off x="6126480" y="1188720"/>
-            <a:ext cx="2651760" cy="411480"/>
-          </a:xfrm>
-          <a:prstGeom prst="rect">
-            <a:avLst/>
-          </a:prstGeom>
-          <a:noFill/>
-        </p:spPr>
-        <p:txBody>
-          <a:bodyPr wrap="none">
-            <a:spAutoFit/>
-          </a:bodyPr>
-          <a:lstStyle/>
-          <a:p>
-            <a:pPr>
-              <a:defRPr sz="1700" b="1">
-                <a:solidFill>
-                  <a:srgbClr val="009688"/>
-                </a:solidFill>
-                <a:latin typeface="맑은 고딕"/>
-              </a:defRPr>
-            </a:pPr>
-            <a:r>
-              <a:t>성과 &amp; 향후</a:t>
-            </a:r>
-          </a:p>
-        </p:txBody>
-      </p:sp>
-      <p:sp>
-        <p:nvSpPr>
-          <p:cNvPr id="9" name="TextBox 8"/>
-          <p:cNvSpPr txBox="1"/>
-          <p:nvPr/>
-        </p:nvSpPr>
-        <p:spPr>
-          <a:xfrm>
-            <a:off x="6126480" y="1645920"/>
-            <a:ext cx="2651760" cy="4389120"/>
-          </a:xfrm>
-          <a:prstGeom prst="rect">
-            <a:avLst/>
-          </a:prstGeom>
-          <a:noFill/>
-        </p:spPr>
-        <p:txBody>
-          <a:bodyPr wrap="square">
-            <a:spAutoFit/>
-          </a:bodyPr>
-          <a:lstStyle/>
-          <a:p>
-            <a:pPr>
-              <a:spcAft>
-                <a:spcPts val="600"/>
-              </a:spcAft>
-              <a:defRPr sz="1300">
-                <a:solidFill>
-                  <a:srgbClr val="2C3E50"/>
-                </a:solidFill>
-                <a:latin typeface="맑은 고딕"/>
-              </a:defRPr>
-            </a:pPr>
-            <a:r>
-              <a:t>• Full-Stack 부동산 플랫폼 완성</a:t>
-            </a:r>
-          </a:p>
-          <a:p>
-            <a:pPr>
-              <a:spcAft>
-                <a:spcPts val="600"/>
-              </a:spcAft>
-              <a:defRPr sz="1300">
-                <a:solidFill>
-                  <a:srgbClr val="2C3E50"/>
-                </a:solidFill>
-                <a:latin typeface="맑은 고딕"/>
-              </a:defRPr>
-            </a:pPr>
-            <a:r>
-              <a:t>• 팀 4인 역할 분담 협업 경험</a:t>
-            </a:r>
-          </a:p>
-          <a:p>
-            <a:pPr>
-              <a:spcAft>
-                <a:spcPts val="600"/>
-              </a:spcAft>
-              <a:defRPr sz="1300">
-                <a:solidFill>
-                  <a:srgbClr val="2C3E50"/>
-                </a:solidFill>
-                <a:latin typeface="맑은 고딕"/>
-              </a:defRPr>
-            </a:pPr>
-            <a:r>
-              <a:t>• 향후: 실시간 알림, 지도 API, 모바일 앱</a:t>
-            </a:r>
-          </a:p>
-          <a:p>
-            <a:pPr>
-              <a:spcAft>
-                <a:spcPts val="600"/>
-              </a:spcAft>
-              <a:defRPr sz="1300">
-                <a:solidFill>
-                  <a:srgbClr val="2C3E50"/>
-                </a:solidFill>
-                <a:latin typeface="맑은 고딕"/>
-              </a:defRPr>
-            </a:pPr>
-            <a:r>
-              <a:t>• Q &amp; A — 감사합니다!</a:t>
+            <a:pPr algn="ctr">
+              <a:defRPr sz="1400">
+                <a:solidFill>
+                  <a:srgbClr val="FFFFFF"/>
+                </a:solidFill>
+              </a:defRPr>
+            </a:pPr>
+            <a:r>
+              <a:t>김길동 · 홍길동 · 박미금 · 김서연</a:t>
             </a:r>
           </a:p>
         </p:txBody>
@@ -3776,14 +3575,6 @@
 <file path=ppt/slides/slide2.xml><?xml version="1.0" encoding="utf-8"?>
 <p:sld xmlns:a="http://schemas.openxmlformats.org/drawingml/2006/main" xmlns:p="http://schemas.openxmlformats.org/presentationml/2006/main" xmlns:r="http://schemas.openxmlformats.org/officeDocument/2006/relationships">
   <p:cSld>
-    <p:bg>
-      <p:bgPr>
-        <a:solidFill>
-          <a:srgbClr val="F0F4F8"/>
-        </a:solidFill>
-        <a:effectLst/>
-      </p:bgPr>
-    </p:bg>
     <p:spTree>
       <p:nvGrpSpPr>
         <p:cNvPr id="1" name=""/>
@@ -3800,13 +3591,13 @@
         <p:spPr>
           <a:xfrm>
             <a:off x="0" y="0"/>
-            <a:ext cx="9144000" cy="1005840"/>
+            <a:ext cx="12191695" cy="6858000"/>
           </a:xfrm>
           <a:prstGeom prst="rect">
             <a:avLst/>
           </a:prstGeom>
           <a:solidFill>
-            <a:srgbClr val="1A3A5C"/>
+            <a:srgbClr val="F8FAFC"/>
           </a:solidFill>
           <a:ln>
             <a:noFill/>
@@ -3836,14 +3627,57 @@
       </p:sp>
       <p:sp>
         <p:nvSpPr>
-          <p:cNvPr id="3" name="TextBox 2"/>
+          <p:cNvPr id="3" name="Rectangle 2"/>
+          <p:cNvSpPr/>
+          <p:nvPr/>
+        </p:nvSpPr>
+        <p:spPr>
+          <a:xfrm>
+            <a:off x="0" y="0"/>
+            <a:ext cx="12191695" cy="109728"/>
+          </a:xfrm>
+          <a:prstGeom prst="rect">
+            <a:avLst/>
+          </a:prstGeom>
+          <a:solidFill>
+            <a:srgbClr val="1A568E"/>
+          </a:solidFill>
+          <a:ln>
+            <a:noFill/>
+          </a:ln>
+        </p:spPr>
+        <p:style>
+          <a:lnRef idx="1">
+            <a:schemeClr val="accent1"/>
+          </a:lnRef>
+          <a:fillRef idx="3">
+            <a:schemeClr val="accent1"/>
+          </a:fillRef>
+          <a:effectRef idx="2">
+            <a:schemeClr val="accent1"/>
+          </a:effectRef>
+          <a:fontRef idx="minor">
+            <a:schemeClr val="lt1"/>
+          </a:fontRef>
+        </p:style>
+        <p:txBody>
+          <a:bodyPr rtlCol="0" anchor="ctr"/>
+          <a:lstStyle/>
+          <a:p>
+            <a:pPr algn="ctr"/>
+          </a:p>
+        </p:txBody>
+      </p:sp>
+      <p:sp>
+        <p:nvSpPr>
+          <p:cNvPr id="4" name="TextBox 3"/>
           <p:cNvSpPr txBox="1"/>
           <p:nvPr/>
         </p:nvSpPr>
         <p:spPr>
           <a:xfrm>
-            <a:off x="457200" y="201168"/>
-            <a:ext cx="8229600" cy="640080"/>
+            <a:off x="731520" y="457200"/>
+            <a:ext cx="10515600" cy="914400"/>
           </a:xfrm>
           <a:prstGeom prst="rect">
             <a:avLst/>
@@ -3857,29 +3691,221 @@
           <a:lstStyle/>
           <a:p>
             <a:pPr>
-              <a:defRPr sz="2800" b="1">
-                <a:solidFill>
-                  <a:srgbClr val="FFFFFF"/>
-                </a:solidFill>
-                <a:latin typeface="맑은 고딕"/>
-              </a:defRPr>
-            </a:pPr>
-            <a:r>
-              <a:t>목차 (Agenda)</a:t>
-            </a:r>
-          </a:p>
-        </p:txBody>
-      </p:sp>
-      <p:sp>
-        <p:nvSpPr>
-          <p:cNvPr id="4" name="TextBox 3"/>
+              <a:defRPr sz="3200" b="1">
+                <a:solidFill>
+                  <a:srgbClr val="1A568E"/>
+                </a:solidFill>
+              </a:defRPr>
+            </a:pPr>
+            <a:r>
+              <a:t>구성원 소개</a:t>
+            </a:r>
+          </a:p>
+        </p:txBody>
+      </p:sp>
+      <p:sp>
+        <p:nvSpPr>
+          <p:cNvPr id="5" name="TextBox 4"/>
           <p:cNvSpPr txBox="1"/>
           <p:nvPr/>
         </p:nvSpPr>
         <p:spPr>
           <a:xfrm>
-            <a:off x="548640" y="1371600"/>
-            <a:ext cx="8046720" cy="5029200"/>
+            <a:off x="731520" y="1234440"/>
+            <a:ext cx="10515600" cy="457200"/>
+          </a:xfrm>
+          <a:prstGeom prst="rect">
+            <a:avLst/>
+          </a:prstGeom>
+          <a:noFill/>
+        </p:spPr>
+        <p:txBody>
+          <a:bodyPr wrap="none">
+            <a:spAutoFit/>
+          </a:bodyPr>
+          <a:lstStyle/>
+          <a:p>
+            <a:pPr>
+              <a:defRPr sz="1600">
+                <a:solidFill>
+                  <a:srgbClr val="64748B"/>
+                </a:solidFill>
+              </a:defRPr>
+            </a:pPr>
+            <a:r>
+              <a:t>Team Members</a:t>
+            </a:r>
+          </a:p>
+        </p:txBody>
+      </p:sp>
+      <p:sp>
+        <p:nvSpPr>
+          <p:cNvPr id="6" name="TextBox 5"/>
+          <p:cNvSpPr txBox="1"/>
+          <p:nvPr/>
+        </p:nvSpPr>
+        <p:spPr>
+          <a:xfrm>
+            <a:off x="10972800" y="6400800"/>
+            <a:ext cx="1097280" cy="320040"/>
+          </a:xfrm>
+          <a:prstGeom prst="rect">
+            <a:avLst/>
+          </a:prstGeom>
+          <a:noFill/>
+        </p:spPr>
+        <p:txBody>
+          <a:bodyPr wrap="none">
+            <a:spAutoFit/>
+          </a:bodyPr>
+          <a:lstStyle/>
+          <a:p>
+            <a:pPr algn="r">
+              <a:defRPr sz="1100">
+                <a:solidFill>
+                  <a:srgbClr val="64748B"/>
+                </a:solidFill>
+              </a:defRPr>
+            </a:pPr>
+            <a:r>
+              <a:t>2 / 10</a:t>
+            </a:r>
+          </a:p>
+        </p:txBody>
+      </p:sp>
+      <p:sp>
+        <p:nvSpPr>
+          <p:cNvPr id="7" name="Rounded Rectangle 6"/>
+          <p:cNvSpPr/>
+          <p:nvPr/>
+        </p:nvSpPr>
+        <p:spPr>
+          <a:xfrm>
+            <a:off x="731520" y="1828800"/>
+            <a:ext cx="5303520" cy="2011680"/>
+          </a:xfrm>
+          <a:prstGeom prst="roundRect">
+            <a:avLst/>
+          </a:prstGeom>
+          <a:solidFill>
+            <a:srgbClr val="FFFFFF"/>
+          </a:solidFill>
+          <a:ln w="12700">
+            <a:solidFill>
+              <a:srgbClr val="E2E8F0"/>
+            </a:solidFill>
+          </a:ln>
+        </p:spPr>
+        <p:style>
+          <a:lnRef idx="1">
+            <a:schemeClr val="accent1"/>
+          </a:lnRef>
+          <a:fillRef idx="3">
+            <a:schemeClr val="accent1"/>
+          </a:fillRef>
+          <a:effectRef idx="2">
+            <a:schemeClr val="accent1"/>
+          </a:effectRef>
+          <a:fontRef idx="minor">
+            <a:schemeClr val="lt1"/>
+          </a:fontRef>
+        </p:style>
+        <p:txBody>
+          <a:bodyPr rtlCol="0" anchor="ctr"/>
+          <a:lstStyle/>
+          <a:p>
+            <a:pPr algn="ctr"/>
+          </a:p>
+        </p:txBody>
+      </p:sp>
+      <p:sp>
+        <p:nvSpPr>
+          <p:cNvPr id="8" name="Rectangle 7"/>
+          <p:cNvSpPr/>
+          <p:nvPr/>
+        </p:nvSpPr>
+        <p:spPr>
+          <a:xfrm>
+            <a:off x="731520" y="1828800"/>
+            <a:ext cx="73152" cy="2011680"/>
+          </a:xfrm>
+          <a:prstGeom prst="rect">
+            <a:avLst/>
+          </a:prstGeom>
+          <a:solidFill>
+            <a:srgbClr val="1A568E"/>
+          </a:solidFill>
+          <a:ln>
+            <a:noFill/>
+          </a:ln>
+        </p:spPr>
+        <p:style>
+          <a:lnRef idx="1">
+            <a:schemeClr val="accent1"/>
+          </a:lnRef>
+          <a:fillRef idx="3">
+            <a:schemeClr val="accent1"/>
+          </a:fillRef>
+          <a:effectRef idx="2">
+            <a:schemeClr val="accent1"/>
+          </a:effectRef>
+          <a:fontRef idx="minor">
+            <a:schemeClr val="lt1"/>
+          </a:fontRef>
+        </p:style>
+        <p:txBody>
+          <a:bodyPr rtlCol="0" anchor="ctr"/>
+          <a:lstStyle/>
+          <a:p>
+            <a:pPr algn="ctr"/>
+          </a:p>
+        </p:txBody>
+      </p:sp>
+      <p:sp>
+        <p:nvSpPr>
+          <p:cNvPr id="9" name="TextBox 8"/>
+          <p:cNvSpPr txBox="1"/>
+          <p:nvPr/>
+        </p:nvSpPr>
+        <p:spPr>
+          <a:xfrm>
+            <a:off x="960120" y="2011680"/>
+            <a:ext cx="4937759" cy="457200"/>
+          </a:xfrm>
+          <a:prstGeom prst="rect">
+            <a:avLst/>
+          </a:prstGeom>
+          <a:noFill/>
+        </p:spPr>
+        <p:txBody>
+          <a:bodyPr wrap="none">
+            <a:spAutoFit/>
+          </a:bodyPr>
+          <a:lstStyle/>
+          <a:p>
+            <a:pPr>
+              <a:defRPr sz="1800" b="1">
+                <a:solidFill>
+                  <a:srgbClr val="1A568E"/>
+                </a:solidFill>
+              </a:defRPr>
+            </a:pPr>
+            <a:r>
+              <a:t>김길동</a:t>
+            </a:r>
+          </a:p>
+        </p:txBody>
+      </p:sp>
+      <p:sp>
+        <p:nvSpPr>
+          <p:cNvPr id="10" name="TextBox 9"/>
+          <p:cNvSpPr txBox="1"/>
+          <p:nvPr/>
+        </p:nvSpPr>
+        <p:spPr>
+          <a:xfrm>
+            <a:off x="960120" y="2423160"/>
+            <a:ext cx="4937759" cy="1280160"/>
           </a:xfrm>
           <a:prstGeom prst="rect">
             <a:avLst/>
@@ -3894,161 +3920,559 @@
           <a:p>
             <a:pPr>
               <a:spcAft>
-                <a:spcPts val="1000"/>
+                <a:spcPts val="400"/>
               </a:spcAft>
-              <a:defRPr sz="2000">
-                <a:solidFill>
-                  <a:srgbClr val="2C3E50"/>
-                </a:solidFill>
-                <a:latin typeface="맑은 고딕"/>
-              </a:defRPr>
-            </a:pPr>
-            <a:r>
-              <a:t>1. 프로젝트 개요</a:t>
+              <a:defRPr sz="1300">
+                <a:solidFill>
+                  <a:srgbClr val="64748B"/>
+                </a:solidFill>
+              </a:defRPr>
+            </a:pPr>
+            <a:r>
+              <a:t>팀장 / 백엔드 개발</a:t>
             </a:r>
           </a:p>
           <a:p>
             <a:pPr>
               <a:spcAft>
-                <a:spcPts val="1000"/>
+                <a:spcPts val="400"/>
               </a:spcAft>
-              <a:defRPr sz="2000">
-                <a:solidFill>
-                  <a:srgbClr val="2C3E50"/>
-                </a:solidFill>
-                <a:latin typeface="맑은 고딕"/>
-              </a:defRPr>
-            </a:pPr>
-            <a:r>
-              <a:t>2. 팀원 소개</a:t>
-            </a:r>
-          </a:p>
+              <a:defRPr sz="1300">
+                <a:solidFill>
+                  <a:srgbClr val="64748B"/>
+                </a:solidFill>
+              </a:defRPr>
+            </a:pPr>
+            <a:r>
+              <a:t>Spring Boot · API 설계 · DB 연동</a:t>
+            </a:r>
+          </a:p>
+        </p:txBody>
+      </p:sp>
+      <p:sp>
+        <p:nvSpPr>
+          <p:cNvPr id="11" name="Rounded Rectangle 10"/>
+          <p:cNvSpPr/>
+          <p:nvPr/>
+        </p:nvSpPr>
+        <p:spPr>
+          <a:xfrm>
+            <a:off x="6309359" y="1828800"/>
+            <a:ext cx="5303520" cy="2011680"/>
+          </a:xfrm>
+          <a:prstGeom prst="roundRect">
+            <a:avLst/>
+          </a:prstGeom>
+          <a:solidFill>
+            <a:srgbClr val="FFFFFF"/>
+          </a:solidFill>
+          <a:ln w="12700">
+            <a:solidFill>
+              <a:srgbClr val="E2E8F0"/>
+            </a:solidFill>
+          </a:ln>
+        </p:spPr>
+        <p:style>
+          <a:lnRef idx="1">
+            <a:schemeClr val="accent1"/>
+          </a:lnRef>
+          <a:fillRef idx="3">
+            <a:schemeClr val="accent1"/>
+          </a:fillRef>
+          <a:effectRef idx="2">
+            <a:schemeClr val="accent1"/>
+          </a:effectRef>
+          <a:fontRef idx="minor">
+            <a:schemeClr val="lt1"/>
+          </a:fontRef>
+        </p:style>
+        <p:txBody>
+          <a:bodyPr rtlCol="0" anchor="ctr"/>
+          <a:lstStyle/>
+          <a:p>
+            <a:pPr algn="ctr"/>
+          </a:p>
+        </p:txBody>
+      </p:sp>
+      <p:sp>
+        <p:nvSpPr>
+          <p:cNvPr id="12" name="Rectangle 11"/>
+          <p:cNvSpPr/>
+          <p:nvPr/>
+        </p:nvSpPr>
+        <p:spPr>
+          <a:xfrm>
+            <a:off x="6309359" y="1828800"/>
+            <a:ext cx="73152" cy="2011680"/>
+          </a:xfrm>
+          <a:prstGeom prst="rect">
+            <a:avLst/>
+          </a:prstGeom>
+          <a:solidFill>
+            <a:srgbClr val="2E86AB"/>
+          </a:solidFill>
+          <a:ln>
+            <a:noFill/>
+          </a:ln>
+        </p:spPr>
+        <p:style>
+          <a:lnRef idx="1">
+            <a:schemeClr val="accent1"/>
+          </a:lnRef>
+          <a:fillRef idx="3">
+            <a:schemeClr val="accent1"/>
+          </a:fillRef>
+          <a:effectRef idx="2">
+            <a:schemeClr val="accent1"/>
+          </a:effectRef>
+          <a:fontRef idx="minor">
+            <a:schemeClr val="lt1"/>
+          </a:fontRef>
+        </p:style>
+        <p:txBody>
+          <a:bodyPr rtlCol="0" anchor="ctr"/>
+          <a:lstStyle/>
+          <a:p>
+            <a:pPr algn="ctr"/>
+          </a:p>
+        </p:txBody>
+      </p:sp>
+      <p:sp>
+        <p:nvSpPr>
+          <p:cNvPr id="13" name="TextBox 12"/>
+          <p:cNvSpPr txBox="1"/>
+          <p:nvPr/>
+        </p:nvSpPr>
+        <p:spPr>
+          <a:xfrm>
+            <a:off x="6537959" y="2011680"/>
+            <a:ext cx="4937759" cy="457200"/>
+          </a:xfrm>
+          <a:prstGeom prst="rect">
+            <a:avLst/>
+          </a:prstGeom>
+          <a:noFill/>
+        </p:spPr>
+        <p:txBody>
+          <a:bodyPr wrap="none">
+            <a:spAutoFit/>
+          </a:bodyPr>
+          <a:lstStyle/>
+          <a:p>
+            <a:pPr>
+              <a:defRPr sz="1800" b="1">
+                <a:solidFill>
+                  <a:srgbClr val="1A568E"/>
+                </a:solidFill>
+              </a:defRPr>
+            </a:pPr>
+            <a:r>
+              <a:t>홍길동</a:t>
+            </a:r>
+          </a:p>
+        </p:txBody>
+      </p:sp>
+      <p:sp>
+        <p:nvSpPr>
+          <p:cNvPr id="14" name="TextBox 13"/>
+          <p:cNvSpPr txBox="1"/>
+          <p:nvPr/>
+        </p:nvSpPr>
+        <p:spPr>
+          <a:xfrm>
+            <a:off x="6537959" y="2423160"/>
+            <a:ext cx="4937759" cy="1280160"/>
+          </a:xfrm>
+          <a:prstGeom prst="rect">
+            <a:avLst/>
+          </a:prstGeom>
+          <a:noFill/>
+        </p:spPr>
+        <p:txBody>
+          <a:bodyPr wrap="square">
+            <a:spAutoFit/>
+          </a:bodyPr>
+          <a:lstStyle/>
           <a:p>
             <a:pPr>
               <a:spcAft>
-                <a:spcPts val="1000"/>
+                <a:spcPts val="400"/>
               </a:spcAft>
-              <a:defRPr sz="2000">
-                <a:solidFill>
-                  <a:srgbClr val="2C3E50"/>
-                </a:solidFill>
-                <a:latin typeface="맑은 고딕"/>
-              </a:defRPr>
-            </a:pPr>
-            <a:r>
-              <a:t>3. 프로젝트 목표 및 범위</a:t>
+              <a:defRPr sz="1300">
+                <a:solidFill>
+                  <a:srgbClr val="64748B"/>
+                </a:solidFill>
+              </a:defRPr>
+            </a:pPr>
+            <a:r>
+              <a:t>프론트엔드 개발</a:t>
             </a:r>
           </a:p>
           <a:p>
             <a:pPr>
               <a:spcAft>
-                <a:spcPts val="1000"/>
+                <a:spcPts val="400"/>
               </a:spcAft>
-              <a:defRPr sz="2000">
-                <a:solidFill>
-                  <a:srgbClr val="2C3E50"/>
-                </a:solidFill>
-                <a:latin typeface="맑은 고딕"/>
-              </a:defRPr>
-            </a:pPr>
-            <a:r>
-              <a:t>4. 시스템 아키텍처</a:t>
-            </a:r>
-          </a:p>
+              <a:defRPr sz="1300">
+                <a:solidFill>
+                  <a:srgbClr val="64748B"/>
+                </a:solidFill>
+              </a:defRPr>
+            </a:pPr>
+            <a:r>
+              <a:t>HTML · CSS · JS · Bootstrap 5 UI</a:t>
+            </a:r>
+          </a:p>
+        </p:txBody>
+      </p:sp>
+      <p:sp>
+        <p:nvSpPr>
+          <p:cNvPr id="15" name="Rounded Rectangle 14"/>
+          <p:cNvSpPr/>
+          <p:nvPr/>
+        </p:nvSpPr>
+        <p:spPr>
+          <a:xfrm>
+            <a:off x="731520" y="4114800"/>
+            <a:ext cx="5303520" cy="2011680"/>
+          </a:xfrm>
+          <a:prstGeom prst="roundRect">
+            <a:avLst/>
+          </a:prstGeom>
+          <a:solidFill>
+            <a:srgbClr val="FFFFFF"/>
+          </a:solidFill>
+          <a:ln w="12700">
+            <a:solidFill>
+              <a:srgbClr val="E2E8F0"/>
+            </a:solidFill>
+          </a:ln>
+        </p:spPr>
+        <p:style>
+          <a:lnRef idx="1">
+            <a:schemeClr val="accent1"/>
+          </a:lnRef>
+          <a:fillRef idx="3">
+            <a:schemeClr val="accent1"/>
+          </a:fillRef>
+          <a:effectRef idx="2">
+            <a:schemeClr val="accent1"/>
+          </a:effectRef>
+          <a:fontRef idx="minor">
+            <a:schemeClr val="lt1"/>
+          </a:fontRef>
+        </p:style>
+        <p:txBody>
+          <a:bodyPr rtlCol="0" anchor="ctr"/>
+          <a:lstStyle/>
+          <a:p>
+            <a:pPr algn="ctr"/>
+          </a:p>
+        </p:txBody>
+      </p:sp>
+      <p:sp>
+        <p:nvSpPr>
+          <p:cNvPr id="16" name="Rectangle 15"/>
+          <p:cNvSpPr/>
+          <p:nvPr/>
+        </p:nvSpPr>
+        <p:spPr>
+          <a:xfrm>
+            <a:off x="731520" y="4114800"/>
+            <a:ext cx="73152" cy="2011680"/>
+          </a:xfrm>
+          <a:prstGeom prst="rect">
+            <a:avLst/>
+          </a:prstGeom>
+          <a:solidFill>
+            <a:srgbClr val="00A87E"/>
+          </a:solidFill>
+          <a:ln>
+            <a:noFill/>
+          </a:ln>
+        </p:spPr>
+        <p:style>
+          <a:lnRef idx="1">
+            <a:schemeClr val="accent1"/>
+          </a:lnRef>
+          <a:fillRef idx="3">
+            <a:schemeClr val="accent1"/>
+          </a:fillRef>
+          <a:effectRef idx="2">
+            <a:schemeClr val="accent1"/>
+          </a:effectRef>
+          <a:fontRef idx="minor">
+            <a:schemeClr val="lt1"/>
+          </a:fontRef>
+        </p:style>
+        <p:txBody>
+          <a:bodyPr rtlCol="0" anchor="ctr"/>
+          <a:lstStyle/>
+          <a:p>
+            <a:pPr algn="ctr"/>
+          </a:p>
+        </p:txBody>
+      </p:sp>
+      <p:sp>
+        <p:nvSpPr>
+          <p:cNvPr id="17" name="TextBox 16"/>
+          <p:cNvSpPr txBox="1"/>
+          <p:nvPr/>
+        </p:nvSpPr>
+        <p:spPr>
+          <a:xfrm>
+            <a:off x="960120" y="4297680"/>
+            <a:ext cx="4937759" cy="457200"/>
+          </a:xfrm>
+          <a:prstGeom prst="rect">
+            <a:avLst/>
+          </a:prstGeom>
+          <a:noFill/>
+        </p:spPr>
+        <p:txBody>
+          <a:bodyPr wrap="none">
+            <a:spAutoFit/>
+          </a:bodyPr>
+          <a:lstStyle/>
+          <a:p>
+            <a:pPr>
+              <a:defRPr sz="1800" b="1">
+                <a:solidFill>
+                  <a:srgbClr val="1A568E"/>
+                </a:solidFill>
+              </a:defRPr>
+            </a:pPr>
+            <a:r>
+              <a:t>박미금</a:t>
+            </a:r>
+          </a:p>
+        </p:txBody>
+      </p:sp>
+      <p:sp>
+        <p:nvSpPr>
+          <p:cNvPr id="18" name="TextBox 17"/>
+          <p:cNvSpPr txBox="1"/>
+          <p:nvPr/>
+        </p:nvSpPr>
+        <p:spPr>
+          <a:xfrm>
+            <a:off x="960120" y="4709160"/>
+            <a:ext cx="4937759" cy="1280160"/>
+          </a:xfrm>
+          <a:prstGeom prst="rect">
+            <a:avLst/>
+          </a:prstGeom>
+          <a:noFill/>
+        </p:spPr>
+        <p:txBody>
+          <a:bodyPr wrap="square">
+            <a:spAutoFit/>
+          </a:bodyPr>
+          <a:lstStyle/>
           <a:p>
             <a:pPr>
               <a:spcAft>
-                <a:spcPts val="1000"/>
+                <a:spcPts val="400"/>
               </a:spcAft>
-              <a:defRPr sz="2000">
-                <a:solidFill>
-                  <a:srgbClr val="2C3E50"/>
-                </a:solidFill>
-                <a:latin typeface="맑은 고딕"/>
-              </a:defRPr>
-            </a:pPr>
-            <a:r>
-              <a:t>5. 프론트엔드 기술 스택</a:t>
+              <a:defRPr sz="1300">
+                <a:solidFill>
+                  <a:srgbClr val="64748B"/>
+                </a:solidFill>
+              </a:defRPr>
+            </a:pPr>
+            <a:r>
+              <a:t>인프라 / 배포</a:t>
             </a:r>
           </a:p>
           <a:p>
             <a:pPr>
               <a:spcAft>
-                <a:spcPts val="1000"/>
+                <a:spcPts val="400"/>
               </a:spcAft>
-              <a:defRPr sz="2000">
-                <a:solidFill>
-                  <a:srgbClr val="2C3E50"/>
-                </a:solidFill>
-                <a:latin typeface="맑은 고딕"/>
-              </a:defRPr>
-            </a:pPr>
-            <a:r>
-              <a:t>6. 백엔드 기술 스택</a:t>
-            </a:r>
-          </a:p>
+              <a:defRPr sz="1300">
+                <a:solidFill>
+                  <a:srgbClr val="64748B"/>
+                </a:solidFill>
+              </a:defRPr>
+            </a:pPr>
+            <a:r>
+              <a:t>Gradle 빌드 · TiDB · Render/EC2 배포</a:t>
+            </a:r>
+          </a:p>
+        </p:txBody>
+      </p:sp>
+      <p:sp>
+        <p:nvSpPr>
+          <p:cNvPr id="19" name="Rounded Rectangle 18"/>
+          <p:cNvSpPr/>
+          <p:nvPr/>
+        </p:nvSpPr>
+        <p:spPr>
+          <a:xfrm>
+            <a:off x="6309359" y="4114800"/>
+            <a:ext cx="5303520" cy="2011680"/>
+          </a:xfrm>
+          <a:prstGeom prst="roundRect">
+            <a:avLst/>
+          </a:prstGeom>
+          <a:solidFill>
+            <a:srgbClr val="FFFFFF"/>
+          </a:solidFill>
+          <a:ln w="12700">
+            <a:solidFill>
+              <a:srgbClr val="E2E8F0"/>
+            </a:solidFill>
+          </a:ln>
+        </p:spPr>
+        <p:style>
+          <a:lnRef idx="1">
+            <a:schemeClr val="accent1"/>
+          </a:lnRef>
+          <a:fillRef idx="3">
+            <a:schemeClr val="accent1"/>
+          </a:fillRef>
+          <a:effectRef idx="2">
+            <a:schemeClr val="accent1"/>
+          </a:effectRef>
+          <a:fontRef idx="minor">
+            <a:schemeClr val="lt1"/>
+          </a:fontRef>
+        </p:style>
+        <p:txBody>
+          <a:bodyPr rtlCol="0" anchor="ctr"/>
+          <a:lstStyle/>
+          <a:p>
+            <a:pPr algn="ctr"/>
+          </a:p>
+        </p:txBody>
+      </p:sp>
+      <p:sp>
+        <p:nvSpPr>
+          <p:cNvPr id="20" name="Rectangle 19"/>
+          <p:cNvSpPr/>
+          <p:nvPr/>
+        </p:nvSpPr>
+        <p:spPr>
+          <a:xfrm>
+            <a:off x="6309359" y="4114800"/>
+            <a:ext cx="73152" cy="2011680"/>
+          </a:xfrm>
+          <a:prstGeom prst="rect">
+            <a:avLst/>
+          </a:prstGeom>
+          <a:solidFill>
+            <a:srgbClr val="7C3AED"/>
+          </a:solidFill>
+          <a:ln>
+            <a:noFill/>
+          </a:ln>
+        </p:spPr>
+        <p:style>
+          <a:lnRef idx="1">
+            <a:schemeClr val="accent1"/>
+          </a:lnRef>
+          <a:fillRef idx="3">
+            <a:schemeClr val="accent1"/>
+          </a:fillRef>
+          <a:effectRef idx="2">
+            <a:schemeClr val="accent1"/>
+          </a:effectRef>
+          <a:fontRef idx="minor">
+            <a:schemeClr val="lt1"/>
+          </a:fontRef>
+        </p:style>
+        <p:txBody>
+          <a:bodyPr rtlCol="0" anchor="ctr"/>
+          <a:lstStyle/>
+          <a:p>
+            <a:pPr algn="ctr"/>
+          </a:p>
+        </p:txBody>
+      </p:sp>
+      <p:sp>
+        <p:nvSpPr>
+          <p:cNvPr id="21" name="TextBox 20"/>
+          <p:cNvSpPr txBox="1"/>
+          <p:nvPr/>
+        </p:nvSpPr>
+        <p:spPr>
+          <a:xfrm>
+            <a:off x="6537959" y="4297680"/>
+            <a:ext cx="4937759" cy="457200"/>
+          </a:xfrm>
+          <a:prstGeom prst="rect">
+            <a:avLst/>
+          </a:prstGeom>
+          <a:noFill/>
+        </p:spPr>
+        <p:txBody>
+          <a:bodyPr wrap="none">
+            <a:spAutoFit/>
+          </a:bodyPr>
+          <a:lstStyle/>
+          <a:p>
+            <a:pPr>
+              <a:defRPr sz="1800" b="1">
+                <a:solidFill>
+                  <a:srgbClr val="1A568E"/>
+                </a:solidFill>
+              </a:defRPr>
+            </a:pPr>
+            <a:r>
+              <a:t>김서연</a:t>
+            </a:r>
+          </a:p>
+        </p:txBody>
+      </p:sp>
+      <p:sp>
+        <p:nvSpPr>
+          <p:cNvPr id="22" name="TextBox 21"/>
+          <p:cNvSpPr txBox="1"/>
+          <p:nvPr/>
+        </p:nvSpPr>
+        <p:spPr>
+          <a:xfrm>
+            <a:off x="6537959" y="4709160"/>
+            <a:ext cx="4937759" cy="1280160"/>
+          </a:xfrm>
+          <a:prstGeom prst="rect">
+            <a:avLst/>
+          </a:prstGeom>
+          <a:noFill/>
+        </p:spPr>
+        <p:txBody>
+          <a:bodyPr wrap="square">
+            <a:spAutoFit/>
+          </a:bodyPr>
+          <a:lstStyle/>
           <a:p>
             <a:pPr>
               <a:spcAft>
-                <a:spcPts val="1000"/>
+                <a:spcPts val="400"/>
               </a:spcAft>
-              <a:defRPr sz="2000">
-                <a:solidFill>
-                  <a:srgbClr val="2C3E50"/>
-                </a:solidFill>
-                <a:latin typeface="맑은 고딕"/>
-              </a:defRPr>
-            </a:pPr>
-            <a:r>
-              <a:t>7. RPA + AI (Python) 기술</a:t>
+              <a:defRPr sz="1300">
+                <a:solidFill>
+                  <a:srgbClr val="64748B"/>
+                </a:solidFill>
+              </a:defRPr>
+            </a:pPr>
+            <a:r>
+              <a:t>RPA · AI 분석</a:t>
             </a:r>
           </a:p>
           <a:p>
             <a:pPr>
               <a:spcAft>
-                <a:spcPts val="1000"/>
+                <a:spcPts val="400"/>
               </a:spcAft>
-              <a:defRPr sz="2000">
-                <a:solidFill>
-                  <a:srgbClr val="2C3E50"/>
-                </a:solidFill>
-                <a:latin typeface="맑은 고딕"/>
-              </a:defRPr>
-            </a:pPr>
-            <a:r>
-              <a:t>8. 주요 기능 및 구현 결과</a:t>
-            </a:r>
-          </a:p>
-          <a:p>
-            <a:pPr>
-              <a:spcAft>
-                <a:spcPts val="1000"/>
-              </a:spcAft>
-              <a:defRPr sz="2000">
-                <a:solidFill>
-                  <a:srgbClr val="2C3E50"/>
-                </a:solidFill>
-                <a:latin typeface="맑은 고딕"/>
-              </a:defRPr>
-            </a:pPr>
-            <a:r>
-              <a:t>9. 배포 및 운영 환경</a:t>
-            </a:r>
-          </a:p>
-          <a:p>
-            <a:pPr>
-              <a:spcAft>
-                <a:spcPts val="1000"/>
-              </a:spcAft>
-              <a:defRPr sz="2000">
-                <a:solidFill>
-                  <a:srgbClr val="2C3E50"/>
-                </a:solidFill>
-                <a:latin typeface="맑은 고딕"/>
-              </a:defRPr>
-            </a:pPr>
-            <a:r>
-              <a:t>10. 결론 및 Q&amp;A</a:t>
+              <a:defRPr sz="1300">
+                <a:solidFill>
+                  <a:srgbClr val="64748B"/>
+                </a:solidFill>
+              </a:defRPr>
+            </a:pPr>
+            <a:r>
+              <a:t>Python · 데이터 수집 · 시각화</a:t>
             </a:r>
           </a:p>
         </p:txBody>
@@ -4064,14 +4488,6 @@
 <file path=ppt/slides/slide3.xml><?xml version="1.0" encoding="utf-8"?>
 <p:sld xmlns:a="http://schemas.openxmlformats.org/drawingml/2006/main" xmlns:p="http://schemas.openxmlformats.org/presentationml/2006/main" xmlns:r="http://schemas.openxmlformats.org/officeDocument/2006/relationships">
   <p:cSld>
-    <p:bg>
-      <p:bgPr>
-        <a:solidFill>
-          <a:srgbClr val="F0F4F8"/>
-        </a:solidFill>
-        <a:effectLst/>
-      </p:bgPr>
-    </p:bg>
     <p:spTree>
       <p:nvGrpSpPr>
         <p:cNvPr id="1" name=""/>
@@ -4088,13 +4504,13 @@
         <p:spPr>
           <a:xfrm>
             <a:off x="0" y="0"/>
-            <a:ext cx="9144000" cy="1005840"/>
+            <a:ext cx="12191695" cy="6858000"/>
           </a:xfrm>
           <a:prstGeom prst="rect">
             <a:avLst/>
           </a:prstGeom>
           <a:solidFill>
-            <a:srgbClr val="1A3A5C"/>
+            <a:srgbClr val="F8FAFC"/>
           </a:solidFill>
           <a:ln>
             <a:noFill/>
@@ -4124,14 +4540,57 @@
       </p:sp>
       <p:sp>
         <p:nvSpPr>
-          <p:cNvPr id="3" name="TextBox 2"/>
+          <p:cNvPr id="3" name="Rectangle 2"/>
+          <p:cNvSpPr/>
+          <p:nvPr/>
+        </p:nvSpPr>
+        <p:spPr>
+          <a:xfrm>
+            <a:off x="0" y="0"/>
+            <a:ext cx="12191695" cy="109728"/>
+          </a:xfrm>
+          <a:prstGeom prst="rect">
+            <a:avLst/>
+          </a:prstGeom>
+          <a:solidFill>
+            <a:srgbClr val="1A568E"/>
+          </a:solidFill>
+          <a:ln>
+            <a:noFill/>
+          </a:ln>
+        </p:spPr>
+        <p:style>
+          <a:lnRef idx="1">
+            <a:schemeClr val="accent1"/>
+          </a:lnRef>
+          <a:fillRef idx="3">
+            <a:schemeClr val="accent1"/>
+          </a:fillRef>
+          <a:effectRef idx="2">
+            <a:schemeClr val="accent1"/>
+          </a:effectRef>
+          <a:fontRef idx="minor">
+            <a:schemeClr val="lt1"/>
+          </a:fontRef>
+        </p:style>
+        <p:txBody>
+          <a:bodyPr rtlCol="0" anchor="ctr"/>
+          <a:lstStyle/>
+          <a:p>
+            <a:pPr algn="ctr"/>
+          </a:p>
+        </p:txBody>
+      </p:sp>
+      <p:sp>
+        <p:nvSpPr>
+          <p:cNvPr id="4" name="TextBox 3"/>
           <p:cNvSpPr txBox="1"/>
           <p:nvPr/>
         </p:nvSpPr>
         <p:spPr>
           <a:xfrm>
-            <a:off x="457200" y="201168"/>
-            <a:ext cx="8229600" cy="640080"/>
+            <a:off x="731520" y="457200"/>
+            <a:ext cx="10515600" cy="914400"/>
           </a:xfrm>
           <a:prstGeom prst="rect">
             <a:avLst/>
@@ -4145,29 +4604,98 @@
           <a:lstStyle/>
           <a:p>
             <a:pPr>
-              <a:defRPr sz="2800" b="1">
-                <a:solidFill>
-                  <a:srgbClr val="FFFFFF"/>
-                </a:solidFill>
-                <a:latin typeface="맑은 고딕"/>
-              </a:defRPr>
-            </a:pPr>
-            <a:r>
-              <a:t>1. 프로젝트 개요</a:t>
-            </a:r>
-          </a:p>
-        </p:txBody>
-      </p:sp>
-      <p:sp>
-        <p:nvSpPr>
-          <p:cNvPr id="4" name="TextBox 3"/>
+              <a:defRPr sz="3200" b="1">
+                <a:solidFill>
+                  <a:srgbClr val="1A568E"/>
+                </a:solidFill>
+              </a:defRPr>
+            </a:pPr>
+            <a:r>
+              <a:t>프로젝트 개요</a:t>
+            </a:r>
+          </a:p>
+        </p:txBody>
+      </p:sp>
+      <p:sp>
+        <p:nvSpPr>
+          <p:cNvPr id="5" name="TextBox 4"/>
           <p:cNvSpPr txBox="1"/>
           <p:nvPr/>
         </p:nvSpPr>
         <p:spPr>
           <a:xfrm>
-            <a:off x="548640" y="1371600"/>
-            <a:ext cx="8046720" cy="5029200"/>
+            <a:off x="731520" y="1234440"/>
+            <a:ext cx="10515600" cy="457200"/>
+          </a:xfrm>
+          <a:prstGeom prst="rect">
+            <a:avLst/>
+          </a:prstGeom>
+          <a:noFill/>
+        </p:spPr>
+        <p:txBody>
+          <a:bodyPr wrap="none">
+            <a:spAutoFit/>
+          </a:bodyPr>
+          <a:lstStyle/>
+          <a:p>
+            <a:pPr>
+              <a:defRPr sz="1600">
+                <a:solidFill>
+                  <a:srgbClr val="64748B"/>
+                </a:solidFill>
+              </a:defRPr>
+            </a:pPr>
+            <a:r>
+              <a:t>Project Overview</a:t>
+            </a:r>
+          </a:p>
+        </p:txBody>
+      </p:sp>
+      <p:sp>
+        <p:nvSpPr>
+          <p:cNvPr id="6" name="TextBox 5"/>
+          <p:cNvSpPr txBox="1"/>
+          <p:nvPr/>
+        </p:nvSpPr>
+        <p:spPr>
+          <a:xfrm>
+            <a:off x="10972800" y="6400800"/>
+            <a:ext cx="1097280" cy="320040"/>
+          </a:xfrm>
+          <a:prstGeom prst="rect">
+            <a:avLst/>
+          </a:prstGeom>
+          <a:noFill/>
+        </p:spPr>
+        <p:txBody>
+          <a:bodyPr wrap="none">
+            <a:spAutoFit/>
+          </a:bodyPr>
+          <a:lstStyle/>
+          <a:p>
+            <a:pPr algn="r">
+              <a:defRPr sz="1100">
+                <a:solidFill>
+                  <a:srgbClr val="64748B"/>
+                </a:solidFill>
+              </a:defRPr>
+            </a:pPr>
+            <a:r>
+              <a:t>3 / 10</a:t>
+            </a:r>
+          </a:p>
+        </p:txBody>
+      </p:sp>
+      <p:sp>
+        <p:nvSpPr>
+          <p:cNvPr id="7" name="TextBox 6"/>
+          <p:cNvSpPr txBox="1"/>
+          <p:nvPr/>
+        </p:nvSpPr>
+        <p:spPr>
+          <a:xfrm>
+            <a:off x="822960" y="1737360"/>
+            <a:ext cx="10058400" cy="4572000"/>
           </a:xfrm>
           <a:prstGeom prst="rect">
             <a:avLst/>
@@ -4182,145 +4710,91 @@
           <a:p>
             <a:pPr>
               <a:spcAft>
-                <a:spcPts val="1000"/>
+                <a:spcPts val="1400"/>
               </a:spcAft>
-              <a:defRPr sz="1700">
-                <a:solidFill>
-                  <a:srgbClr val="2C3E50"/>
-                </a:solidFill>
-                <a:latin typeface="맑은 고딕"/>
-              </a:defRPr>
-            </a:pPr>
-            <a:r>
-              <a:t>프로젝트명: 부동산 웹 플랫폼</a:t>
+              <a:defRPr sz="2200">
+                <a:solidFill>
+                  <a:srgbClr val="1E293B"/>
+                </a:solidFill>
+              </a:defRPr>
+            </a:pPr>
+            <a:r>
+              <a:t>목적: 부동산 매물 검색·등록·관리를 지원하는 통합 웹 플랫폼 구축</a:t>
             </a:r>
           </a:p>
           <a:p>
             <a:pPr>
               <a:spcAft>
-                <a:spcPts val="1000"/>
+                <a:spcPts val="1400"/>
               </a:spcAft>
-              <a:defRPr sz="1700">
-                <a:solidFill>
-                  <a:srgbClr val="2C3E50"/>
-                </a:solidFill>
-                <a:latin typeface="맑은 고딕"/>
-              </a:defRPr>
-            </a:pPr>
-            <a:r>
-              <a:t>목적: 매물 검색·등록·관리를 통합 제공하는 웹 서비스 구축</a:t>
+              <a:defRPr sz="2200">
+                <a:solidFill>
+                  <a:srgbClr val="1E293B"/>
+                </a:solidFill>
+              </a:defRPr>
+            </a:pPr>
+            <a:r>
+              <a:t>대상 사용자: 일반 사용자(매물 검색), 중개사/관리자(매물 등록·관리)</a:t>
             </a:r>
           </a:p>
           <a:p>
             <a:pPr>
               <a:spcAft>
-                <a:spcPts val="1000"/>
+                <a:spcPts val="1400"/>
               </a:spcAft>
-              <a:defRPr sz="1700">
-                <a:solidFill>
-                  <a:srgbClr val="2C3E50"/>
-                </a:solidFill>
-                <a:latin typeface="맑은 고딕"/>
-              </a:defRPr>
-            </a:pPr>
-            <a:r>
-              <a:t>대상 사용자: 일반 사용자(매물 탐색), 중개사/관리자(매물 관리)</a:t>
+              <a:defRPr sz="2200">
+                <a:solidFill>
+                  <a:srgbClr val="1E293B"/>
+                </a:solidFill>
+              </a:defRPr>
+            </a:pPr>
+            <a:r>
+              <a:t>핵심 가치: 직관적인 UI, 안정적인 백엔드, 데이터 기반 의사결정 지원</a:t>
             </a:r>
           </a:p>
           <a:p>
             <a:pPr>
               <a:spcAft>
-                <a:spcPts val="1000"/>
+                <a:spcPts val="1400"/>
               </a:spcAft>
-              <a:defRPr sz="1700">
-                <a:solidFill>
-                  <a:srgbClr val="2C3E50"/>
-                </a:solidFill>
-                <a:latin typeface="맑은 고딕"/>
-              </a:defRPr>
-            </a:pPr>
-            <a:r>
-              <a:t>개발 기간: 기획 → 설계 → 개발 → 테스트 → 배포</a:t>
+              <a:defRPr sz="2200">
+                <a:solidFill>
+                  <a:srgbClr val="1E293B"/>
+                </a:solidFill>
+              </a:defRPr>
+            </a:pPr>
+            <a:r>
+              <a:t>개발 방식: 프론트-백 분리형 MVC, Spring Security 기반 인증/인가</a:t>
             </a:r>
           </a:p>
           <a:p>
             <a:pPr>
               <a:spcAft>
-                <a:spcPts val="1000"/>
+                <a:spcPts val="1400"/>
               </a:spcAft>
-              <a:defRPr sz="1700">
-                <a:solidFill>
-                  <a:srgbClr val="2C3E50"/>
-                </a:solidFill>
-                <a:latin typeface="맑은 고딕"/>
-              </a:defRPr>
-            </a:pPr>
-            <a:r>
-              <a:t>핵심 가치:</a:t>
+              <a:defRPr sz="2200">
+                <a:solidFill>
+                  <a:srgbClr val="1E293B"/>
+                </a:solidFill>
+              </a:defRPr>
+            </a:pPr>
+            <a:r>
+              <a:t>부가 기능: RPA 자동화 + AI/데이터 분석으로 시장 트렌드 시각화</a:t>
             </a:r>
           </a:p>
           <a:p>
             <a:pPr>
               <a:spcAft>
-                <a:spcPts val="1000"/>
+                <a:spcPts val="1400"/>
               </a:spcAft>
-              <a:defRPr sz="1700">
-                <a:solidFill>
-                  <a:srgbClr val="2C3E50"/>
-                </a:solidFill>
-                <a:latin typeface="맑은 고딕"/>
-              </a:defRPr>
-            </a:pPr>
-            <a:r>
-              <a:t>   • 직관적인 UI/UX로 매물 정보 접근성 향상</a:t>
-            </a:r>
-          </a:p>
-          <a:p>
-            <a:pPr>
-              <a:spcAft>
-                <a:spcPts val="1000"/>
-              </a:spcAft>
-              <a:defRPr sz="1700">
-                <a:solidFill>
-                  <a:srgbClr val="2C3E50"/>
-                </a:solidFill>
-                <a:latin typeface="맑은 고딕"/>
-              </a:defRPr>
-            </a:pPr>
-            <a:r>
-              <a:t>   • Spring Security 기반 안전한 회원·권한 관리</a:t>
-            </a:r>
-          </a:p>
-          <a:p>
-            <a:pPr>
-              <a:spcAft>
-                <a:spcPts val="1000"/>
-              </a:spcAft>
-              <a:defRPr sz="1700">
-                <a:solidFill>
-                  <a:srgbClr val="2C3E50"/>
-                </a:solidFill>
-                <a:latin typeface="맑은 고딕"/>
-              </a:defRPr>
-            </a:pPr>
-            <a:r>
-              <a:t>   • RPA + AI로 부동산 데이터 수집·분석 자동화</a:t>
-            </a:r>
-          </a:p>
-          <a:p>
-            <a:pPr>
-              <a:spcAft>
-                <a:spcPts val="1000"/>
-              </a:spcAft>
-              <a:defRPr sz="1700">
-                <a:solidFill>
-                  <a:srgbClr val="2C3E50"/>
-                </a:solidFill>
-                <a:latin typeface="맑은 고딕"/>
-              </a:defRPr>
-            </a:pPr>
-            <a:r>
-              <a:t>   • 클라우드 배포를 통한 안정적 서비스 운영</a:t>
+              <a:defRPr sz="2200">
+                <a:solidFill>
+                  <a:srgbClr val="1E293B"/>
+                </a:solidFill>
+              </a:defRPr>
+            </a:pPr>
+            <a:r>
+              <a:t>산출물: 웹 애플리케이션, DB 스키마, 배포 환경, 발표 자료</a:t>
             </a:r>
           </a:p>
         </p:txBody>
@@ -4336,14 +4810,6 @@
 <file path=ppt/slides/slide4.xml><?xml version="1.0" encoding="utf-8"?>
 <p:sld xmlns:a="http://schemas.openxmlformats.org/drawingml/2006/main" xmlns:p="http://schemas.openxmlformats.org/presentationml/2006/main" xmlns:r="http://schemas.openxmlformats.org/officeDocument/2006/relationships">
   <p:cSld>
-    <p:bg>
-      <p:bgPr>
-        <a:solidFill>
-          <a:srgbClr val="F0F4F8"/>
-        </a:solidFill>
-        <a:effectLst/>
-      </p:bgPr>
-    </p:bg>
     <p:spTree>
       <p:nvGrpSpPr>
         <p:cNvPr id="1" name=""/>
@@ -4360,13 +4826,13 @@
         <p:spPr>
           <a:xfrm>
             <a:off x="0" y="0"/>
-            <a:ext cx="9144000" cy="1005840"/>
+            <a:ext cx="12191695" cy="6858000"/>
           </a:xfrm>
           <a:prstGeom prst="rect">
             <a:avLst/>
           </a:prstGeom>
           <a:solidFill>
-            <a:srgbClr val="1A3A5C"/>
+            <a:srgbClr val="F8FAFC"/>
           </a:solidFill>
           <a:ln>
             <a:noFill/>
@@ -4396,61 +4862,23 @@
       </p:sp>
       <p:sp>
         <p:nvSpPr>
-          <p:cNvPr id="3" name="TextBox 2"/>
-          <p:cNvSpPr txBox="1"/>
-          <p:nvPr/>
-        </p:nvSpPr>
-        <p:spPr>
-          <a:xfrm>
-            <a:off x="457200" y="201168"/>
-            <a:ext cx="8229600" cy="640080"/>
-          </a:xfrm>
-          <a:prstGeom prst="rect">
-            <a:avLst/>
-          </a:prstGeom>
-          <a:noFill/>
-        </p:spPr>
-        <p:txBody>
-          <a:bodyPr wrap="none">
-            <a:spAutoFit/>
-          </a:bodyPr>
-          <a:lstStyle/>
-          <a:p>
-            <a:pPr>
-              <a:defRPr sz="2800" b="1">
-                <a:solidFill>
-                  <a:srgbClr val="FFFFFF"/>
-                </a:solidFill>
-                <a:latin typeface="맑은 고딕"/>
-              </a:defRPr>
-            </a:pPr>
-            <a:r>
-              <a:t>2. 팀원 소개</a:t>
-            </a:r>
-          </a:p>
-        </p:txBody>
-      </p:sp>
-      <p:sp>
-        <p:nvSpPr>
-          <p:cNvPr id="4" name="Rounded Rectangle 3"/>
+          <p:cNvPr id="3" name="Rectangle 2"/>
           <p:cNvSpPr/>
           <p:nvPr/>
         </p:nvSpPr>
         <p:spPr>
           <a:xfrm>
-            <a:off x="411480" y="1371600"/>
-            <a:ext cx="1920240" cy="4114800"/>
-          </a:xfrm>
-          <a:prstGeom prst="roundRect">
+            <a:off x="0" y="0"/>
+            <a:ext cx="12191695" cy="109728"/>
+          </a:xfrm>
+          <a:prstGeom prst="rect">
             <a:avLst/>
           </a:prstGeom>
           <a:solidFill>
-            <a:srgbClr val="FFFFFF"/>
+            <a:srgbClr val="1A568E"/>
           </a:solidFill>
-          <a:ln w="19050">
-            <a:solidFill>
-              <a:srgbClr val="009688"/>
-            </a:solidFill>
+          <a:ln>
+            <a:noFill/>
           </a:ln>
         </p:spPr>
         <p:style>
@@ -4477,23 +4905,130 @@
       </p:sp>
       <p:sp>
         <p:nvSpPr>
-          <p:cNvPr id="5" name="Oval 4"/>
+          <p:cNvPr id="4" name="TextBox 3"/>
+          <p:cNvSpPr txBox="1"/>
+          <p:nvPr/>
+        </p:nvSpPr>
+        <p:spPr>
+          <a:xfrm>
+            <a:off x="731520" y="457200"/>
+            <a:ext cx="10515600" cy="914400"/>
+          </a:xfrm>
+          <a:prstGeom prst="rect">
+            <a:avLst/>
+          </a:prstGeom>
+          <a:noFill/>
+        </p:spPr>
+        <p:txBody>
+          <a:bodyPr wrap="none">
+            <a:spAutoFit/>
+          </a:bodyPr>
+          <a:lstStyle/>
+          <a:p>
+            <a:pPr>
+              <a:defRPr sz="3200" b="1">
+                <a:solidFill>
+                  <a:srgbClr val="1A568E"/>
+                </a:solidFill>
+              </a:defRPr>
+            </a:pPr>
+            <a:r>
+              <a:t>시스템 아키텍처</a:t>
+            </a:r>
+          </a:p>
+        </p:txBody>
+      </p:sp>
+      <p:sp>
+        <p:nvSpPr>
+          <p:cNvPr id="5" name="TextBox 4"/>
+          <p:cNvSpPr txBox="1"/>
+          <p:nvPr/>
+        </p:nvSpPr>
+        <p:spPr>
+          <a:xfrm>
+            <a:off x="731520" y="1234440"/>
+            <a:ext cx="10515600" cy="457200"/>
+          </a:xfrm>
+          <a:prstGeom prst="rect">
+            <a:avLst/>
+          </a:prstGeom>
+          <a:noFill/>
+        </p:spPr>
+        <p:txBody>
+          <a:bodyPr wrap="none">
+            <a:spAutoFit/>
+          </a:bodyPr>
+          <a:lstStyle/>
+          <a:p>
+            <a:pPr>
+              <a:defRPr sz="1600">
+                <a:solidFill>
+                  <a:srgbClr val="64748B"/>
+                </a:solidFill>
+              </a:defRPr>
+            </a:pPr>
+            <a:r>
+              <a:t>System Architecture</a:t>
+            </a:r>
+          </a:p>
+        </p:txBody>
+      </p:sp>
+      <p:sp>
+        <p:nvSpPr>
+          <p:cNvPr id="6" name="TextBox 5"/>
+          <p:cNvSpPr txBox="1"/>
+          <p:nvPr/>
+        </p:nvSpPr>
+        <p:spPr>
+          <a:xfrm>
+            <a:off x="10972800" y="6400800"/>
+            <a:ext cx="1097280" cy="320040"/>
+          </a:xfrm>
+          <a:prstGeom prst="rect">
+            <a:avLst/>
+          </a:prstGeom>
+          <a:noFill/>
+        </p:spPr>
+        <p:txBody>
+          <a:bodyPr wrap="none">
+            <a:spAutoFit/>
+          </a:bodyPr>
+          <a:lstStyle/>
+          <a:p>
+            <a:pPr algn="r">
+              <a:defRPr sz="1100">
+                <a:solidFill>
+                  <a:srgbClr val="64748B"/>
+                </a:solidFill>
+              </a:defRPr>
+            </a:pPr>
+            <a:r>
+              <a:t>4 / 10</a:t>
+            </a:r>
+          </a:p>
+        </p:txBody>
+      </p:sp>
+      <p:sp>
+        <p:nvSpPr>
+          <p:cNvPr id="7" name="Rounded Rectangle 6"/>
           <p:cNvSpPr/>
           <p:nvPr/>
         </p:nvSpPr>
         <p:spPr>
           <a:xfrm>
-            <a:off x="1005840" y="1645920"/>
-            <a:ext cx="731520" cy="731520"/>
-          </a:xfrm>
-          <a:prstGeom prst="ellipse">
+            <a:off x="2286000" y="1828800"/>
+            <a:ext cx="7772400" cy="960120"/>
+          </a:xfrm>
+          <a:prstGeom prst="roundRect">
             <a:avLst/>
           </a:prstGeom>
           <a:solidFill>
-            <a:srgbClr val="1A3A5C"/>
+            <a:srgbClr val="FFFFFF"/>
           </a:solidFill>
-          <a:ln>
-            <a:noFill/>
+          <a:ln w="25400">
+            <a:solidFill>
+              <a:srgbClr val="1A568E"/>
+            </a:solidFill>
           </a:ln>
         </p:spPr>
         <p:style>
@@ -4520,14 +5055,14 @@
       </p:sp>
       <p:sp>
         <p:nvSpPr>
-          <p:cNvPr id="6" name="TextBox 5"/>
+          <p:cNvPr id="8" name="TextBox 7"/>
           <p:cNvSpPr txBox="1"/>
           <p:nvPr/>
         </p:nvSpPr>
         <p:spPr>
           <a:xfrm>
-            <a:off x="1005840" y="1783080"/>
-            <a:ext cx="731520" cy="548640"/>
+            <a:off x="2468880" y="1920240"/>
+            <a:ext cx="3200400" cy="777240"/>
           </a:xfrm>
           <a:prstGeom prst="rect">
             <a:avLst/>
@@ -4540,30 +5075,29 @@
           </a:bodyPr>
           <a:lstStyle/>
           <a:p>
-            <a:pPr algn="ctr">
-              <a:defRPr sz="2400" b="1">
-                <a:solidFill>
-                  <a:srgbClr val="FFFFFF"/>
-                </a:solidFill>
-                <a:latin typeface="맑은 고딕"/>
-              </a:defRPr>
-            </a:pPr>
-            <a:r>
-              <a:t>김</a:t>
-            </a:r>
-          </a:p>
-        </p:txBody>
-      </p:sp>
-      <p:sp>
-        <p:nvSpPr>
-          <p:cNvPr id="7" name="TextBox 6"/>
+            <a:pPr>
+              <a:defRPr sz="1600" b="1">
+                <a:solidFill>
+                  <a:srgbClr val="1A568E"/>
+                </a:solidFill>
+              </a:defRPr>
+            </a:pPr>
+            <a:r>
+              <a:t>Presentation Layer</a:t>
+            </a:r>
+          </a:p>
+        </p:txBody>
+      </p:sp>
+      <p:sp>
+        <p:nvSpPr>
+          <p:cNvPr id="9" name="TextBox 8"/>
           <p:cNvSpPr txBox="1"/>
           <p:nvPr/>
         </p:nvSpPr>
         <p:spPr>
           <a:xfrm>
-            <a:off x="548640" y="2560320"/>
-            <a:ext cx="1645920" cy="2286000"/>
+            <a:off x="5669280" y="1920240"/>
+            <a:ext cx="4114800" cy="777240"/>
           </a:xfrm>
           <a:prstGeom prst="rect">
             <a:avLst/>
@@ -4571,70 +5105,38 @@
           <a:noFill/>
         </p:spPr>
         <p:txBody>
-          <a:bodyPr wrap="square">
+          <a:bodyPr wrap="none">
             <a:spAutoFit/>
           </a:bodyPr>
           <a:lstStyle/>
           <a:p>
-            <a:pPr algn="ctr">
-              <a:spcAft>
-                <a:spcPts val="800"/>
-              </a:spcAft>
-              <a:defRPr b="1" sz="1800">
-                <a:solidFill>
-                  <a:srgbClr val="1A3A5C"/>
-                </a:solidFill>
-                <a:latin typeface="맑은 고딕"/>
-              </a:defRPr>
-            </a:pPr>
-            <a:r>
-              <a:t>김길동</a:t>
-            </a:r>
-          </a:p>
-          <a:p>
-            <a:pPr algn="ctr">
-              <a:spcAft>
-                <a:spcPts val="800"/>
-              </a:spcAft>
-              <a:defRPr b="1" sz="1400">
-                <a:solidFill>
-                  <a:srgbClr val="009688"/>
-                </a:solidFill>
-                <a:latin typeface="맑은 고딕"/>
-              </a:defRPr>
-            </a:pPr>
-            <a:r>
-              <a:t>팀장 / 백엔드</a:t>
-            </a:r>
-          </a:p>
-          <a:p>
-            <a:pPr algn="ctr">
-              <a:spcAft>
-                <a:spcPts val="800"/>
-              </a:spcAft>
-              <a:defRPr b="0" sz="1200">
-                <a:solidFill>
-                  <a:srgbClr val="5D6D7E"/>
-                </a:solidFill>
-                <a:latin typeface="맑은 고딕"/>
-              </a:defRPr>
-            </a:pPr>
-            <a:r>
-              <a:t>Spring Boot API, DB 설계, 보안</a:t>
-            </a:r>
-          </a:p>
-        </p:txBody>
-      </p:sp>
-      <p:sp>
-        <p:nvSpPr>
-          <p:cNvPr id="8" name="Rounded Rectangle 7"/>
+            <a:pPr>
+              <a:defRPr sz="1400">
+                <a:solidFill>
+                  <a:srgbClr val="1E293B"/>
+                </a:solidFill>
+              </a:defRPr>
+            </a:pPr>
+            <a:r>
+              <a:t>HTML · CSS · JavaScript</a:t>
+            </a:r>
+            <a:br/>
+            <a:r>
+              <a:t>Bootstrap 5 · Flexbox</a:t>
+            </a:r>
+          </a:p>
+        </p:txBody>
+      </p:sp>
+      <p:sp>
+        <p:nvSpPr>
+          <p:cNvPr id="10" name="Rounded Rectangle 9"/>
           <p:cNvSpPr/>
           <p:nvPr/>
         </p:nvSpPr>
         <p:spPr>
           <a:xfrm>
-            <a:off x="2560320" y="1371600"/>
-            <a:ext cx="1920240" cy="4114800"/>
+            <a:off x="2286000" y="2971800"/>
+            <a:ext cx="7772400" cy="960120"/>
           </a:xfrm>
           <a:prstGeom prst="roundRect">
             <a:avLst/>
@@ -4642,9 +5144,9 @@
           <a:solidFill>
             <a:srgbClr val="FFFFFF"/>
           </a:solidFill>
-          <a:ln w="19050">
+          <a:ln w="25400">
             <a:solidFill>
-              <a:srgbClr val="009688"/>
+              <a:srgbClr val="2E86AB"/>
             </a:solidFill>
           </a:ln>
         </p:spPr>
@@ -4672,23 +5174,99 @@
       </p:sp>
       <p:sp>
         <p:nvSpPr>
-          <p:cNvPr id="9" name="Oval 8"/>
+          <p:cNvPr id="11" name="TextBox 10"/>
+          <p:cNvSpPr txBox="1"/>
+          <p:nvPr/>
+        </p:nvSpPr>
+        <p:spPr>
+          <a:xfrm>
+            <a:off x="2468880" y="3063240"/>
+            <a:ext cx="3200400" cy="777240"/>
+          </a:xfrm>
+          <a:prstGeom prst="rect">
+            <a:avLst/>
+          </a:prstGeom>
+          <a:noFill/>
+        </p:spPr>
+        <p:txBody>
+          <a:bodyPr wrap="none">
+            <a:spAutoFit/>
+          </a:bodyPr>
+          <a:lstStyle/>
+          <a:p>
+            <a:pPr>
+              <a:defRPr sz="1600" b="1">
+                <a:solidFill>
+                  <a:srgbClr val="2E86AB"/>
+                </a:solidFill>
+              </a:defRPr>
+            </a:pPr>
+            <a:r>
+              <a:t>Application Layer</a:t>
+            </a:r>
+          </a:p>
+        </p:txBody>
+      </p:sp>
+      <p:sp>
+        <p:nvSpPr>
+          <p:cNvPr id="12" name="TextBox 11"/>
+          <p:cNvSpPr txBox="1"/>
+          <p:nvPr/>
+        </p:nvSpPr>
+        <p:spPr>
+          <a:xfrm>
+            <a:off x="5669280" y="3063240"/>
+            <a:ext cx="4114800" cy="777240"/>
+          </a:xfrm>
+          <a:prstGeom prst="rect">
+            <a:avLst/>
+          </a:prstGeom>
+          <a:noFill/>
+        </p:spPr>
+        <p:txBody>
+          <a:bodyPr wrap="none">
+            <a:spAutoFit/>
+          </a:bodyPr>
+          <a:lstStyle/>
+          <a:p>
+            <a:pPr>
+              <a:defRPr sz="1400">
+                <a:solidFill>
+                  <a:srgbClr val="1E293B"/>
+                </a:solidFill>
+              </a:defRPr>
+            </a:pPr>
+            <a:r>
+              <a:t>Spring Boot 3.5.x · Thymeleaf</a:t>
+            </a:r>
+            <a:br/>
+            <a:r>
+              <a:t>Spring Security · DI</a:t>
+            </a:r>
+          </a:p>
+        </p:txBody>
+      </p:sp>
+      <p:sp>
+        <p:nvSpPr>
+          <p:cNvPr id="13" name="Rounded Rectangle 12"/>
           <p:cNvSpPr/>
           <p:nvPr/>
         </p:nvSpPr>
         <p:spPr>
           <a:xfrm>
-            <a:off x="3154680" y="1645920"/>
-            <a:ext cx="731520" cy="731520"/>
-          </a:xfrm>
-          <a:prstGeom prst="ellipse">
+            <a:off x="2286000" y="4114800"/>
+            <a:ext cx="7772400" cy="960120"/>
+          </a:xfrm>
+          <a:prstGeom prst="roundRect">
             <a:avLst/>
           </a:prstGeom>
           <a:solidFill>
-            <a:srgbClr val="1A3A5C"/>
+            <a:srgbClr val="FFFFFF"/>
           </a:solidFill>
-          <a:ln>
-            <a:noFill/>
+          <a:ln w="25400">
+            <a:solidFill>
+              <a:srgbClr val="00A87E"/>
+            </a:solidFill>
           </a:ln>
         </p:spPr>
         <p:style>
@@ -4715,14 +5293,14 @@
       </p:sp>
       <p:sp>
         <p:nvSpPr>
-          <p:cNvPr id="10" name="TextBox 9"/>
+          <p:cNvPr id="14" name="TextBox 13"/>
           <p:cNvSpPr txBox="1"/>
           <p:nvPr/>
         </p:nvSpPr>
         <p:spPr>
           <a:xfrm>
-            <a:off x="3154680" y="1783080"/>
-            <a:ext cx="731520" cy="548640"/>
+            <a:off x="2468880" y="4206240"/>
+            <a:ext cx="3200400" cy="777240"/>
           </a:xfrm>
           <a:prstGeom prst="rect">
             <a:avLst/>
@@ -4735,30 +5313,29 @@
           </a:bodyPr>
           <a:lstStyle/>
           <a:p>
-            <a:pPr algn="ctr">
-              <a:defRPr sz="2400" b="1">
-                <a:solidFill>
-                  <a:srgbClr val="FFFFFF"/>
-                </a:solidFill>
-                <a:latin typeface="맑은 고딕"/>
-              </a:defRPr>
-            </a:pPr>
-            <a:r>
-              <a:t>홍</a:t>
-            </a:r>
-          </a:p>
-        </p:txBody>
-      </p:sp>
-      <p:sp>
-        <p:nvSpPr>
-          <p:cNvPr id="11" name="TextBox 10"/>
+            <a:pPr>
+              <a:defRPr sz="1600" b="1">
+                <a:solidFill>
+                  <a:srgbClr val="00A87E"/>
+                </a:solidFill>
+              </a:defRPr>
+            </a:pPr>
+            <a:r>
+              <a:t>Data Layer</a:t>
+            </a:r>
+          </a:p>
+        </p:txBody>
+      </p:sp>
+      <p:sp>
+        <p:nvSpPr>
+          <p:cNvPr id="15" name="TextBox 14"/>
           <p:cNvSpPr txBox="1"/>
           <p:nvPr/>
         </p:nvSpPr>
         <p:spPr>
           <a:xfrm>
-            <a:off x="2697480" y="2560320"/>
-            <a:ext cx="1645920" cy="2286000"/>
+            <a:off x="5669280" y="4206240"/>
+            <a:ext cx="4114800" cy="777240"/>
           </a:xfrm>
           <a:prstGeom prst="rect">
             <a:avLst/>
@@ -4766,70 +5343,38 @@
           <a:noFill/>
         </p:spPr>
         <p:txBody>
-          <a:bodyPr wrap="square">
+          <a:bodyPr wrap="none">
             <a:spAutoFit/>
           </a:bodyPr>
           <a:lstStyle/>
           <a:p>
-            <a:pPr algn="ctr">
-              <a:spcAft>
-                <a:spcPts val="800"/>
-              </a:spcAft>
-              <a:defRPr b="1" sz="1800">
-                <a:solidFill>
-                  <a:srgbClr val="1A3A5C"/>
-                </a:solidFill>
-                <a:latin typeface="맑은 고딕"/>
-              </a:defRPr>
-            </a:pPr>
-            <a:r>
-              <a:t>홍길동</a:t>
-            </a:r>
-          </a:p>
-          <a:p>
-            <a:pPr algn="ctr">
-              <a:spcAft>
-                <a:spcPts val="800"/>
-              </a:spcAft>
-              <a:defRPr b="1" sz="1400">
-                <a:solidFill>
-                  <a:srgbClr val="009688"/>
-                </a:solidFill>
-                <a:latin typeface="맑은 고딕"/>
-              </a:defRPr>
-            </a:pPr>
-            <a:r>
-              <a:t>프론트엔드</a:t>
-            </a:r>
-          </a:p>
-          <a:p>
-            <a:pPr algn="ctr">
-              <a:spcAft>
-                <a:spcPts val="800"/>
-              </a:spcAft>
-              <a:defRPr b="0" sz="1200">
-                <a:solidFill>
-                  <a:srgbClr val="5D6D7E"/>
-                </a:solidFill>
-                <a:latin typeface="맑은 고딕"/>
-              </a:defRPr>
-            </a:pPr>
-            <a:r>
-              <a:t>HTML/CSS/JS, Bootstrap UI, 반응형 레이아웃</a:t>
-            </a:r>
-          </a:p>
-        </p:txBody>
-      </p:sp>
-      <p:sp>
-        <p:nvSpPr>
-          <p:cNvPr id="12" name="Rounded Rectangle 11"/>
+            <a:pPr>
+              <a:defRPr sz="1400">
+                <a:solidFill>
+                  <a:srgbClr val="1E293B"/>
+                </a:solidFill>
+              </a:defRPr>
+            </a:pPr>
+            <a:r>
+              <a:t>MySQL 8 · JDBC Template</a:t>
+            </a:r>
+            <a:br/>
+            <a:r>
+              <a:t>TiDB (배포 DB)</a:t>
+            </a:r>
+          </a:p>
+        </p:txBody>
+      </p:sp>
+      <p:sp>
+        <p:nvSpPr>
+          <p:cNvPr id="16" name="Rounded Rectangle 15"/>
           <p:cNvSpPr/>
           <p:nvPr/>
         </p:nvSpPr>
         <p:spPr>
           <a:xfrm>
-            <a:off x="4709160" y="1371600"/>
-            <a:ext cx="1920240" cy="4114800"/>
+            <a:off x="2286000" y="5257800"/>
+            <a:ext cx="7772400" cy="960120"/>
           </a:xfrm>
           <a:prstGeom prst="roundRect">
             <a:avLst/>
@@ -4837,9 +5382,9 @@
           <a:solidFill>
             <a:srgbClr val="FFFFFF"/>
           </a:solidFill>
-          <a:ln w="19050">
+          <a:ln w="25400">
             <a:solidFill>
-              <a:srgbClr val="009688"/>
+              <a:srgbClr val="7C3AED"/>
             </a:solidFill>
           </a:ln>
         </p:spPr>
@@ -4867,57 +5412,14 @@
       </p:sp>
       <p:sp>
         <p:nvSpPr>
-          <p:cNvPr id="13" name="Oval 12"/>
-          <p:cNvSpPr/>
-          <p:nvPr/>
-        </p:nvSpPr>
-        <p:spPr>
-          <a:xfrm>
-            <a:off x="5303520" y="1645920"/>
-            <a:ext cx="731520" cy="731520"/>
-          </a:xfrm>
-          <a:prstGeom prst="ellipse">
-            <a:avLst/>
-          </a:prstGeom>
-          <a:solidFill>
-            <a:srgbClr val="1A3A5C"/>
-          </a:solidFill>
-          <a:ln>
-            <a:noFill/>
-          </a:ln>
-        </p:spPr>
-        <p:style>
-          <a:lnRef idx="1">
-            <a:schemeClr val="accent1"/>
-          </a:lnRef>
-          <a:fillRef idx="3">
-            <a:schemeClr val="accent1"/>
-          </a:fillRef>
-          <a:effectRef idx="2">
-            <a:schemeClr val="accent1"/>
-          </a:effectRef>
-          <a:fontRef idx="minor">
-            <a:schemeClr val="lt1"/>
-          </a:fontRef>
-        </p:style>
-        <p:txBody>
-          <a:bodyPr rtlCol="0" anchor="ctr"/>
-          <a:lstStyle/>
-          <a:p>
-            <a:pPr algn="ctr"/>
-          </a:p>
-        </p:txBody>
-      </p:sp>
-      <p:sp>
-        <p:nvSpPr>
-          <p:cNvPr id="14" name="TextBox 13"/>
+          <p:cNvPr id="17" name="TextBox 16"/>
           <p:cNvSpPr txBox="1"/>
           <p:nvPr/>
         </p:nvSpPr>
         <p:spPr>
           <a:xfrm>
-            <a:off x="5303520" y="1783080"/>
-            <a:ext cx="731520" cy="548640"/>
+            <a:off x="2468880" y="5349240"/>
+            <a:ext cx="3200400" cy="777240"/>
           </a:xfrm>
           <a:prstGeom prst="rect">
             <a:avLst/>
@@ -4930,176 +5432,16 @@
           </a:bodyPr>
           <a:lstStyle/>
           <a:p>
-            <a:pPr algn="ctr">
-              <a:defRPr sz="2400" b="1">
-                <a:solidFill>
-                  <a:srgbClr val="FFFFFF"/>
-                </a:solidFill>
-                <a:latin typeface="맑은 고딕"/>
-              </a:defRPr>
-            </a:pPr>
-            <a:r>
-              <a:t>박</a:t>
-            </a:r>
-          </a:p>
-        </p:txBody>
-      </p:sp>
-      <p:sp>
-        <p:nvSpPr>
-          <p:cNvPr id="15" name="TextBox 14"/>
-          <p:cNvSpPr txBox="1"/>
-          <p:nvPr/>
-        </p:nvSpPr>
-        <p:spPr>
-          <a:xfrm>
-            <a:off x="4846320" y="2560320"/>
-            <a:ext cx="1645920" cy="2286000"/>
-          </a:xfrm>
-          <a:prstGeom prst="rect">
-            <a:avLst/>
-          </a:prstGeom>
-          <a:noFill/>
-        </p:spPr>
-        <p:txBody>
-          <a:bodyPr wrap="square">
-            <a:spAutoFit/>
-          </a:bodyPr>
-          <a:lstStyle/>
-          <a:p>
-            <a:pPr algn="ctr">
-              <a:spcAft>
-                <a:spcPts val="800"/>
-              </a:spcAft>
-              <a:defRPr b="1" sz="1800">
-                <a:solidFill>
-                  <a:srgbClr val="1A3A5C"/>
-                </a:solidFill>
-                <a:latin typeface="맑은 고딕"/>
-              </a:defRPr>
-            </a:pPr>
-            <a:r>
-              <a:t>박미금</a:t>
-            </a:r>
-          </a:p>
-          <a:p>
-            <a:pPr algn="ctr">
-              <a:spcAft>
-                <a:spcPts val="800"/>
-              </a:spcAft>
-              <a:defRPr b="1" sz="1400">
-                <a:solidFill>
-                  <a:srgbClr val="009688"/>
-                </a:solidFill>
-                <a:latin typeface="맑은 고딕"/>
-              </a:defRPr>
-            </a:pPr>
-            <a:r>
-              <a:t>풀스택 / DevOps</a:t>
-            </a:r>
-          </a:p>
-          <a:p>
-            <a:pPr algn="ctr">
-              <a:spcAft>
-                <a:spcPts val="800"/>
-              </a:spcAft>
-              <a:defRPr b="0" sz="1200">
-                <a:solidFill>
-                  <a:srgbClr val="5D6D7E"/>
-                </a:solidFill>
-                <a:latin typeface="맑은 고딕"/>
-              </a:defRPr>
-            </a:pPr>
-            <a:r>
-              <a:t>Gradle 빌드, 배포(TiDB·Render/EC2), CI/CD</a:t>
-            </a:r>
-          </a:p>
-        </p:txBody>
-      </p:sp>
-      <p:sp>
-        <p:nvSpPr>
-          <p:cNvPr id="16" name="Rounded Rectangle 15"/>
-          <p:cNvSpPr/>
-          <p:nvPr/>
-        </p:nvSpPr>
-        <p:spPr>
-          <a:xfrm>
-            <a:off x="6858000" y="1371600"/>
-            <a:ext cx="1920240" cy="4114800"/>
-          </a:xfrm>
-          <a:prstGeom prst="roundRect">
-            <a:avLst/>
-          </a:prstGeom>
-          <a:solidFill>
-            <a:srgbClr val="FFFFFF"/>
-          </a:solidFill>
-          <a:ln w="19050">
-            <a:solidFill>
-              <a:srgbClr val="009688"/>
-            </a:solidFill>
-          </a:ln>
-        </p:spPr>
-        <p:style>
-          <a:lnRef idx="1">
-            <a:schemeClr val="accent1"/>
-          </a:lnRef>
-          <a:fillRef idx="3">
-            <a:schemeClr val="accent1"/>
-          </a:fillRef>
-          <a:effectRef idx="2">
-            <a:schemeClr val="accent1"/>
-          </a:effectRef>
-          <a:fontRef idx="minor">
-            <a:schemeClr val="lt1"/>
-          </a:fontRef>
-        </p:style>
-        <p:txBody>
-          <a:bodyPr rtlCol="0" anchor="ctr"/>
-          <a:lstStyle/>
-          <a:p>
-            <a:pPr algn="ctr"/>
-          </a:p>
-        </p:txBody>
-      </p:sp>
-      <p:sp>
-        <p:nvSpPr>
-          <p:cNvPr id="17" name="Oval 16"/>
-          <p:cNvSpPr/>
-          <p:nvPr/>
-        </p:nvSpPr>
-        <p:spPr>
-          <a:xfrm>
-            <a:off x="7452360" y="1645920"/>
-            <a:ext cx="731520" cy="731520"/>
-          </a:xfrm>
-          <a:prstGeom prst="ellipse">
-            <a:avLst/>
-          </a:prstGeom>
-          <a:solidFill>
-            <a:srgbClr val="1A3A5C"/>
-          </a:solidFill>
-          <a:ln>
-            <a:noFill/>
-          </a:ln>
-        </p:spPr>
-        <p:style>
-          <a:lnRef idx="1">
-            <a:schemeClr val="accent1"/>
-          </a:lnRef>
-          <a:fillRef idx="3">
-            <a:schemeClr val="accent1"/>
-          </a:fillRef>
-          <a:effectRef idx="2">
-            <a:schemeClr val="accent1"/>
-          </a:effectRef>
-          <a:fontRef idx="minor">
-            <a:schemeClr val="lt1"/>
-          </a:fontRef>
-        </p:style>
-        <p:txBody>
-          <a:bodyPr rtlCol="0" anchor="ctr"/>
-          <a:lstStyle/>
-          <a:p>
-            <a:pPr algn="ctr"/>
+            <a:pPr>
+              <a:defRPr sz="1600" b="1">
+                <a:solidFill>
+                  <a:srgbClr val="7C3AED"/>
+                </a:solidFill>
+              </a:defRPr>
+            </a:pPr>
+            <a:r>
+              <a:t>Automation Layer</a:t>
+            </a:r>
           </a:p>
         </p:txBody>
       </p:sp>
@@ -5111,8 +5453,8 @@
         </p:nvSpPr>
         <p:spPr>
           <a:xfrm>
-            <a:off x="7452360" y="1783080"/>
-            <a:ext cx="731520" cy="548640"/>
+            <a:off x="5669280" y="5349240"/>
+            <a:ext cx="4114800" cy="777240"/>
           </a:xfrm>
           <a:prstGeom prst="rect">
             <a:avLst/>
@@ -5125,16 +5467,19 @@
           </a:bodyPr>
           <a:lstStyle/>
           <a:p>
-            <a:pPr algn="ctr">
-              <a:defRPr sz="2400" b="1">
-                <a:solidFill>
-                  <a:srgbClr val="FFFFFF"/>
-                </a:solidFill>
-                <a:latin typeface="맑은 고딕"/>
-              </a:defRPr>
-            </a:pPr>
-            <a:r>
-              <a:t>김</a:t>
+            <a:pPr>
+              <a:defRPr sz="1400">
+                <a:solidFill>
+                  <a:srgbClr val="1E293B"/>
+                </a:solidFill>
+              </a:defRPr>
+            </a:pPr>
+            <a:r>
+              <a:t>Python RPA · AI 분석</a:t>
+            </a:r>
+            <a:br/>
+            <a:r>
+              <a:t>NumPy · Pandas · Scikit-learn</a:t>
             </a:r>
           </a:p>
         </p:txBody>
@@ -5147,8 +5492,8 @@
         </p:nvSpPr>
         <p:spPr>
           <a:xfrm>
-            <a:off x="6995160" y="2560320"/>
-            <a:ext cx="1645920" cy="2286000"/>
+            <a:off x="5486400" y="2788920"/>
+            <a:ext cx="457200" cy="274320"/>
           </a:xfrm>
           <a:prstGeom prst="rect">
             <a:avLst/>
@@ -5156,56 +5501,149 @@
           <a:noFill/>
         </p:spPr>
         <p:txBody>
-          <a:bodyPr wrap="square">
+          <a:bodyPr wrap="none">
             <a:spAutoFit/>
           </a:bodyPr>
           <a:lstStyle/>
           <a:p>
             <a:pPr algn="ctr">
-              <a:spcAft>
-                <a:spcPts val="800"/>
-              </a:spcAft>
-              <a:defRPr b="1" sz="1800">
-                <a:solidFill>
-                  <a:srgbClr val="1A3A5C"/>
-                </a:solidFill>
-                <a:latin typeface="맑은 고딕"/>
-              </a:defRPr>
-            </a:pPr>
-            <a:r>
-              <a:t>김서연</a:t>
-            </a:r>
-          </a:p>
+              <a:defRPr sz="1400">
+                <a:solidFill>
+                  <a:srgbClr val="64748B"/>
+                </a:solidFill>
+              </a:defRPr>
+            </a:pPr>
+            <a:r>
+              <a:t>▼</a:t>
+            </a:r>
+          </a:p>
+        </p:txBody>
+      </p:sp>
+      <p:sp>
+        <p:nvSpPr>
+          <p:cNvPr id="20" name="TextBox 19"/>
+          <p:cNvSpPr txBox="1"/>
+          <p:nvPr/>
+        </p:nvSpPr>
+        <p:spPr>
+          <a:xfrm>
+            <a:off x="5486400" y="3931920"/>
+            <a:ext cx="457200" cy="274320"/>
+          </a:xfrm>
+          <a:prstGeom prst="rect">
+            <a:avLst/>
+          </a:prstGeom>
+          <a:noFill/>
+        </p:spPr>
+        <p:txBody>
+          <a:bodyPr wrap="none">
+            <a:spAutoFit/>
+          </a:bodyPr>
+          <a:lstStyle/>
           <a:p>
             <a:pPr algn="ctr">
-              <a:spcAft>
-                <a:spcPts val="800"/>
-              </a:spcAft>
-              <a:defRPr b="1" sz="1400">
-                <a:solidFill>
-                  <a:srgbClr val="009688"/>
-                </a:solidFill>
-                <a:latin typeface="맑은 고딕"/>
-              </a:defRPr>
-            </a:pPr>
-            <a:r>
-              <a:t>RPA + AI</a:t>
-            </a:r>
-          </a:p>
+              <a:defRPr sz="1400">
+                <a:solidFill>
+                  <a:srgbClr val="64748B"/>
+                </a:solidFill>
+              </a:defRPr>
+            </a:pPr>
+            <a:r>
+              <a:t>▼</a:t>
+            </a:r>
+          </a:p>
+        </p:txBody>
+      </p:sp>
+      <p:sp>
+        <p:nvSpPr>
+          <p:cNvPr id="21" name="TextBox 20"/>
+          <p:cNvSpPr txBox="1"/>
+          <p:nvPr/>
+        </p:nvSpPr>
+        <p:spPr>
+          <a:xfrm>
+            <a:off x="5486400" y="5074920"/>
+            <a:ext cx="457200" cy="274320"/>
+          </a:xfrm>
+          <a:prstGeom prst="rect">
+            <a:avLst/>
+          </a:prstGeom>
+          <a:noFill/>
+        </p:spPr>
+        <p:txBody>
+          <a:bodyPr wrap="none">
+            <a:spAutoFit/>
+          </a:bodyPr>
+          <a:lstStyle/>
           <a:p>
             <a:pPr algn="ctr">
-              <a:spcAft>
-                <a:spcPts val="800"/>
-              </a:spcAft>
-              <a:defRPr b="0" sz="1200">
-                <a:solidFill>
-                  <a:srgbClr val="5D6D7E"/>
-                </a:solidFill>
-                <a:latin typeface="맑은 고딕"/>
-              </a:defRPr>
-            </a:pPr>
-            <a:r>
-              <a:t>Python 데이터 수집·분석, 시각화, ML 모델</a:t>
+              <a:defRPr sz="1400">
+                <a:solidFill>
+                  <a:srgbClr val="64748B"/>
+                </a:solidFill>
+              </a:defRPr>
+            </a:pPr>
+            <a:r>
+              <a:t>▼</a:t>
+            </a:r>
+          </a:p>
+        </p:txBody>
+      </p:sp>
+      <p:sp>
+        <p:nvSpPr>
+          <p:cNvPr id="22" name="TextBox 21"/>
+          <p:cNvSpPr txBox="1"/>
+          <p:nvPr/>
+        </p:nvSpPr>
+        <p:spPr>
+          <a:xfrm>
+            <a:off x="731520" y="2286000"/>
+            <a:ext cx="1371600" cy="4114800"/>
+          </a:xfrm>
+          <a:prstGeom prst="rect">
+            <a:avLst/>
+          </a:prstGeom>
+          <a:noFill/>
+        </p:spPr>
+        <p:txBody>
+          <a:bodyPr wrap="none">
+            <a:spAutoFit/>
+          </a:bodyPr>
+          <a:lstStyle/>
+          <a:p>
+            <a:pPr>
+              <a:defRPr sz="1200">
+                <a:solidFill>
+                  <a:srgbClr val="64748B"/>
+                </a:solidFill>
+              </a:defRPr>
+            </a:pPr>
+            <a:r>
+              <a:t>Client</a:t>
+            </a:r>
+            <a:br/>
+            <a:r>
+              <a:t>  ↓</a:t>
+            </a:r>
+            <a:br/>
+            <a:r>
+              <a:t>Server</a:t>
+            </a:r>
+            <a:br/>
+            <a:r>
+              <a:t>  ↓</a:t>
+            </a:r>
+            <a:br/>
+            <a:r>
+              <a:t>Database</a:t>
+            </a:r>
+            <a:br/>
+            <a:r>
+              <a:t>  ↓</a:t>
+            </a:r>
+            <a:br/>
+            <a:r>
+              <a:t>RPA/AI</a:t>
             </a:r>
           </a:p>
         </p:txBody>
@@ -5221,14 +5659,6 @@
 <file path=ppt/slides/slide5.xml><?xml version="1.0" encoding="utf-8"?>
 <p:sld xmlns:a="http://schemas.openxmlformats.org/drawingml/2006/main" xmlns:p="http://schemas.openxmlformats.org/presentationml/2006/main" xmlns:r="http://schemas.openxmlformats.org/officeDocument/2006/relationships">
   <p:cSld>
-    <p:bg>
-      <p:bgPr>
-        <a:solidFill>
-          <a:srgbClr val="F0F4F8"/>
-        </a:solidFill>
-        <a:effectLst/>
-      </p:bgPr>
-    </p:bg>
     <p:spTree>
       <p:nvGrpSpPr>
         <p:cNvPr id="1" name=""/>
@@ -5245,13 +5675,13 @@
         <p:spPr>
           <a:xfrm>
             <a:off x="0" y="0"/>
-            <a:ext cx="9144000" cy="1005840"/>
+            <a:ext cx="12191695" cy="6858000"/>
           </a:xfrm>
           <a:prstGeom prst="rect">
             <a:avLst/>
           </a:prstGeom>
           <a:solidFill>
-            <a:srgbClr val="1A3A5C"/>
+            <a:srgbClr val="F8FAFC"/>
           </a:solidFill>
           <a:ln>
             <a:noFill/>
@@ -5281,14 +5711,57 @@
       </p:sp>
       <p:sp>
         <p:nvSpPr>
-          <p:cNvPr id="3" name="TextBox 2"/>
+          <p:cNvPr id="3" name="Rectangle 2"/>
+          <p:cNvSpPr/>
+          <p:nvPr/>
+        </p:nvSpPr>
+        <p:spPr>
+          <a:xfrm>
+            <a:off x="0" y="0"/>
+            <a:ext cx="12191695" cy="109728"/>
+          </a:xfrm>
+          <a:prstGeom prst="rect">
+            <a:avLst/>
+          </a:prstGeom>
+          <a:solidFill>
+            <a:srgbClr val="1A568E"/>
+          </a:solidFill>
+          <a:ln>
+            <a:noFill/>
+          </a:ln>
+        </p:spPr>
+        <p:style>
+          <a:lnRef idx="1">
+            <a:schemeClr val="accent1"/>
+          </a:lnRef>
+          <a:fillRef idx="3">
+            <a:schemeClr val="accent1"/>
+          </a:fillRef>
+          <a:effectRef idx="2">
+            <a:schemeClr val="accent1"/>
+          </a:effectRef>
+          <a:fontRef idx="minor">
+            <a:schemeClr val="lt1"/>
+          </a:fontRef>
+        </p:style>
+        <p:txBody>
+          <a:bodyPr rtlCol="0" anchor="ctr"/>
+          <a:lstStyle/>
+          <a:p>
+            <a:pPr algn="ctr"/>
+          </a:p>
+        </p:txBody>
+      </p:sp>
+      <p:sp>
+        <p:nvSpPr>
+          <p:cNvPr id="4" name="TextBox 3"/>
           <p:cNvSpPr txBox="1"/>
           <p:nvPr/>
         </p:nvSpPr>
         <p:spPr>
           <a:xfrm>
-            <a:off x="457200" y="201168"/>
-            <a:ext cx="8229600" cy="640080"/>
+            <a:off x="731520" y="457200"/>
+            <a:ext cx="10515600" cy="914400"/>
           </a:xfrm>
           <a:prstGeom prst="rect">
             <a:avLst/>
@@ -5302,29 +5775,28 @@
           <a:lstStyle/>
           <a:p>
             <a:pPr>
-              <a:defRPr sz="2800" b="1">
-                <a:solidFill>
-                  <a:srgbClr val="FFFFFF"/>
-                </a:solidFill>
-                <a:latin typeface="맑은 고딕"/>
-              </a:defRPr>
-            </a:pPr>
-            <a:r>
-              <a:t>3. 프로젝트 목표 및 범위</a:t>
-            </a:r>
-          </a:p>
-        </p:txBody>
-      </p:sp>
-      <p:sp>
-        <p:nvSpPr>
-          <p:cNvPr id="4" name="TextBox 3"/>
+              <a:defRPr sz="3200" b="1">
+                <a:solidFill>
+                  <a:srgbClr val="1A568E"/>
+                </a:solidFill>
+              </a:defRPr>
+            </a:pPr>
+            <a:r>
+              <a:t>프론트엔드 기술 스택</a:t>
+            </a:r>
+          </a:p>
+        </p:txBody>
+      </p:sp>
+      <p:sp>
+        <p:nvSpPr>
+          <p:cNvPr id="5" name="TextBox 4"/>
           <p:cNvSpPr txBox="1"/>
           <p:nvPr/>
         </p:nvSpPr>
         <p:spPr>
           <a:xfrm>
-            <a:off x="457200" y="1188720"/>
-            <a:ext cx="3840480" cy="457200"/>
+            <a:off x="731520" y="1234440"/>
+            <a:ext cx="10515600" cy="457200"/>
           </a:xfrm>
           <a:prstGeom prst="rect">
             <a:avLst/>
@@ -5338,29 +5810,186 @@
           <a:lstStyle/>
           <a:p>
             <a:pPr>
-              <a:defRPr sz="2000" b="1">
-                <a:solidFill>
-                  <a:srgbClr val="009688"/>
-                </a:solidFill>
-                <a:latin typeface="맑은 고딕"/>
-              </a:defRPr>
-            </a:pPr>
-            <a:r>
-              <a:t>프로젝트 목표</a:t>
-            </a:r>
-          </a:p>
-        </p:txBody>
-      </p:sp>
-      <p:sp>
-        <p:nvSpPr>
-          <p:cNvPr id="5" name="TextBox 4"/>
+              <a:defRPr sz="1600">
+                <a:solidFill>
+                  <a:srgbClr val="64748B"/>
+                </a:solidFill>
+              </a:defRPr>
+            </a:pPr>
+            <a:r>
+              <a:t>Frontend Stack</a:t>
+            </a:r>
+          </a:p>
+        </p:txBody>
+      </p:sp>
+      <p:sp>
+        <p:nvSpPr>
+          <p:cNvPr id="6" name="TextBox 5"/>
           <p:cNvSpPr txBox="1"/>
           <p:nvPr/>
         </p:nvSpPr>
         <p:spPr>
           <a:xfrm>
-            <a:off x="457200" y="1645920"/>
-            <a:ext cx="3840480" cy="4389120"/>
+            <a:off x="10972800" y="6400800"/>
+            <a:ext cx="1097280" cy="320040"/>
+          </a:xfrm>
+          <a:prstGeom prst="rect">
+            <a:avLst/>
+          </a:prstGeom>
+          <a:noFill/>
+        </p:spPr>
+        <p:txBody>
+          <a:bodyPr wrap="none">
+            <a:spAutoFit/>
+          </a:bodyPr>
+          <a:lstStyle/>
+          <a:p>
+            <a:pPr algn="r">
+              <a:defRPr sz="1100">
+                <a:solidFill>
+                  <a:srgbClr val="64748B"/>
+                </a:solidFill>
+              </a:defRPr>
+            </a:pPr>
+            <a:r>
+              <a:t>5 / 10</a:t>
+            </a:r>
+          </a:p>
+        </p:txBody>
+      </p:sp>
+      <p:sp>
+        <p:nvSpPr>
+          <p:cNvPr id="7" name="Rounded Rectangle 6"/>
+          <p:cNvSpPr/>
+          <p:nvPr/>
+        </p:nvSpPr>
+        <p:spPr>
+          <a:xfrm>
+            <a:off x="731520" y="1828800"/>
+            <a:ext cx="3474720" cy="4114800"/>
+          </a:xfrm>
+          <a:prstGeom prst="roundRect">
+            <a:avLst/>
+          </a:prstGeom>
+          <a:solidFill>
+            <a:srgbClr val="FFFFFF"/>
+          </a:solidFill>
+          <a:ln w="12700">
+            <a:solidFill>
+              <a:srgbClr val="E2E8F0"/>
+            </a:solidFill>
+          </a:ln>
+        </p:spPr>
+        <p:style>
+          <a:lnRef idx="1">
+            <a:schemeClr val="accent1"/>
+          </a:lnRef>
+          <a:fillRef idx="3">
+            <a:schemeClr val="accent1"/>
+          </a:fillRef>
+          <a:effectRef idx="2">
+            <a:schemeClr val="accent1"/>
+          </a:effectRef>
+          <a:fontRef idx="minor">
+            <a:schemeClr val="lt1"/>
+          </a:fontRef>
+        </p:style>
+        <p:txBody>
+          <a:bodyPr rtlCol="0" anchor="ctr"/>
+          <a:lstStyle/>
+          <a:p>
+            <a:pPr algn="ctr"/>
+          </a:p>
+        </p:txBody>
+      </p:sp>
+      <p:sp>
+        <p:nvSpPr>
+          <p:cNvPr id="8" name="Rectangle 7"/>
+          <p:cNvSpPr/>
+          <p:nvPr/>
+        </p:nvSpPr>
+        <p:spPr>
+          <a:xfrm>
+            <a:off x="731520" y="1828800"/>
+            <a:ext cx="73152" cy="4114800"/>
+          </a:xfrm>
+          <a:prstGeom prst="rect">
+            <a:avLst/>
+          </a:prstGeom>
+          <a:solidFill>
+            <a:srgbClr val="1A568E"/>
+          </a:solidFill>
+          <a:ln>
+            <a:noFill/>
+          </a:ln>
+        </p:spPr>
+        <p:style>
+          <a:lnRef idx="1">
+            <a:schemeClr val="accent1"/>
+          </a:lnRef>
+          <a:fillRef idx="3">
+            <a:schemeClr val="accent1"/>
+          </a:fillRef>
+          <a:effectRef idx="2">
+            <a:schemeClr val="accent1"/>
+          </a:effectRef>
+          <a:fontRef idx="minor">
+            <a:schemeClr val="lt1"/>
+          </a:fontRef>
+        </p:style>
+        <p:txBody>
+          <a:bodyPr rtlCol="0" anchor="ctr"/>
+          <a:lstStyle/>
+          <a:p>
+            <a:pPr algn="ctr"/>
+          </a:p>
+        </p:txBody>
+      </p:sp>
+      <p:sp>
+        <p:nvSpPr>
+          <p:cNvPr id="9" name="TextBox 8"/>
+          <p:cNvSpPr txBox="1"/>
+          <p:nvPr/>
+        </p:nvSpPr>
+        <p:spPr>
+          <a:xfrm>
+            <a:off x="960120" y="2011680"/>
+            <a:ext cx="3108960" cy="457200"/>
+          </a:xfrm>
+          <a:prstGeom prst="rect">
+            <a:avLst/>
+          </a:prstGeom>
+          <a:noFill/>
+        </p:spPr>
+        <p:txBody>
+          <a:bodyPr wrap="none">
+            <a:spAutoFit/>
+          </a:bodyPr>
+          <a:lstStyle/>
+          <a:p>
+            <a:pPr>
+              <a:defRPr sz="1800" b="1">
+                <a:solidFill>
+                  <a:srgbClr val="1A568E"/>
+                </a:solidFill>
+              </a:defRPr>
+            </a:pPr>
+            <a:r>
+              <a:t>마크업 &amp; 스타일</a:t>
+            </a:r>
+          </a:p>
+        </p:txBody>
+      </p:sp>
+      <p:sp>
+        <p:nvSpPr>
+          <p:cNvPr id="10" name="TextBox 9"/>
+          <p:cNvSpPr txBox="1"/>
+          <p:nvPr/>
+        </p:nvSpPr>
+        <p:spPr>
+          <a:xfrm>
+            <a:off x="960120" y="2423160"/>
+            <a:ext cx="3108960" cy="3383280"/>
           </a:xfrm>
           <a:prstGeom prst="rect">
             <a:avLst/>
@@ -5375,111 +6004,148 @@
           <a:p>
             <a:pPr>
               <a:spcAft>
-                <a:spcPts val="800"/>
+                <a:spcPts val="400"/>
               </a:spcAft>
-              <a:defRPr sz="1600">
-                <a:solidFill>
-                  <a:srgbClr val="2C3E50"/>
-                </a:solidFill>
-                <a:latin typeface="맑은 고딕"/>
-              </a:defRPr>
-            </a:pPr>
-            <a:r>
-              <a:t>• 매물 통합 검색·필터·상세 조회</a:t>
+              <a:defRPr sz="1300">
+                <a:solidFill>
+                  <a:srgbClr val="64748B"/>
+                </a:solidFill>
+              </a:defRPr>
+            </a:pPr>
+            <a:r>
+              <a:t>HTML5 — 시맨틱 구조</a:t>
             </a:r>
           </a:p>
           <a:p>
             <a:pPr>
               <a:spcAft>
-                <a:spcPts val="800"/>
+                <a:spcPts val="400"/>
               </a:spcAft>
-              <a:defRPr sz="1600">
-                <a:solidFill>
-                  <a:srgbClr val="2C3E50"/>
-                </a:solidFill>
-                <a:latin typeface="맑은 고딕"/>
-              </a:defRPr>
-            </a:pPr>
-            <a:r>
-              <a:t>• 회원가입/로그인 및 권한별 접근 제어</a:t>
+              <a:defRPr sz="1300">
+                <a:solidFill>
+                  <a:srgbClr val="64748B"/>
+                </a:solidFill>
+              </a:defRPr>
+            </a:pPr>
+            <a:r>
+              <a:t>CSS3 — 반응형 스타일링</a:t>
             </a:r>
           </a:p>
           <a:p>
             <a:pPr>
               <a:spcAft>
-                <a:spcPts val="800"/>
+                <a:spcPts val="400"/>
               </a:spcAft>
-              <a:defRPr sz="1600">
-                <a:solidFill>
-                  <a:srgbClr val="2C3E50"/>
-                </a:solidFill>
-                <a:latin typeface="맑은 고딕"/>
-              </a:defRPr>
-            </a:pPr>
-            <a:r>
-              <a:t>• 매물 등록·수정·삭제(CRUD) 관리</a:t>
-            </a:r>
-          </a:p>
-          <a:p>
-            <a:pPr>
-              <a:spcAft>
-                <a:spcPts val="800"/>
-              </a:spcAft>
-              <a:defRPr sz="1600">
-                <a:solidFill>
-                  <a:srgbClr val="2C3E50"/>
-                </a:solidFill>
-                <a:latin typeface="맑은 고딕"/>
-              </a:defRPr>
-            </a:pPr>
-            <a:r>
-              <a:t>• 관리자 대시보드 및 통계 제공</a:t>
-            </a:r>
-          </a:p>
-          <a:p>
-            <a:pPr>
-              <a:spcAft>
-                <a:spcPts val="800"/>
-              </a:spcAft>
-              <a:defRPr sz="1600">
-                <a:solidFill>
-                  <a:srgbClr val="2C3E50"/>
-                </a:solidFill>
-                <a:latin typeface="맑은 고딕"/>
-              </a:defRPr>
-            </a:pPr>
-            <a:r>
-              <a:t>• 부동산 시세·지역 데이터 AI 분석</a:t>
-            </a:r>
-          </a:p>
-          <a:p>
-            <a:pPr>
-              <a:spcAft>
-                <a:spcPts val="800"/>
-              </a:spcAft>
-              <a:defRPr sz="1600">
-                <a:solidFill>
-                  <a:srgbClr val="2C3E50"/>
-                </a:solidFill>
-                <a:latin typeface="맑은 고딕"/>
-              </a:defRPr>
-            </a:pPr>
-            <a:r>
-              <a:t>• RPA 기반 외부 매물 데이터 자동 수집</a:t>
-            </a:r>
-          </a:p>
-        </p:txBody>
-      </p:sp>
-      <p:sp>
-        <p:nvSpPr>
-          <p:cNvPr id="6" name="TextBox 5"/>
+              <a:defRPr sz="1300">
+                <a:solidFill>
+                  <a:srgbClr val="64748B"/>
+                </a:solidFill>
+              </a:defRPr>
+            </a:pPr>
+            <a:r>
+              <a:t>Flexbox — 유연한 레이아웃</a:t>
+            </a:r>
+          </a:p>
+        </p:txBody>
+      </p:sp>
+      <p:sp>
+        <p:nvSpPr>
+          <p:cNvPr id="11" name="Rounded Rectangle 10"/>
+          <p:cNvSpPr/>
+          <p:nvPr/>
+        </p:nvSpPr>
+        <p:spPr>
+          <a:xfrm>
+            <a:off x="4389120" y="1828800"/>
+            <a:ext cx="3474720" cy="4114800"/>
+          </a:xfrm>
+          <a:prstGeom prst="roundRect">
+            <a:avLst/>
+          </a:prstGeom>
+          <a:solidFill>
+            <a:srgbClr val="FFFFFF"/>
+          </a:solidFill>
+          <a:ln w="12700">
+            <a:solidFill>
+              <a:srgbClr val="E2E8F0"/>
+            </a:solidFill>
+          </a:ln>
+        </p:spPr>
+        <p:style>
+          <a:lnRef idx="1">
+            <a:schemeClr val="accent1"/>
+          </a:lnRef>
+          <a:fillRef idx="3">
+            <a:schemeClr val="accent1"/>
+          </a:fillRef>
+          <a:effectRef idx="2">
+            <a:schemeClr val="accent1"/>
+          </a:effectRef>
+          <a:fontRef idx="minor">
+            <a:schemeClr val="lt1"/>
+          </a:fontRef>
+        </p:style>
+        <p:txBody>
+          <a:bodyPr rtlCol="0" anchor="ctr"/>
+          <a:lstStyle/>
+          <a:p>
+            <a:pPr algn="ctr"/>
+          </a:p>
+        </p:txBody>
+      </p:sp>
+      <p:sp>
+        <p:nvSpPr>
+          <p:cNvPr id="12" name="Rectangle 11"/>
+          <p:cNvSpPr/>
+          <p:nvPr/>
+        </p:nvSpPr>
+        <p:spPr>
+          <a:xfrm>
+            <a:off x="4389120" y="1828800"/>
+            <a:ext cx="73152" cy="4114800"/>
+          </a:xfrm>
+          <a:prstGeom prst="rect">
+            <a:avLst/>
+          </a:prstGeom>
+          <a:solidFill>
+            <a:srgbClr val="2E86AB"/>
+          </a:solidFill>
+          <a:ln>
+            <a:noFill/>
+          </a:ln>
+        </p:spPr>
+        <p:style>
+          <a:lnRef idx="1">
+            <a:schemeClr val="accent1"/>
+          </a:lnRef>
+          <a:fillRef idx="3">
+            <a:schemeClr val="accent1"/>
+          </a:fillRef>
+          <a:effectRef idx="2">
+            <a:schemeClr val="accent1"/>
+          </a:effectRef>
+          <a:fontRef idx="minor">
+            <a:schemeClr val="lt1"/>
+          </a:fontRef>
+        </p:style>
+        <p:txBody>
+          <a:bodyPr rtlCol="0" anchor="ctr"/>
+          <a:lstStyle/>
+          <a:p>
+            <a:pPr algn="ctr"/>
+          </a:p>
+        </p:txBody>
+      </p:sp>
+      <p:sp>
+        <p:nvSpPr>
+          <p:cNvPr id="13" name="TextBox 12"/>
           <p:cNvSpPr txBox="1"/>
           <p:nvPr/>
         </p:nvSpPr>
         <p:spPr>
           <a:xfrm>
-            <a:off x="4754880" y="1188720"/>
-            <a:ext cx="3840480" cy="457200"/>
+            <a:off x="4617720" y="2011680"/>
+            <a:ext cx="3108960" cy="457200"/>
           </a:xfrm>
           <a:prstGeom prst="rect">
             <a:avLst/>
@@ -5493,29 +6159,28 @@
           <a:lstStyle/>
           <a:p>
             <a:pPr>
-              <a:defRPr sz="2000" b="1">
-                <a:solidFill>
-                  <a:srgbClr val="009688"/>
-                </a:solidFill>
-                <a:latin typeface="맑은 고딕"/>
-              </a:defRPr>
-            </a:pPr>
-            <a:r>
-              <a:t>개발 범위</a:t>
-            </a:r>
-          </a:p>
-        </p:txBody>
-      </p:sp>
-      <p:sp>
-        <p:nvSpPr>
-          <p:cNvPr id="7" name="TextBox 6"/>
+              <a:defRPr sz="1800" b="1">
+                <a:solidFill>
+                  <a:srgbClr val="1A568E"/>
+                </a:solidFill>
+              </a:defRPr>
+            </a:pPr>
+            <a:r>
+              <a:t>UI 프레임워크</a:t>
+            </a:r>
+          </a:p>
+        </p:txBody>
+      </p:sp>
+      <p:sp>
+        <p:nvSpPr>
+          <p:cNvPr id="14" name="TextBox 13"/>
           <p:cNvSpPr txBox="1"/>
           <p:nvPr/>
         </p:nvSpPr>
         <p:spPr>
           <a:xfrm>
-            <a:off x="4754880" y="1645920"/>
-            <a:ext cx="3840480" cy="4389120"/>
+            <a:off x="4617720" y="2423160"/>
+            <a:ext cx="3108960" cy="3383280"/>
           </a:xfrm>
           <a:prstGeom prst="rect">
             <a:avLst/>
@@ -5530,97 +6195,237 @@
           <a:p>
             <a:pPr>
               <a:spcAft>
-                <a:spcPts val="800"/>
+                <a:spcPts val="400"/>
               </a:spcAft>
-              <a:defRPr sz="1600">
-                <a:solidFill>
-                  <a:srgbClr val="2C3E50"/>
-                </a:solidFill>
-                <a:latin typeface="맑은 고딕"/>
-              </a:defRPr>
-            </a:pPr>
-            <a:r>
-              <a:t>• 웹 프론트: 반응형 UI (Bootstrap 5 + Flexbox)</a:t>
+              <a:defRPr sz="1300">
+                <a:solidFill>
+                  <a:srgbClr val="64748B"/>
+                </a:solidFill>
+              </a:defRPr>
+            </a:pPr>
+            <a:r>
+              <a:t>Bootstrap 5 — 컴포넌트 UI</a:t>
             </a:r>
           </a:p>
           <a:p>
             <a:pPr>
               <a:spcAft>
-                <a:spcPts val="800"/>
+                <a:spcPts val="400"/>
               </a:spcAft>
-              <a:defRPr sz="1600">
-                <a:solidFill>
-                  <a:srgbClr val="2C3E50"/>
-                </a:solidFill>
-                <a:latin typeface="맑은 고딕"/>
-              </a:defRPr>
-            </a:pPr>
-            <a:r>
-              <a:t>• 백엔드 API: Spring Boot REST + Thymeleaf</a:t>
+              <a:defRPr sz="1300">
+                <a:solidFill>
+                  <a:srgbClr val="64748B"/>
+                </a:solidFill>
+              </a:defRPr>
+            </a:pPr>
+            <a:r>
+              <a:t>그리드 &amp; 유틸리티 클래스</a:t>
             </a:r>
           </a:p>
           <a:p>
             <a:pPr>
               <a:spcAft>
-                <a:spcPts val="800"/>
+                <a:spcPts val="400"/>
               </a:spcAft>
-              <a:defRPr sz="1600">
-                <a:solidFill>
-                  <a:srgbClr val="2C3E50"/>
-                </a:solidFill>
-                <a:latin typeface="맑은 고딕"/>
-              </a:defRPr>
-            </a:pPr>
-            <a:r>
-              <a:t>• DB: MySQL 8 / TiDB 연동</a:t>
-            </a:r>
-          </a:p>
+              <a:defRPr sz="1300">
+                <a:solidFill>
+                  <a:srgbClr val="64748B"/>
+                </a:solidFill>
+              </a:defRPr>
+            </a:pPr>
+            <a:r>
+              <a:t>모바일 우선 반응형 디자인</a:t>
+            </a:r>
+          </a:p>
+        </p:txBody>
+      </p:sp>
+      <p:sp>
+        <p:nvSpPr>
+          <p:cNvPr id="15" name="Rounded Rectangle 14"/>
+          <p:cNvSpPr/>
+          <p:nvPr/>
+        </p:nvSpPr>
+        <p:spPr>
+          <a:xfrm>
+            <a:off x="8046720" y="1828800"/>
+            <a:ext cx="3474720" cy="4114800"/>
+          </a:xfrm>
+          <a:prstGeom prst="roundRect">
+            <a:avLst/>
+          </a:prstGeom>
+          <a:solidFill>
+            <a:srgbClr val="FFFFFF"/>
+          </a:solidFill>
+          <a:ln w="12700">
+            <a:solidFill>
+              <a:srgbClr val="E2E8F0"/>
+            </a:solidFill>
+          </a:ln>
+        </p:spPr>
+        <p:style>
+          <a:lnRef idx="1">
+            <a:schemeClr val="accent1"/>
+          </a:lnRef>
+          <a:fillRef idx="3">
+            <a:schemeClr val="accent1"/>
+          </a:fillRef>
+          <a:effectRef idx="2">
+            <a:schemeClr val="accent1"/>
+          </a:effectRef>
+          <a:fontRef idx="minor">
+            <a:schemeClr val="lt1"/>
+          </a:fontRef>
+        </p:style>
+        <p:txBody>
+          <a:bodyPr rtlCol="0" anchor="ctr"/>
+          <a:lstStyle/>
+          <a:p>
+            <a:pPr algn="ctr"/>
+          </a:p>
+        </p:txBody>
+      </p:sp>
+      <p:sp>
+        <p:nvSpPr>
+          <p:cNvPr id="16" name="Rectangle 15"/>
+          <p:cNvSpPr/>
+          <p:nvPr/>
+        </p:nvSpPr>
+        <p:spPr>
+          <a:xfrm>
+            <a:off x="8046720" y="1828800"/>
+            <a:ext cx="73152" cy="4114800"/>
+          </a:xfrm>
+          <a:prstGeom prst="rect">
+            <a:avLst/>
+          </a:prstGeom>
+          <a:solidFill>
+            <a:srgbClr val="00A87E"/>
+          </a:solidFill>
+          <a:ln>
+            <a:noFill/>
+          </a:ln>
+        </p:spPr>
+        <p:style>
+          <a:lnRef idx="1">
+            <a:schemeClr val="accent1"/>
+          </a:lnRef>
+          <a:fillRef idx="3">
+            <a:schemeClr val="accent1"/>
+          </a:fillRef>
+          <a:effectRef idx="2">
+            <a:schemeClr val="accent1"/>
+          </a:effectRef>
+          <a:fontRef idx="minor">
+            <a:schemeClr val="lt1"/>
+          </a:fontRef>
+        </p:style>
+        <p:txBody>
+          <a:bodyPr rtlCol="0" anchor="ctr"/>
+          <a:lstStyle/>
+          <a:p>
+            <a:pPr algn="ctr"/>
+          </a:p>
+        </p:txBody>
+      </p:sp>
+      <p:sp>
+        <p:nvSpPr>
+          <p:cNvPr id="17" name="TextBox 16"/>
+          <p:cNvSpPr txBox="1"/>
+          <p:nvPr/>
+        </p:nvSpPr>
+        <p:spPr>
+          <a:xfrm>
+            <a:off x="8275320" y="2011680"/>
+            <a:ext cx="3108960" cy="457200"/>
+          </a:xfrm>
+          <a:prstGeom prst="rect">
+            <a:avLst/>
+          </a:prstGeom>
+          <a:noFill/>
+        </p:spPr>
+        <p:txBody>
+          <a:bodyPr wrap="none">
+            <a:spAutoFit/>
+          </a:bodyPr>
+          <a:lstStyle/>
+          <a:p>
+            <a:pPr>
+              <a:defRPr sz="1800" b="1">
+                <a:solidFill>
+                  <a:srgbClr val="1A568E"/>
+                </a:solidFill>
+              </a:defRPr>
+            </a:pPr>
+            <a:r>
+              <a:t>인터랙션</a:t>
+            </a:r>
+          </a:p>
+        </p:txBody>
+      </p:sp>
+      <p:sp>
+        <p:nvSpPr>
+          <p:cNvPr id="18" name="TextBox 17"/>
+          <p:cNvSpPr txBox="1"/>
+          <p:nvPr/>
+        </p:nvSpPr>
+        <p:spPr>
+          <a:xfrm>
+            <a:off x="8275320" y="2423160"/>
+            <a:ext cx="3108960" cy="3383280"/>
+          </a:xfrm>
+          <a:prstGeom prst="rect">
+            <a:avLst/>
+          </a:prstGeom>
+          <a:noFill/>
+        </p:spPr>
+        <p:txBody>
+          <a:bodyPr wrap="square">
+            <a:spAutoFit/>
+          </a:bodyPr>
+          <a:lstStyle/>
           <a:p>
             <a:pPr>
               <a:spcAft>
-                <a:spcPts val="800"/>
+                <a:spcPts val="400"/>
               </a:spcAft>
-              <a:defRPr sz="1600">
-                <a:solidFill>
-                  <a:srgbClr val="2C3E50"/>
-                </a:solidFill>
-                <a:latin typeface="맑은 고딕"/>
-              </a:defRPr>
-            </a:pPr>
-            <a:r>
-              <a:t>• 인증: Spring Security + BCrypt</a:t>
+              <a:defRPr sz="1300">
+                <a:solidFill>
+                  <a:srgbClr val="64748B"/>
+                </a:solidFill>
+              </a:defRPr>
+            </a:pPr>
+            <a:r>
+              <a:t>JavaScript — DOM 조작</a:t>
             </a:r>
           </a:p>
           <a:p>
             <a:pPr>
               <a:spcAft>
-                <a:spcPts val="800"/>
+                <a:spcPts val="400"/>
               </a:spcAft>
-              <a:defRPr sz="1600">
-                <a:solidFill>
-                  <a:srgbClr val="2C3E50"/>
-                </a:solidFill>
-                <a:latin typeface="맑은 고딕"/>
-              </a:defRPr>
-            </a:pPr>
-            <a:r>
-              <a:t>• 빌드: Gradle 멀티 모듈 구성</a:t>
+              <a:defRPr sz="1300">
+                <a:solidFill>
+                  <a:srgbClr val="64748B"/>
+                </a:solidFill>
+              </a:defRPr>
+            </a:pPr>
+            <a:r>
+              <a:t>AJAX/Fetch — 비동기 통신</a:t>
             </a:r>
           </a:p>
           <a:p>
             <a:pPr>
               <a:spcAft>
-                <a:spcPts val="800"/>
+                <a:spcPts val="400"/>
               </a:spcAft>
-              <a:defRPr sz="1600">
-                <a:solidFill>
-                  <a:srgbClr val="2C3E50"/>
-                </a:solidFill>
-                <a:latin typeface="맑은 고딕"/>
-              </a:defRPr>
-            </a:pPr>
-            <a:r>
-              <a:t>• 배포: Render 또는 AWS EC2</a:t>
+              <a:defRPr sz="1300">
+                <a:solidFill>
+                  <a:srgbClr val="64748B"/>
+                </a:solidFill>
+              </a:defRPr>
+            </a:pPr>
+            <a:r>
+              <a:t>폼 검증 · 동적 UI 업데이트</a:t>
             </a:r>
           </a:p>
         </p:txBody>
@@ -5636,14 +6441,6 @@
 <file path=ppt/slides/slide6.xml><?xml version="1.0" encoding="utf-8"?>
 <p:sld xmlns:a="http://schemas.openxmlformats.org/drawingml/2006/main" xmlns:p="http://schemas.openxmlformats.org/presentationml/2006/main" xmlns:r="http://schemas.openxmlformats.org/officeDocument/2006/relationships">
   <p:cSld>
-    <p:bg>
-      <p:bgPr>
-        <a:solidFill>
-          <a:srgbClr val="F0F4F8"/>
-        </a:solidFill>
-        <a:effectLst/>
-      </p:bgPr>
-    </p:bg>
     <p:spTree>
       <p:nvGrpSpPr>
         <p:cNvPr id="1" name=""/>
@@ -5660,13 +6457,13 @@
         <p:spPr>
           <a:xfrm>
             <a:off x="0" y="0"/>
-            <a:ext cx="9144000" cy="1005840"/>
+            <a:ext cx="12191695" cy="6858000"/>
           </a:xfrm>
           <a:prstGeom prst="rect">
             <a:avLst/>
           </a:prstGeom>
           <a:solidFill>
-            <a:srgbClr val="1A3A5C"/>
+            <a:srgbClr val="F8FAFC"/>
           </a:solidFill>
           <a:ln>
             <a:noFill/>
@@ -5696,56 +6493,20 @@
       </p:sp>
       <p:sp>
         <p:nvSpPr>
-          <p:cNvPr id="3" name="TextBox 2"/>
-          <p:cNvSpPr txBox="1"/>
-          <p:nvPr/>
-        </p:nvSpPr>
-        <p:spPr>
-          <a:xfrm>
-            <a:off x="457200" y="201168"/>
-            <a:ext cx="8229600" cy="640080"/>
-          </a:xfrm>
-          <a:prstGeom prst="rect">
-            <a:avLst/>
-          </a:prstGeom>
-          <a:noFill/>
-        </p:spPr>
-        <p:txBody>
-          <a:bodyPr wrap="none">
-            <a:spAutoFit/>
-          </a:bodyPr>
-          <a:lstStyle/>
-          <a:p>
-            <a:pPr>
-              <a:defRPr sz="2800" b="1">
-                <a:solidFill>
-                  <a:srgbClr val="FFFFFF"/>
-                </a:solidFill>
-                <a:latin typeface="맑은 고딕"/>
-              </a:defRPr>
-            </a:pPr>
-            <a:r>
-              <a:t>4. 시스템 아키텍처</a:t>
-            </a:r>
-          </a:p>
-        </p:txBody>
-      </p:sp>
-      <p:sp>
-        <p:nvSpPr>
-          <p:cNvPr id="4" name="Rounded Rectangle 3"/>
+          <p:cNvPr id="3" name="Rectangle 2"/>
           <p:cNvSpPr/>
           <p:nvPr/>
         </p:nvSpPr>
         <p:spPr>
           <a:xfrm>
-            <a:off x="1097280" y="1234440"/>
-            <a:ext cx="6949440" cy="594360"/>
-          </a:xfrm>
-          <a:prstGeom prst="roundRect">
+            <a:off x="0" y="0"/>
+            <a:ext cx="12191695" cy="109728"/>
+          </a:xfrm>
+          <a:prstGeom prst="rect">
             <a:avLst/>
           </a:prstGeom>
           <a:solidFill>
-            <a:srgbClr val="1A3A5C"/>
+            <a:srgbClr val="1A568E"/>
           </a:solidFill>
           <a:ln>
             <a:noFill/>
@@ -5775,14 +6536,14 @@
       </p:sp>
       <p:sp>
         <p:nvSpPr>
-          <p:cNvPr id="5" name="TextBox 4"/>
+          <p:cNvPr id="4" name="TextBox 3"/>
           <p:cNvSpPr txBox="1"/>
           <p:nvPr/>
         </p:nvSpPr>
         <p:spPr>
           <a:xfrm>
-            <a:off x="1280160" y="1307592"/>
-            <a:ext cx="6583680" cy="457200"/>
+            <a:off x="731520" y="457200"/>
+            <a:ext cx="10515600" cy="914400"/>
           </a:xfrm>
           <a:prstGeom prst="rect">
             <a:avLst/>
@@ -5796,38 +6557,109 @@
           <a:lstStyle/>
           <a:p>
             <a:pPr>
-              <a:defRPr sz="1500" b="1">
-                <a:solidFill>
-                  <a:srgbClr val="FFFFFF"/>
-                </a:solidFill>
-                <a:latin typeface="맑은 고딕"/>
-              </a:defRPr>
-            </a:pPr>
-            <a:r>
-              <a:t>Client Layer  →  HTML · CSS · JS · Bootstrap 5 · Flexbox</a:t>
-            </a:r>
-          </a:p>
-        </p:txBody>
-      </p:sp>
-      <p:sp>
-        <p:nvSpPr>
-          <p:cNvPr id="6" name="Rounded Rectangle 5"/>
+              <a:defRPr sz="3200" b="1">
+                <a:solidFill>
+                  <a:srgbClr val="1A568E"/>
+                </a:solidFill>
+              </a:defRPr>
+            </a:pPr>
+            <a:r>
+              <a:t>백엔드 기술 스택</a:t>
+            </a:r>
+          </a:p>
+        </p:txBody>
+      </p:sp>
+      <p:sp>
+        <p:nvSpPr>
+          <p:cNvPr id="5" name="TextBox 4"/>
+          <p:cNvSpPr txBox="1"/>
+          <p:nvPr/>
+        </p:nvSpPr>
+        <p:spPr>
+          <a:xfrm>
+            <a:off x="731520" y="1234440"/>
+            <a:ext cx="10515600" cy="457200"/>
+          </a:xfrm>
+          <a:prstGeom prst="rect">
+            <a:avLst/>
+          </a:prstGeom>
+          <a:noFill/>
+        </p:spPr>
+        <p:txBody>
+          <a:bodyPr wrap="none">
+            <a:spAutoFit/>
+          </a:bodyPr>
+          <a:lstStyle/>
+          <a:p>
+            <a:pPr>
+              <a:defRPr sz="1600">
+                <a:solidFill>
+                  <a:srgbClr val="64748B"/>
+                </a:solidFill>
+              </a:defRPr>
+            </a:pPr>
+            <a:r>
+              <a:t>Backend Stack</a:t>
+            </a:r>
+          </a:p>
+        </p:txBody>
+      </p:sp>
+      <p:sp>
+        <p:nvSpPr>
+          <p:cNvPr id="6" name="TextBox 5"/>
+          <p:cNvSpPr txBox="1"/>
+          <p:nvPr/>
+        </p:nvSpPr>
+        <p:spPr>
+          <a:xfrm>
+            <a:off x="10972800" y="6400800"/>
+            <a:ext cx="1097280" cy="320040"/>
+          </a:xfrm>
+          <a:prstGeom prst="rect">
+            <a:avLst/>
+          </a:prstGeom>
+          <a:noFill/>
+        </p:spPr>
+        <p:txBody>
+          <a:bodyPr wrap="none">
+            <a:spAutoFit/>
+          </a:bodyPr>
+          <a:lstStyle/>
+          <a:p>
+            <a:pPr algn="r">
+              <a:defRPr sz="1100">
+                <a:solidFill>
+                  <a:srgbClr val="64748B"/>
+                </a:solidFill>
+              </a:defRPr>
+            </a:pPr>
+            <a:r>
+              <a:t>6 / 10</a:t>
+            </a:r>
+          </a:p>
+        </p:txBody>
+      </p:sp>
+      <p:sp>
+        <p:nvSpPr>
+          <p:cNvPr id="7" name="Rounded Rectangle 6"/>
           <p:cNvSpPr/>
           <p:nvPr/>
         </p:nvSpPr>
         <p:spPr>
           <a:xfrm>
-            <a:off x="1097280" y="2011680"/>
-            <a:ext cx="6949440" cy="594360"/>
+            <a:off x="731520" y="1828800"/>
+            <a:ext cx="5303520" cy="1188720"/>
           </a:xfrm>
           <a:prstGeom prst="roundRect">
             <a:avLst/>
           </a:prstGeom>
           <a:solidFill>
-            <a:srgbClr val="009688"/>
+            <a:srgbClr val="FFFFFF"/>
           </a:solidFill>
           <a:ln>
-            <a:noFill/>
+            <a:solidFill>
+              <a:srgbClr val="E2E8F0"/>
+            </a:solidFill>
           </a:ln>
         </p:spPr>
         <p:style>
@@ -5854,14 +6686,14 @@
       </p:sp>
       <p:sp>
         <p:nvSpPr>
-          <p:cNvPr id="7" name="TextBox 6"/>
+          <p:cNvPr id="8" name="TextBox 7"/>
           <p:cNvSpPr txBox="1"/>
           <p:nvPr/>
         </p:nvSpPr>
         <p:spPr>
           <a:xfrm>
-            <a:off x="1280160" y="2084832"/>
-            <a:ext cx="6583680" cy="457200"/>
+            <a:off x="1005840" y="2011680"/>
+            <a:ext cx="1828800" cy="457200"/>
           </a:xfrm>
           <a:prstGeom prst="rect">
             <a:avLst/>
@@ -5875,38 +6707,74 @@
           <a:lstStyle/>
           <a:p>
             <a:pPr>
-              <a:defRPr sz="1500" b="1">
-                <a:solidFill>
-                  <a:srgbClr val="FFFFFF"/>
-                </a:solidFill>
-                <a:latin typeface="맑은 고딕"/>
-              </a:defRPr>
-            </a:pPr>
-            <a:r>
-              <a:t>Application Layer  →  Spring Boot 3.5 · Thymeleaf · Tomcat 10.1</a:t>
-            </a:r>
-          </a:p>
-        </p:txBody>
-      </p:sp>
-      <p:sp>
-        <p:nvSpPr>
-          <p:cNvPr id="8" name="Rounded Rectangle 7"/>
+              <a:defRPr sz="1400">
+                <a:solidFill>
+                  <a:srgbClr val="64748B"/>
+                </a:solidFill>
+              </a:defRPr>
+            </a:pPr>
+            <a:r>
+              <a:t>런타임</a:t>
+            </a:r>
+          </a:p>
+        </p:txBody>
+      </p:sp>
+      <p:sp>
+        <p:nvSpPr>
+          <p:cNvPr id="9" name="TextBox 8"/>
+          <p:cNvSpPr txBox="1"/>
+          <p:nvPr/>
+        </p:nvSpPr>
+        <p:spPr>
+          <a:xfrm>
+            <a:off x="1005840" y="2331720"/>
+            <a:ext cx="4754880" cy="548640"/>
+          </a:xfrm>
+          <a:prstGeom prst="rect">
+            <a:avLst/>
+          </a:prstGeom>
+          <a:noFill/>
+        </p:spPr>
+        <p:txBody>
+          <a:bodyPr wrap="none">
+            <a:spAutoFit/>
+          </a:bodyPr>
+          <a:lstStyle/>
+          <a:p>
+            <a:pPr>
+              <a:defRPr sz="2000" b="1">
+                <a:solidFill>
+                  <a:srgbClr val="1A568E"/>
+                </a:solidFill>
+              </a:defRPr>
+            </a:pPr>
+            <a:r>
+              <a:t>JDK 21 (LTS)</a:t>
+            </a:r>
+          </a:p>
+        </p:txBody>
+      </p:sp>
+      <p:sp>
+        <p:nvSpPr>
+          <p:cNvPr id="10" name="Rounded Rectangle 9"/>
           <p:cNvSpPr/>
           <p:nvPr/>
         </p:nvSpPr>
         <p:spPr>
           <a:xfrm>
-            <a:off x="1097280" y="2788920"/>
-            <a:ext cx="6949440" cy="594360"/>
+            <a:off x="6309359" y="1828800"/>
+            <a:ext cx="5303520" cy="1188720"/>
           </a:xfrm>
           <a:prstGeom prst="roundRect">
             <a:avLst/>
           </a:prstGeom>
           <a:solidFill>
-            <a:srgbClr val="8E44AD"/>
+            <a:srgbClr val="FFFFFF"/>
           </a:solidFill>
           <a:ln>
-            <a:noFill/>
+            <a:solidFill>
+              <a:srgbClr val="E2E8F0"/>
+            </a:solidFill>
           </a:ln>
         </p:spPr>
         <p:style>
@@ -5933,14 +6801,14 @@
       </p:sp>
       <p:sp>
         <p:nvSpPr>
-          <p:cNvPr id="9" name="TextBox 8"/>
+          <p:cNvPr id="11" name="TextBox 10"/>
           <p:cNvSpPr txBox="1"/>
           <p:nvPr/>
         </p:nvSpPr>
         <p:spPr>
           <a:xfrm>
-            <a:off x="1280160" y="2862072"/>
-            <a:ext cx="6583680" cy="457200"/>
+            <a:off x="6583679" y="2011680"/>
+            <a:ext cx="1828800" cy="457200"/>
           </a:xfrm>
           <a:prstGeom prst="rect">
             <a:avLst/>
@@ -5954,38 +6822,74 @@
           <a:lstStyle/>
           <a:p>
             <a:pPr>
-              <a:defRPr sz="1500" b="1">
-                <a:solidFill>
-                  <a:srgbClr val="FFFFFF"/>
-                </a:solidFill>
-                <a:latin typeface="맑은 고딕"/>
-              </a:defRPr>
-            </a:pPr>
-            <a:r>
-              <a:t>Security Layer  →  Spring Security · BCrypt · Session/JWT</a:t>
-            </a:r>
-          </a:p>
-        </p:txBody>
-      </p:sp>
-      <p:sp>
-        <p:nvSpPr>
-          <p:cNvPr id="10" name="Rounded Rectangle 9"/>
+              <a:defRPr sz="1400">
+                <a:solidFill>
+                  <a:srgbClr val="64748B"/>
+                </a:solidFill>
+              </a:defRPr>
+            </a:pPr>
+            <a:r>
+              <a:t>프레임워크</a:t>
+            </a:r>
+          </a:p>
+        </p:txBody>
+      </p:sp>
+      <p:sp>
+        <p:nvSpPr>
+          <p:cNvPr id="12" name="TextBox 11"/>
+          <p:cNvSpPr txBox="1"/>
+          <p:nvPr/>
+        </p:nvSpPr>
+        <p:spPr>
+          <a:xfrm>
+            <a:off x="6583679" y="2331720"/>
+            <a:ext cx="4754880" cy="548640"/>
+          </a:xfrm>
+          <a:prstGeom prst="rect">
+            <a:avLst/>
+          </a:prstGeom>
+          <a:noFill/>
+        </p:spPr>
+        <p:txBody>
+          <a:bodyPr wrap="none">
+            <a:spAutoFit/>
+          </a:bodyPr>
+          <a:lstStyle/>
+          <a:p>
+            <a:pPr>
+              <a:defRPr sz="2000" b="1">
+                <a:solidFill>
+                  <a:srgbClr val="1A568E"/>
+                </a:solidFill>
+              </a:defRPr>
+            </a:pPr>
+            <a:r>
+              <a:t>Spring Boot 3.5.x</a:t>
+            </a:r>
+          </a:p>
+        </p:txBody>
+      </p:sp>
+      <p:sp>
+        <p:nvSpPr>
+          <p:cNvPr id="13" name="Rounded Rectangle 12"/>
           <p:cNvSpPr/>
           <p:nvPr/>
         </p:nvSpPr>
         <p:spPr>
           <a:xfrm>
-            <a:off x="1097280" y="3566160"/>
-            <a:ext cx="6949440" cy="594360"/>
+            <a:off x="731520" y="3246120"/>
+            <a:ext cx="5303520" cy="1188720"/>
           </a:xfrm>
           <a:prstGeom prst="roundRect">
             <a:avLst/>
           </a:prstGeom>
           <a:solidFill>
-            <a:srgbClr val="E67E22"/>
+            <a:srgbClr val="FFFFFF"/>
           </a:solidFill>
           <a:ln>
-            <a:noFill/>
+            <a:solidFill>
+              <a:srgbClr val="E2E8F0"/>
+            </a:solidFill>
           </a:ln>
         </p:spPr>
         <p:style>
@@ -6012,14 +6916,14 @@
       </p:sp>
       <p:sp>
         <p:nvSpPr>
-          <p:cNvPr id="11" name="TextBox 10"/>
+          <p:cNvPr id="14" name="TextBox 13"/>
           <p:cNvSpPr txBox="1"/>
           <p:nvPr/>
         </p:nvSpPr>
         <p:spPr>
           <a:xfrm>
-            <a:off x="1280160" y="3639312"/>
-            <a:ext cx="6583680" cy="457200"/>
+            <a:off x="1005840" y="3429000"/>
+            <a:ext cx="1828800" cy="457200"/>
           </a:xfrm>
           <a:prstGeom prst="rect">
             <a:avLst/>
@@ -6033,38 +6937,74 @@
           <a:lstStyle/>
           <a:p>
             <a:pPr>
-              <a:defRPr sz="1500" b="1">
-                <a:solidFill>
-                  <a:srgbClr val="FFFFFF"/>
-                </a:solidFill>
-                <a:latin typeface="맑은 고딕"/>
-              </a:defRPr>
-            </a:pPr>
-            <a:r>
-              <a:t>Data Layer  →  MySQL 8 · JDBC Template · TiDB</a:t>
-            </a:r>
-          </a:p>
-        </p:txBody>
-      </p:sp>
-      <p:sp>
-        <p:nvSpPr>
-          <p:cNvPr id="12" name="Rounded Rectangle 11"/>
+              <a:defRPr sz="1400">
+                <a:solidFill>
+                  <a:srgbClr val="64748B"/>
+                </a:solidFill>
+              </a:defRPr>
+            </a:pPr>
+            <a:r>
+              <a:t>템플릿 엔진</a:t>
+            </a:r>
+          </a:p>
+        </p:txBody>
+      </p:sp>
+      <p:sp>
+        <p:nvSpPr>
+          <p:cNvPr id="15" name="TextBox 14"/>
+          <p:cNvSpPr txBox="1"/>
+          <p:nvPr/>
+        </p:nvSpPr>
+        <p:spPr>
+          <a:xfrm>
+            <a:off x="1005840" y="3749039"/>
+            <a:ext cx="4754880" cy="548640"/>
+          </a:xfrm>
+          <a:prstGeom prst="rect">
+            <a:avLst/>
+          </a:prstGeom>
+          <a:noFill/>
+        </p:spPr>
+        <p:txBody>
+          <a:bodyPr wrap="none">
+            <a:spAutoFit/>
+          </a:bodyPr>
+          <a:lstStyle/>
+          <a:p>
+            <a:pPr>
+              <a:defRPr sz="2000" b="1">
+                <a:solidFill>
+                  <a:srgbClr val="1A568E"/>
+                </a:solidFill>
+              </a:defRPr>
+            </a:pPr>
+            <a:r>
+              <a:t>Thymeleaf</a:t>
+            </a:r>
+          </a:p>
+        </p:txBody>
+      </p:sp>
+      <p:sp>
+        <p:nvSpPr>
+          <p:cNvPr id="16" name="Rounded Rectangle 15"/>
           <p:cNvSpPr/>
           <p:nvPr/>
         </p:nvSpPr>
         <p:spPr>
           <a:xfrm>
-            <a:off x="1097280" y="4343400"/>
-            <a:ext cx="6949440" cy="594360"/>
+            <a:off x="6309359" y="3246120"/>
+            <a:ext cx="5303520" cy="1188720"/>
           </a:xfrm>
           <a:prstGeom prst="roundRect">
             <a:avLst/>
           </a:prstGeom>
           <a:solidFill>
-            <a:srgbClr val="27AE60"/>
+            <a:srgbClr val="FFFFFF"/>
           </a:solidFill>
           <a:ln>
-            <a:noFill/>
+            <a:solidFill>
+              <a:srgbClr val="E2E8F0"/>
+            </a:solidFill>
           </a:ln>
         </p:spPr>
         <p:style>
@@ -6091,14 +7031,14 @@
       </p:sp>
       <p:sp>
         <p:nvSpPr>
-          <p:cNvPr id="13" name="TextBox 12"/>
+          <p:cNvPr id="17" name="TextBox 16"/>
           <p:cNvSpPr txBox="1"/>
           <p:nvPr/>
         </p:nvSpPr>
         <p:spPr>
           <a:xfrm>
-            <a:off x="1280160" y="4416552"/>
-            <a:ext cx="6583680" cy="457200"/>
+            <a:off x="6583679" y="3429000"/>
+            <a:ext cx="1828800" cy="457200"/>
           </a:xfrm>
           <a:prstGeom prst="rect">
             <a:avLst/>
@@ -6112,38 +7052,74 @@
           <a:lstStyle/>
           <a:p>
             <a:pPr>
-              <a:defRPr sz="1500" b="1">
-                <a:solidFill>
-                  <a:srgbClr val="FFFFFF"/>
-                </a:solidFill>
-                <a:latin typeface="맑은 고딕"/>
-              </a:defRPr>
-            </a:pPr>
-            <a:r>
-              <a:t>AI/RPA Layer  →  Python · Requests · BeautifulSoup · scikit-learn</a:t>
-            </a:r>
-          </a:p>
-        </p:txBody>
-      </p:sp>
-      <p:sp>
-        <p:nvSpPr>
-          <p:cNvPr id="14" name="Rounded Rectangle 13"/>
+              <a:defRPr sz="1400">
+                <a:solidFill>
+                  <a:srgbClr val="64748B"/>
+                </a:solidFill>
+              </a:defRPr>
+            </a:pPr>
+            <a:r>
+              <a:t>웹 서버</a:t>
+            </a:r>
+          </a:p>
+        </p:txBody>
+      </p:sp>
+      <p:sp>
+        <p:nvSpPr>
+          <p:cNvPr id="18" name="TextBox 17"/>
+          <p:cNvSpPr txBox="1"/>
+          <p:nvPr/>
+        </p:nvSpPr>
+        <p:spPr>
+          <a:xfrm>
+            <a:off x="6583679" y="3749039"/>
+            <a:ext cx="4754880" cy="548640"/>
+          </a:xfrm>
+          <a:prstGeom prst="rect">
+            <a:avLst/>
+          </a:prstGeom>
+          <a:noFill/>
+        </p:spPr>
+        <p:txBody>
+          <a:bodyPr wrap="none">
+            <a:spAutoFit/>
+          </a:bodyPr>
+          <a:lstStyle/>
+          <a:p>
+            <a:pPr>
+              <a:defRPr sz="2000" b="1">
+                <a:solidFill>
+                  <a:srgbClr val="1A568E"/>
+                </a:solidFill>
+              </a:defRPr>
+            </a:pPr>
+            <a:r>
+              <a:t>Tomcat 10.1 (내장)</a:t>
+            </a:r>
+          </a:p>
+        </p:txBody>
+      </p:sp>
+      <p:sp>
+        <p:nvSpPr>
+          <p:cNvPr id="19" name="Rounded Rectangle 18"/>
           <p:cNvSpPr/>
           <p:nvPr/>
         </p:nvSpPr>
         <p:spPr>
           <a:xfrm>
-            <a:off x="1097280" y="5120640"/>
-            <a:ext cx="6949440" cy="594360"/>
+            <a:off x="731520" y="4663440"/>
+            <a:ext cx="5303520" cy="1188720"/>
           </a:xfrm>
           <a:prstGeom prst="roundRect">
             <a:avLst/>
           </a:prstGeom>
           <a:solidFill>
-            <a:srgbClr val="C0392B"/>
+            <a:srgbClr val="FFFFFF"/>
           </a:solidFill>
           <a:ln>
-            <a:noFill/>
+            <a:solidFill>
+              <a:srgbClr val="E2E8F0"/>
+            </a:solidFill>
           </a:ln>
         </p:spPr>
         <p:style>
@@ -6170,14 +7146,14 @@
       </p:sp>
       <p:sp>
         <p:nvSpPr>
-          <p:cNvPr id="15" name="TextBox 14"/>
+          <p:cNvPr id="20" name="TextBox 19"/>
           <p:cNvSpPr txBox="1"/>
           <p:nvPr/>
         </p:nvSpPr>
         <p:spPr>
           <a:xfrm>
-            <a:off x="1280160" y="5193792"/>
-            <a:ext cx="6583680" cy="457200"/>
+            <a:off x="1005840" y="4846320"/>
+            <a:ext cx="1828800" cy="457200"/>
           </a:xfrm>
           <a:prstGeom prst="rect">
             <a:avLst/>
@@ -6191,29 +7167,28 @@
           <a:lstStyle/>
           <a:p>
             <a:pPr>
-              <a:defRPr sz="1500" b="1">
-                <a:solidFill>
-                  <a:srgbClr val="FFFFFF"/>
-                </a:solidFill>
-                <a:latin typeface="맑은 고딕"/>
-              </a:defRPr>
-            </a:pPr>
-            <a:r>
-              <a:t>Deploy Layer  →  Gradle Build · Render / AWS EC2</a:t>
-            </a:r>
-          </a:p>
-        </p:txBody>
-      </p:sp>
-      <p:sp>
-        <p:nvSpPr>
-          <p:cNvPr id="16" name="TextBox 15"/>
+              <a:defRPr sz="1400">
+                <a:solidFill>
+                  <a:srgbClr val="64748B"/>
+                </a:solidFill>
+              </a:defRPr>
+            </a:pPr>
+            <a:r>
+              <a:t>데이터베이스</a:t>
+            </a:r>
+          </a:p>
+        </p:txBody>
+      </p:sp>
+      <p:sp>
+        <p:nvSpPr>
+          <p:cNvPr id="21" name="TextBox 20"/>
           <p:cNvSpPr txBox="1"/>
           <p:nvPr/>
         </p:nvSpPr>
         <p:spPr>
           <a:xfrm>
-            <a:off x="1097280" y="5943600"/>
-            <a:ext cx="6949440" cy="457200"/>
+            <a:off x="1005840" y="5166359"/>
+            <a:ext cx="4754880" cy="548640"/>
           </a:xfrm>
           <a:prstGeom prst="rect">
             <a:avLst/>
@@ -6226,16 +7201,130 @@
           </a:bodyPr>
           <a:lstStyle/>
           <a:p>
-            <a:pPr algn="ctr">
+            <a:pPr>
+              <a:defRPr sz="2000" b="1">
+                <a:solidFill>
+                  <a:srgbClr val="1A568E"/>
+                </a:solidFill>
+              </a:defRPr>
+            </a:pPr>
+            <a:r>
+              <a:t>MySQL 8</a:t>
+            </a:r>
+          </a:p>
+        </p:txBody>
+      </p:sp>
+      <p:sp>
+        <p:nvSpPr>
+          <p:cNvPr id="22" name="Rounded Rectangle 21"/>
+          <p:cNvSpPr/>
+          <p:nvPr/>
+        </p:nvSpPr>
+        <p:spPr>
+          <a:xfrm>
+            <a:off x="6309359" y="4663440"/>
+            <a:ext cx="5303520" cy="1188720"/>
+          </a:xfrm>
+          <a:prstGeom prst="roundRect">
+            <a:avLst/>
+          </a:prstGeom>
+          <a:solidFill>
+            <a:srgbClr val="FFFFFF"/>
+          </a:solidFill>
+          <a:ln>
+            <a:solidFill>
+              <a:srgbClr val="E2E8F0"/>
+            </a:solidFill>
+          </a:ln>
+        </p:spPr>
+        <p:style>
+          <a:lnRef idx="1">
+            <a:schemeClr val="accent1"/>
+          </a:lnRef>
+          <a:fillRef idx="3">
+            <a:schemeClr val="accent1"/>
+          </a:fillRef>
+          <a:effectRef idx="2">
+            <a:schemeClr val="accent1"/>
+          </a:effectRef>
+          <a:fontRef idx="minor">
+            <a:schemeClr val="lt1"/>
+          </a:fontRef>
+        </p:style>
+        <p:txBody>
+          <a:bodyPr rtlCol="0" anchor="ctr"/>
+          <a:lstStyle/>
+          <a:p>
+            <a:pPr algn="ctr"/>
+          </a:p>
+        </p:txBody>
+      </p:sp>
+      <p:sp>
+        <p:nvSpPr>
+          <p:cNvPr id="23" name="TextBox 22"/>
+          <p:cNvSpPr txBox="1"/>
+          <p:nvPr/>
+        </p:nvSpPr>
+        <p:spPr>
+          <a:xfrm>
+            <a:off x="6583679" y="4846320"/>
+            <a:ext cx="1828800" cy="457200"/>
+          </a:xfrm>
+          <a:prstGeom prst="rect">
+            <a:avLst/>
+          </a:prstGeom>
+          <a:noFill/>
+        </p:spPr>
+        <p:txBody>
+          <a:bodyPr wrap="none">
+            <a:spAutoFit/>
+          </a:bodyPr>
+          <a:lstStyle/>
+          <a:p>
+            <a:pPr>
               <a:defRPr sz="1400">
                 <a:solidFill>
-                  <a:srgbClr val="5D6D7E"/>
-                </a:solidFill>
-                <a:latin typeface="맑은 고딕"/>
-              </a:defRPr>
-            </a:pPr>
-            <a:r>
-              <a:t>▲ 3-Tier Architecture + RPA/AI Pipeline</a:t>
+                  <a:srgbClr val="64748B"/>
+                </a:solidFill>
+              </a:defRPr>
+            </a:pPr>
+            <a:r>
+              <a:t>빌드 도구</a:t>
+            </a:r>
+          </a:p>
+        </p:txBody>
+      </p:sp>
+      <p:sp>
+        <p:nvSpPr>
+          <p:cNvPr id="24" name="TextBox 23"/>
+          <p:cNvSpPr txBox="1"/>
+          <p:nvPr/>
+        </p:nvSpPr>
+        <p:spPr>
+          <a:xfrm>
+            <a:off x="6583679" y="5166359"/>
+            <a:ext cx="4754880" cy="548640"/>
+          </a:xfrm>
+          <a:prstGeom prst="rect">
+            <a:avLst/>
+          </a:prstGeom>
+          <a:noFill/>
+        </p:spPr>
+        <p:txBody>
+          <a:bodyPr wrap="none">
+            <a:spAutoFit/>
+          </a:bodyPr>
+          <a:lstStyle/>
+          <a:p>
+            <a:pPr>
+              <a:defRPr sz="2000" b="1">
+                <a:solidFill>
+                  <a:srgbClr val="1A568E"/>
+                </a:solidFill>
+              </a:defRPr>
+            </a:pPr>
+            <a:r>
+              <a:t>Gradle</a:t>
             </a:r>
           </a:p>
         </p:txBody>
@@ -6251,14 +7340,6 @@
 <file path=ppt/slides/slide7.xml><?xml version="1.0" encoding="utf-8"?>
 <p:sld xmlns:a="http://schemas.openxmlformats.org/drawingml/2006/main" xmlns:p="http://schemas.openxmlformats.org/presentationml/2006/main" xmlns:r="http://schemas.openxmlformats.org/officeDocument/2006/relationships">
   <p:cSld>
-    <p:bg>
-      <p:bgPr>
-        <a:solidFill>
-          <a:srgbClr val="F0F4F8"/>
-        </a:solidFill>
-        <a:effectLst/>
-      </p:bgPr>
-    </p:bg>
     <p:spTree>
       <p:nvGrpSpPr>
         <p:cNvPr id="1" name=""/>
@@ -6275,13 +7356,13 @@
         <p:spPr>
           <a:xfrm>
             <a:off x="0" y="0"/>
-            <a:ext cx="9144000" cy="1005840"/>
+            <a:ext cx="12191695" cy="6858000"/>
           </a:xfrm>
           <a:prstGeom prst="rect">
             <a:avLst/>
           </a:prstGeom>
           <a:solidFill>
-            <a:srgbClr val="1A3A5C"/>
+            <a:srgbClr val="F8FAFC"/>
           </a:solidFill>
           <a:ln>
             <a:noFill/>
@@ -6311,14 +7392,57 @@
       </p:sp>
       <p:sp>
         <p:nvSpPr>
-          <p:cNvPr id="3" name="TextBox 2"/>
+          <p:cNvPr id="3" name="Rectangle 2"/>
+          <p:cNvSpPr/>
+          <p:nvPr/>
+        </p:nvSpPr>
+        <p:spPr>
+          <a:xfrm>
+            <a:off x="0" y="0"/>
+            <a:ext cx="12191695" cy="109728"/>
+          </a:xfrm>
+          <a:prstGeom prst="rect">
+            <a:avLst/>
+          </a:prstGeom>
+          <a:solidFill>
+            <a:srgbClr val="1A568E"/>
+          </a:solidFill>
+          <a:ln>
+            <a:noFill/>
+          </a:ln>
+        </p:spPr>
+        <p:style>
+          <a:lnRef idx="1">
+            <a:schemeClr val="accent1"/>
+          </a:lnRef>
+          <a:fillRef idx="3">
+            <a:schemeClr val="accent1"/>
+          </a:fillRef>
+          <a:effectRef idx="2">
+            <a:schemeClr val="accent1"/>
+          </a:effectRef>
+          <a:fontRef idx="minor">
+            <a:schemeClr val="lt1"/>
+          </a:fontRef>
+        </p:style>
+        <p:txBody>
+          <a:bodyPr rtlCol="0" anchor="ctr"/>
+          <a:lstStyle/>
+          <a:p>
+            <a:pPr algn="ctr"/>
+          </a:p>
+        </p:txBody>
+      </p:sp>
+      <p:sp>
+        <p:nvSpPr>
+          <p:cNvPr id="4" name="TextBox 3"/>
           <p:cNvSpPr txBox="1"/>
           <p:nvPr/>
         </p:nvSpPr>
         <p:spPr>
           <a:xfrm>
-            <a:off x="457200" y="201168"/>
-            <a:ext cx="8229600" cy="640080"/>
+            <a:off x="731520" y="457200"/>
+            <a:ext cx="10515600" cy="914400"/>
           </a:xfrm>
           <a:prstGeom prst="rect">
             <a:avLst/>
@@ -6332,29 +7456,28 @@
           <a:lstStyle/>
           <a:p>
             <a:pPr>
-              <a:defRPr sz="2800" b="1">
-                <a:solidFill>
-                  <a:srgbClr val="FFFFFF"/>
-                </a:solidFill>
-                <a:latin typeface="맑은 고딕"/>
-              </a:defRPr>
-            </a:pPr>
-            <a:r>
-              <a:t>5. 프론트엔드 기술 스택</a:t>
-            </a:r>
-          </a:p>
-        </p:txBody>
-      </p:sp>
-      <p:sp>
-        <p:nvSpPr>
-          <p:cNvPr id="4" name="TextBox 3"/>
+              <a:defRPr sz="3200" b="1">
+                <a:solidFill>
+                  <a:srgbClr val="1A568E"/>
+                </a:solidFill>
+              </a:defRPr>
+            </a:pPr>
+            <a:r>
+              <a:t>빌드 및 배포</a:t>
+            </a:r>
+          </a:p>
+        </p:txBody>
+      </p:sp>
+      <p:sp>
+        <p:nvSpPr>
+          <p:cNvPr id="5" name="TextBox 4"/>
           <p:cNvSpPr txBox="1"/>
           <p:nvPr/>
         </p:nvSpPr>
         <p:spPr>
           <a:xfrm>
-            <a:off x="457200" y="1188720"/>
-            <a:ext cx="3840480" cy="457200"/>
+            <a:off x="731520" y="1234440"/>
+            <a:ext cx="10515600" cy="457200"/>
           </a:xfrm>
           <a:prstGeom prst="rect">
             <a:avLst/>
@@ -6368,29 +7491,186 @@
           <a:lstStyle/>
           <a:p>
             <a:pPr>
-              <a:defRPr sz="2000" b="1">
-                <a:solidFill>
-                  <a:srgbClr val="009688"/>
-                </a:solidFill>
-                <a:latin typeface="맑은 고딕"/>
-              </a:defRPr>
-            </a:pPr>
-            <a:r>
-              <a:t>핵심 기술</a:t>
-            </a:r>
-          </a:p>
-        </p:txBody>
-      </p:sp>
-      <p:sp>
-        <p:nvSpPr>
-          <p:cNvPr id="5" name="TextBox 4"/>
+              <a:defRPr sz="1600">
+                <a:solidFill>
+                  <a:srgbClr val="64748B"/>
+                </a:solidFill>
+              </a:defRPr>
+            </a:pPr>
+            <a:r>
+              <a:t>Build &amp; Deployment</a:t>
+            </a:r>
+          </a:p>
+        </p:txBody>
+      </p:sp>
+      <p:sp>
+        <p:nvSpPr>
+          <p:cNvPr id="6" name="TextBox 5"/>
           <p:cNvSpPr txBox="1"/>
           <p:nvPr/>
         </p:nvSpPr>
         <p:spPr>
           <a:xfrm>
-            <a:off x="457200" y="1645920"/>
-            <a:ext cx="3840480" cy="4389120"/>
+            <a:off x="10972800" y="6400800"/>
+            <a:ext cx="1097280" cy="320040"/>
+          </a:xfrm>
+          <a:prstGeom prst="rect">
+            <a:avLst/>
+          </a:prstGeom>
+          <a:noFill/>
+        </p:spPr>
+        <p:txBody>
+          <a:bodyPr wrap="none">
+            <a:spAutoFit/>
+          </a:bodyPr>
+          <a:lstStyle/>
+          <a:p>
+            <a:pPr algn="r">
+              <a:defRPr sz="1100">
+                <a:solidFill>
+                  <a:srgbClr val="64748B"/>
+                </a:solidFill>
+              </a:defRPr>
+            </a:pPr>
+            <a:r>
+              <a:t>7 / 10</a:t>
+            </a:r>
+          </a:p>
+        </p:txBody>
+      </p:sp>
+      <p:sp>
+        <p:nvSpPr>
+          <p:cNvPr id="7" name="Rounded Rectangle 6"/>
+          <p:cNvSpPr/>
+          <p:nvPr/>
+        </p:nvSpPr>
+        <p:spPr>
+          <a:xfrm>
+            <a:off x="731520" y="1828800"/>
+            <a:ext cx="5029200" cy="3840480"/>
+          </a:xfrm>
+          <a:prstGeom prst="roundRect">
+            <a:avLst/>
+          </a:prstGeom>
+          <a:solidFill>
+            <a:srgbClr val="FFFFFF"/>
+          </a:solidFill>
+          <a:ln w="12700">
+            <a:solidFill>
+              <a:srgbClr val="E2E8F0"/>
+            </a:solidFill>
+          </a:ln>
+        </p:spPr>
+        <p:style>
+          <a:lnRef idx="1">
+            <a:schemeClr val="accent1"/>
+          </a:lnRef>
+          <a:fillRef idx="3">
+            <a:schemeClr val="accent1"/>
+          </a:fillRef>
+          <a:effectRef idx="2">
+            <a:schemeClr val="accent1"/>
+          </a:effectRef>
+          <a:fontRef idx="minor">
+            <a:schemeClr val="lt1"/>
+          </a:fontRef>
+        </p:style>
+        <p:txBody>
+          <a:bodyPr rtlCol="0" anchor="ctr"/>
+          <a:lstStyle/>
+          <a:p>
+            <a:pPr algn="ctr"/>
+          </a:p>
+        </p:txBody>
+      </p:sp>
+      <p:sp>
+        <p:nvSpPr>
+          <p:cNvPr id="8" name="Rectangle 7"/>
+          <p:cNvSpPr/>
+          <p:nvPr/>
+        </p:nvSpPr>
+        <p:spPr>
+          <a:xfrm>
+            <a:off x="731520" y="1828800"/>
+            <a:ext cx="73152" cy="3840480"/>
+          </a:xfrm>
+          <a:prstGeom prst="rect">
+            <a:avLst/>
+          </a:prstGeom>
+          <a:solidFill>
+            <a:srgbClr val="1A568E"/>
+          </a:solidFill>
+          <a:ln>
+            <a:noFill/>
+          </a:ln>
+        </p:spPr>
+        <p:style>
+          <a:lnRef idx="1">
+            <a:schemeClr val="accent1"/>
+          </a:lnRef>
+          <a:fillRef idx="3">
+            <a:schemeClr val="accent1"/>
+          </a:fillRef>
+          <a:effectRef idx="2">
+            <a:schemeClr val="accent1"/>
+          </a:effectRef>
+          <a:fontRef idx="minor">
+            <a:schemeClr val="lt1"/>
+          </a:fontRef>
+        </p:style>
+        <p:txBody>
+          <a:bodyPr rtlCol="0" anchor="ctr"/>
+          <a:lstStyle/>
+          <a:p>
+            <a:pPr algn="ctr"/>
+          </a:p>
+        </p:txBody>
+      </p:sp>
+      <p:sp>
+        <p:nvSpPr>
+          <p:cNvPr id="9" name="TextBox 8"/>
+          <p:cNvSpPr txBox="1"/>
+          <p:nvPr/>
+        </p:nvSpPr>
+        <p:spPr>
+          <a:xfrm>
+            <a:off x="960120" y="2011680"/>
+            <a:ext cx="4663440" cy="457200"/>
+          </a:xfrm>
+          <a:prstGeom prst="rect">
+            <a:avLst/>
+          </a:prstGeom>
+          <a:noFill/>
+        </p:spPr>
+        <p:txBody>
+          <a:bodyPr wrap="none">
+            <a:spAutoFit/>
+          </a:bodyPr>
+          <a:lstStyle/>
+          <a:p>
+            <a:pPr>
+              <a:defRPr sz="1800" b="1">
+                <a:solidFill>
+                  <a:srgbClr val="1A568E"/>
+                </a:solidFill>
+              </a:defRPr>
+            </a:pPr>
+            <a:r>
+              <a:t>빌드 (Gradle)</a:t>
+            </a:r>
+          </a:p>
+        </p:txBody>
+      </p:sp>
+      <p:sp>
+        <p:nvSpPr>
+          <p:cNvPr id="10" name="TextBox 9"/>
+          <p:cNvSpPr txBox="1"/>
+          <p:nvPr/>
+        </p:nvSpPr>
+        <p:spPr>
+          <a:xfrm>
+            <a:off x="960120" y="2423160"/>
+            <a:ext cx="4663440" cy="3108960"/>
           </a:xfrm>
           <a:prstGeom prst="rect">
             <a:avLst/>
@@ -6405,95 +7685,163 @@
           <a:p>
             <a:pPr>
               <a:spcAft>
-                <a:spcPts val="800"/>
+                <a:spcPts val="400"/>
               </a:spcAft>
-              <a:defRPr sz="1600">
-                <a:solidFill>
-                  <a:srgbClr val="2C3E50"/>
-                </a:solidFill>
-                <a:latin typeface="맑은 고딕"/>
-              </a:defRPr>
-            </a:pPr>
-            <a:r>
-              <a:t>• HTML5 — 시맨틱 마크업 구조</a:t>
+              <a:defRPr sz="1300">
+                <a:solidFill>
+                  <a:srgbClr val="64748B"/>
+                </a:solidFill>
+              </a:defRPr>
+            </a:pPr>
+            <a:r>
+              <a:t>의존성 관리 및 멀티 모듈 빌드</a:t>
             </a:r>
           </a:p>
           <a:p>
             <a:pPr>
               <a:spcAft>
-                <a:spcPts val="800"/>
+                <a:spcPts val="400"/>
               </a:spcAft>
-              <a:defRPr sz="1600">
-                <a:solidFill>
-                  <a:srgbClr val="2C3E50"/>
-                </a:solidFill>
-                <a:latin typeface="맑은 고딕"/>
-              </a:defRPr>
-            </a:pPr>
-            <a:r>
-              <a:t>• CSS3 — 스타일링 및 애니메이션</a:t>
+              <a:defRPr sz="1300">
+                <a:solidFill>
+                  <a:srgbClr val="64748B"/>
+                </a:solidFill>
+              </a:defRPr>
+            </a:pPr>
+            <a:r>
+              <a:t>bootJar로 실행 가능 JAR 생성</a:t>
             </a:r>
           </a:p>
           <a:p>
             <a:pPr>
               <a:spcAft>
-                <a:spcPts val="800"/>
+                <a:spcPts val="400"/>
               </a:spcAft>
-              <a:defRPr sz="1600">
-                <a:solidFill>
-                  <a:srgbClr val="2C3E50"/>
-                </a:solidFill>
-                <a:latin typeface="맑은 고딕"/>
-              </a:defRPr>
-            </a:pPr>
-            <a:r>
-              <a:t>• JavaScript (ES6+) — 동적 UI/UX</a:t>
+              <a:defRPr sz="1300">
+                <a:solidFill>
+                  <a:srgbClr val="64748B"/>
+                </a:solidFill>
+              </a:defRPr>
+            </a:pPr>
+            <a:r>
+              <a:t>테스트 · 컴파일 · 패키징 자동화</a:t>
             </a:r>
           </a:p>
           <a:p>
             <a:pPr>
               <a:spcAft>
-                <a:spcPts val="800"/>
+                <a:spcPts val="400"/>
               </a:spcAft>
-              <a:defRPr sz="1600">
-                <a:solidFill>
-                  <a:srgbClr val="2C3E50"/>
-                </a:solidFill>
-                <a:latin typeface="맑은 고딕"/>
-              </a:defRPr>
-            </a:pPr>
-            <a:r>
-              <a:t>• Bootstrap 5 — 반응형 컴포넌트</a:t>
-            </a:r>
-          </a:p>
-          <a:p>
-            <a:pPr>
-              <a:spcAft>
-                <a:spcPts val="800"/>
-              </a:spcAft>
-              <a:defRPr sz="1600">
-                <a:solidFill>
-                  <a:srgbClr val="2C3E50"/>
-                </a:solidFill>
-                <a:latin typeface="맑은 고딕"/>
-              </a:defRPr>
-            </a:pPr>
-            <a:r>
-              <a:t>• Flexbox Layout — 유연한 레이아웃</a:t>
-            </a:r>
-          </a:p>
-        </p:txBody>
-      </p:sp>
-      <p:sp>
-        <p:nvSpPr>
-          <p:cNvPr id="6" name="TextBox 5"/>
+              <a:defRPr sz="1300">
+                <a:solidFill>
+                  <a:srgbClr val="64748B"/>
+                </a:solidFill>
+              </a:defRPr>
+            </a:pPr>
+            <a:r>
+              <a:t>CI/CD 파이프라인 연동 가능</a:t>
+            </a:r>
+          </a:p>
+        </p:txBody>
+      </p:sp>
+      <p:sp>
+        <p:nvSpPr>
+          <p:cNvPr id="11" name="Rounded Rectangle 10"/>
+          <p:cNvSpPr/>
+          <p:nvPr/>
+        </p:nvSpPr>
+        <p:spPr>
+          <a:xfrm>
+            <a:off x="6217920" y="1828800"/>
+            <a:ext cx="5029200" cy="3840480"/>
+          </a:xfrm>
+          <a:prstGeom prst="roundRect">
+            <a:avLst/>
+          </a:prstGeom>
+          <a:solidFill>
+            <a:srgbClr val="FFFFFF"/>
+          </a:solidFill>
+          <a:ln w="12700">
+            <a:solidFill>
+              <a:srgbClr val="E2E8F0"/>
+            </a:solidFill>
+          </a:ln>
+        </p:spPr>
+        <p:style>
+          <a:lnRef idx="1">
+            <a:schemeClr val="accent1"/>
+          </a:lnRef>
+          <a:fillRef idx="3">
+            <a:schemeClr val="accent1"/>
+          </a:fillRef>
+          <a:effectRef idx="2">
+            <a:schemeClr val="accent1"/>
+          </a:effectRef>
+          <a:fontRef idx="minor">
+            <a:schemeClr val="lt1"/>
+          </a:fontRef>
+        </p:style>
+        <p:txBody>
+          <a:bodyPr rtlCol="0" anchor="ctr"/>
+          <a:lstStyle/>
+          <a:p>
+            <a:pPr algn="ctr"/>
+          </a:p>
+        </p:txBody>
+      </p:sp>
+      <p:sp>
+        <p:nvSpPr>
+          <p:cNvPr id="12" name="Rectangle 11"/>
+          <p:cNvSpPr/>
+          <p:nvPr/>
+        </p:nvSpPr>
+        <p:spPr>
+          <a:xfrm>
+            <a:off x="6217920" y="1828800"/>
+            <a:ext cx="73152" cy="3840480"/>
+          </a:xfrm>
+          <a:prstGeom prst="rect">
+            <a:avLst/>
+          </a:prstGeom>
+          <a:solidFill>
+            <a:srgbClr val="00A87E"/>
+          </a:solidFill>
+          <a:ln>
+            <a:noFill/>
+          </a:ln>
+        </p:spPr>
+        <p:style>
+          <a:lnRef idx="1">
+            <a:schemeClr val="accent1"/>
+          </a:lnRef>
+          <a:fillRef idx="3">
+            <a:schemeClr val="accent1"/>
+          </a:fillRef>
+          <a:effectRef idx="2">
+            <a:schemeClr val="accent1"/>
+          </a:effectRef>
+          <a:fontRef idx="minor">
+            <a:schemeClr val="lt1"/>
+          </a:fontRef>
+        </p:style>
+        <p:txBody>
+          <a:bodyPr rtlCol="0" anchor="ctr"/>
+          <a:lstStyle/>
+          <a:p>
+            <a:pPr algn="ctr"/>
+          </a:p>
+        </p:txBody>
+      </p:sp>
+      <p:sp>
+        <p:nvSpPr>
+          <p:cNvPr id="13" name="TextBox 12"/>
           <p:cNvSpPr txBox="1"/>
           <p:nvPr/>
         </p:nvSpPr>
         <p:spPr>
           <a:xfrm>
-            <a:off x="4754880" y="1188720"/>
-            <a:ext cx="3840480" cy="457200"/>
+            <a:off x="6446520" y="2011680"/>
+            <a:ext cx="4663440" cy="457200"/>
           </a:xfrm>
           <a:prstGeom prst="rect">
             <a:avLst/>
@@ -6507,29 +7855,28 @@
           <a:lstStyle/>
           <a:p>
             <a:pPr>
-              <a:defRPr sz="2000" b="1">
-                <a:solidFill>
-                  <a:srgbClr val="009688"/>
-                </a:solidFill>
-                <a:latin typeface="맑은 고딕"/>
-              </a:defRPr>
-            </a:pPr>
-            <a:r>
-              <a:t>구현 포인트</a:t>
-            </a:r>
-          </a:p>
-        </p:txBody>
-      </p:sp>
-      <p:sp>
-        <p:nvSpPr>
-          <p:cNvPr id="7" name="TextBox 6"/>
+              <a:defRPr sz="1800" b="1">
+                <a:solidFill>
+                  <a:srgbClr val="1A568E"/>
+                </a:solidFill>
+              </a:defRPr>
+            </a:pPr>
+            <a:r>
+              <a:t>배포 환경</a:t>
+            </a:r>
+          </a:p>
+        </p:txBody>
+      </p:sp>
+      <p:sp>
+        <p:nvSpPr>
+          <p:cNvPr id="14" name="TextBox 13"/>
           <p:cNvSpPr txBox="1"/>
           <p:nvPr/>
         </p:nvSpPr>
         <p:spPr>
           <a:xfrm>
-            <a:off x="4754880" y="1645920"/>
-            <a:ext cx="3840480" cy="4389120"/>
+            <a:off x="6446520" y="2423160"/>
+            <a:ext cx="4663440" cy="3108960"/>
           </a:xfrm>
           <a:prstGeom prst="rect">
             <a:avLst/>
@@ -6544,81 +7891,96 @@
           <a:p>
             <a:pPr>
               <a:spcAft>
-                <a:spcPts val="800"/>
+                <a:spcPts val="400"/>
               </a:spcAft>
-              <a:defRPr sz="1600">
-                <a:solidFill>
-                  <a:srgbClr val="2C3E50"/>
-                </a:solidFill>
-                <a:latin typeface="맑은 고딕"/>
-              </a:defRPr>
-            </a:pPr>
-            <a:r>
-              <a:t>• 모바일·태블릿·데스크톱 반응형 대응</a:t>
+              <a:defRPr sz="1300">
+                <a:solidFill>
+                  <a:srgbClr val="64748B"/>
+                </a:solidFill>
+              </a:defRPr>
+            </a:pPr>
+            <a:r>
+              <a:t>DB: TiDB (MySQL 호환 분산 DB)</a:t>
             </a:r>
           </a:p>
           <a:p>
             <a:pPr>
               <a:spcAft>
-                <a:spcPts val="800"/>
+                <a:spcPts val="400"/>
               </a:spcAft>
-              <a:defRPr sz="1600">
-                <a:solidFill>
-                  <a:srgbClr val="2C3E50"/>
-                </a:solidFill>
-                <a:latin typeface="맑은 고딕"/>
-              </a:defRPr>
-            </a:pPr>
-            <a:r>
-              <a:t>• 매물 카드 그리드 / 리스트 뷰 전환</a:t>
+              <a:defRPr sz="1300">
+                <a:solidFill>
+                  <a:srgbClr val="64748B"/>
+                </a:solidFill>
+              </a:defRPr>
+            </a:pPr>
+            <a:r>
+              <a:t>호스팅: Render 또는 AWS EC2</a:t>
             </a:r>
           </a:p>
           <a:p>
             <a:pPr>
               <a:spcAft>
-                <a:spcPts val="800"/>
+                <a:spcPts val="400"/>
               </a:spcAft>
-              <a:defRPr sz="1600">
-                <a:solidFill>
-                  <a:srgbClr val="2C3E50"/>
-                </a:solidFill>
-                <a:latin typeface="맑은 고딕"/>
-              </a:defRPr>
-            </a:pPr>
-            <a:r>
-              <a:t>• 검색 필터 UI (지역·가격·면적)</a:t>
+              <a:defRPr sz="1300">
+                <a:solidFill>
+                  <a:srgbClr val="64748B"/>
+                </a:solidFill>
+              </a:defRPr>
+            </a:pPr>
+            <a:r>
+              <a:t>Tomcat 10.1 위 Spring Boot 실행</a:t>
             </a:r>
           </a:p>
           <a:p>
             <a:pPr>
               <a:spcAft>
-                <a:spcPts val="800"/>
+                <a:spcPts val="400"/>
               </a:spcAft>
-              <a:defRPr sz="1600">
-                <a:solidFill>
-                  <a:srgbClr val="2C3E50"/>
-                </a:solidFill>
-                <a:latin typeface="맑은 고딕"/>
-              </a:defRPr>
-            </a:pPr>
-            <a:r>
-              <a:t>• Thymeleaf 템플릿과 서버 렌더링 연동</a:t>
-            </a:r>
-          </a:p>
-          <a:p>
-            <a:pPr>
-              <a:spcAft>
-                <a:spcPts val="800"/>
-              </a:spcAft>
-              <a:defRPr sz="1600">
-                <a:solidFill>
-                  <a:srgbClr val="2C3E50"/>
-                </a:solidFill>
-                <a:latin typeface="맑은 고딕"/>
-              </a:defRPr>
-            </a:pPr>
-            <a:r>
-              <a:t>• Bootstrap Navbar·Modal·Form 활용</a:t>
+              <a:defRPr sz="1300">
+                <a:solidFill>
+                  <a:srgbClr val="64748B"/>
+                </a:solidFill>
+              </a:defRPr>
+            </a:pPr>
+            <a:r>
+              <a:t>HTTPS · 환경변수 기반 설정 분리</a:t>
+            </a:r>
+          </a:p>
+        </p:txBody>
+      </p:sp>
+      <p:sp>
+        <p:nvSpPr>
+          <p:cNvPr id="15" name="TextBox 14"/>
+          <p:cNvSpPr txBox="1"/>
+          <p:nvPr/>
+        </p:nvSpPr>
+        <p:spPr>
+          <a:xfrm>
+            <a:off x="731520" y="5852160"/>
+            <a:ext cx="10515600" cy="548640"/>
+          </a:xfrm>
+          <a:prstGeom prst="rect">
+            <a:avLst/>
+          </a:prstGeom>
+          <a:noFill/>
+        </p:spPr>
+        <p:txBody>
+          <a:bodyPr wrap="none">
+            <a:spAutoFit/>
+          </a:bodyPr>
+          <a:lstStyle/>
+          <a:p>
+            <a:pPr algn="ctr">
+              <a:defRPr sz="1400">
+                <a:solidFill>
+                  <a:srgbClr val="64748B"/>
+                </a:solidFill>
+              </a:defRPr>
+            </a:pPr>
+            <a:r>
+              <a:t>배포 흐름:  Source → Gradle Build → JAR → Render/EC2 → TiDB</a:t>
             </a:r>
           </a:p>
         </p:txBody>
@@ -6634,14 +7996,6 @@
 <file path=ppt/slides/slide8.xml><?xml version="1.0" encoding="utf-8"?>
 <p:sld xmlns:a="http://schemas.openxmlformats.org/drawingml/2006/main" xmlns:p="http://schemas.openxmlformats.org/presentationml/2006/main" xmlns:r="http://schemas.openxmlformats.org/officeDocument/2006/relationships">
   <p:cSld>
-    <p:bg>
-      <p:bgPr>
-        <a:solidFill>
-          <a:srgbClr val="F0F4F8"/>
-        </a:solidFill>
-        <a:effectLst/>
-      </p:bgPr>
-    </p:bg>
     <p:spTree>
       <p:nvGrpSpPr>
         <p:cNvPr id="1" name=""/>
@@ -6658,13 +8012,13 @@
         <p:spPr>
           <a:xfrm>
             <a:off x="0" y="0"/>
-            <a:ext cx="9144000" cy="1005840"/>
+            <a:ext cx="12191695" cy="6858000"/>
           </a:xfrm>
           <a:prstGeom prst="rect">
             <a:avLst/>
           </a:prstGeom>
           <a:solidFill>
-            <a:srgbClr val="1A3A5C"/>
+            <a:srgbClr val="F8FAFC"/>
           </a:solidFill>
           <a:ln>
             <a:noFill/>
@@ -6694,14 +8048,57 @@
       </p:sp>
       <p:sp>
         <p:nvSpPr>
-          <p:cNvPr id="3" name="TextBox 2"/>
+          <p:cNvPr id="3" name="Rectangle 2"/>
+          <p:cNvSpPr/>
+          <p:nvPr/>
+        </p:nvSpPr>
+        <p:spPr>
+          <a:xfrm>
+            <a:off x="0" y="0"/>
+            <a:ext cx="12191695" cy="109728"/>
+          </a:xfrm>
+          <a:prstGeom prst="rect">
+            <a:avLst/>
+          </a:prstGeom>
+          <a:solidFill>
+            <a:srgbClr val="1A568E"/>
+          </a:solidFill>
+          <a:ln>
+            <a:noFill/>
+          </a:ln>
+        </p:spPr>
+        <p:style>
+          <a:lnRef idx="1">
+            <a:schemeClr val="accent1"/>
+          </a:lnRef>
+          <a:fillRef idx="3">
+            <a:schemeClr val="accent1"/>
+          </a:fillRef>
+          <a:effectRef idx="2">
+            <a:schemeClr val="accent1"/>
+          </a:effectRef>
+          <a:fontRef idx="minor">
+            <a:schemeClr val="lt1"/>
+          </a:fontRef>
+        </p:style>
+        <p:txBody>
+          <a:bodyPr rtlCol="0" anchor="ctr"/>
+          <a:lstStyle/>
+          <a:p>
+            <a:pPr algn="ctr"/>
+          </a:p>
+        </p:txBody>
+      </p:sp>
+      <p:sp>
+        <p:nvSpPr>
+          <p:cNvPr id="4" name="TextBox 3"/>
           <p:cNvSpPr txBox="1"/>
           <p:nvPr/>
         </p:nvSpPr>
         <p:spPr>
           <a:xfrm>
-            <a:off x="457200" y="201168"/>
-            <a:ext cx="8229600" cy="640080"/>
+            <a:off x="731520" y="457200"/>
+            <a:ext cx="10515600" cy="914400"/>
           </a:xfrm>
           <a:prstGeom prst="rect">
             <a:avLst/>
@@ -6715,29 +8112,28 @@
           <a:lstStyle/>
           <a:p>
             <a:pPr>
-              <a:defRPr sz="2800" b="1">
-                <a:solidFill>
-                  <a:srgbClr val="FFFFFF"/>
-                </a:solidFill>
-                <a:latin typeface="맑은 고딕"/>
-              </a:defRPr>
-            </a:pPr>
-            <a:r>
-              <a:t>6. 백엔드 기술 스택 &amp; 의존성</a:t>
-            </a:r>
-          </a:p>
-        </p:txBody>
-      </p:sp>
-      <p:sp>
-        <p:nvSpPr>
-          <p:cNvPr id="4" name="TextBox 3"/>
+              <a:defRPr sz="3200" b="1">
+                <a:solidFill>
+                  <a:srgbClr val="1A568E"/>
+                </a:solidFill>
+              </a:defRPr>
+            </a:pPr>
+            <a:r>
+              <a:t>Spring 의존성 (DI)</a:t>
+            </a:r>
+          </a:p>
+        </p:txBody>
+      </p:sp>
+      <p:sp>
+        <p:nvSpPr>
+          <p:cNvPr id="5" name="TextBox 4"/>
           <p:cNvSpPr txBox="1"/>
           <p:nvPr/>
         </p:nvSpPr>
         <p:spPr>
           <a:xfrm>
-            <a:off x="457200" y="1188720"/>
-            <a:ext cx="3840480" cy="457200"/>
+            <a:off x="731520" y="1234440"/>
+            <a:ext cx="10515600" cy="457200"/>
           </a:xfrm>
           <a:prstGeom prst="rect">
             <a:avLst/>
@@ -6751,29 +8147,186 @@
           <a:lstStyle/>
           <a:p>
             <a:pPr>
-              <a:defRPr sz="2000" b="1">
-                <a:solidFill>
-                  <a:srgbClr val="009688"/>
-                </a:solidFill>
-                <a:latin typeface="맑은 고딕"/>
-              </a:defRPr>
-            </a:pPr>
-            <a:r>
-              <a:t>런타임 &amp; 프레임워크</a:t>
-            </a:r>
-          </a:p>
-        </p:txBody>
-      </p:sp>
-      <p:sp>
-        <p:nvSpPr>
-          <p:cNvPr id="5" name="TextBox 4"/>
+              <a:defRPr sz="1600">
+                <a:solidFill>
+                  <a:srgbClr val="64748B"/>
+                </a:solidFill>
+              </a:defRPr>
+            </a:pPr>
+            <a:r>
+              <a:t>Dependencies &amp; Injection</a:t>
+            </a:r>
+          </a:p>
+        </p:txBody>
+      </p:sp>
+      <p:sp>
+        <p:nvSpPr>
+          <p:cNvPr id="6" name="TextBox 5"/>
           <p:cNvSpPr txBox="1"/>
           <p:nvPr/>
         </p:nvSpPr>
         <p:spPr>
           <a:xfrm>
-            <a:off x="457200" y="1645920"/>
-            <a:ext cx="3840480" cy="4389120"/>
+            <a:off x="10972800" y="6400800"/>
+            <a:ext cx="1097280" cy="320040"/>
+          </a:xfrm>
+          <a:prstGeom prst="rect">
+            <a:avLst/>
+          </a:prstGeom>
+          <a:noFill/>
+        </p:spPr>
+        <p:txBody>
+          <a:bodyPr wrap="none">
+            <a:spAutoFit/>
+          </a:bodyPr>
+          <a:lstStyle/>
+          <a:p>
+            <a:pPr algn="r">
+              <a:defRPr sz="1100">
+                <a:solidFill>
+                  <a:srgbClr val="64748B"/>
+                </a:solidFill>
+              </a:defRPr>
+            </a:pPr>
+            <a:r>
+              <a:t>8 / 10</a:t>
+            </a:r>
+          </a:p>
+        </p:txBody>
+      </p:sp>
+      <p:sp>
+        <p:nvSpPr>
+          <p:cNvPr id="7" name="Rounded Rectangle 6"/>
+          <p:cNvSpPr/>
+          <p:nvPr/>
+        </p:nvSpPr>
+        <p:spPr>
+          <a:xfrm>
+            <a:off x="731520" y="1828800"/>
+            <a:ext cx="5303520" cy="1234440"/>
+          </a:xfrm>
+          <a:prstGeom prst="roundRect">
+            <a:avLst/>
+          </a:prstGeom>
+          <a:solidFill>
+            <a:srgbClr val="FFFFFF"/>
+          </a:solidFill>
+          <a:ln w="12700">
+            <a:solidFill>
+              <a:srgbClr val="E2E8F0"/>
+            </a:solidFill>
+          </a:ln>
+        </p:spPr>
+        <p:style>
+          <a:lnRef idx="1">
+            <a:schemeClr val="accent1"/>
+          </a:lnRef>
+          <a:fillRef idx="3">
+            <a:schemeClr val="accent1"/>
+          </a:fillRef>
+          <a:effectRef idx="2">
+            <a:schemeClr val="accent1"/>
+          </a:effectRef>
+          <a:fontRef idx="minor">
+            <a:schemeClr val="lt1"/>
+          </a:fontRef>
+        </p:style>
+        <p:txBody>
+          <a:bodyPr rtlCol="0" anchor="ctr"/>
+          <a:lstStyle/>
+          <a:p>
+            <a:pPr algn="ctr"/>
+          </a:p>
+        </p:txBody>
+      </p:sp>
+      <p:sp>
+        <p:nvSpPr>
+          <p:cNvPr id="8" name="Rectangle 7"/>
+          <p:cNvSpPr/>
+          <p:nvPr/>
+        </p:nvSpPr>
+        <p:spPr>
+          <a:xfrm>
+            <a:off x="731520" y="1828800"/>
+            <a:ext cx="73152" cy="1234440"/>
+          </a:xfrm>
+          <a:prstGeom prst="rect">
+            <a:avLst/>
+          </a:prstGeom>
+          <a:solidFill>
+            <a:srgbClr val="1A568E"/>
+          </a:solidFill>
+          <a:ln>
+            <a:noFill/>
+          </a:ln>
+        </p:spPr>
+        <p:style>
+          <a:lnRef idx="1">
+            <a:schemeClr val="accent1"/>
+          </a:lnRef>
+          <a:fillRef idx="3">
+            <a:schemeClr val="accent1"/>
+          </a:fillRef>
+          <a:effectRef idx="2">
+            <a:schemeClr val="accent1"/>
+          </a:effectRef>
+          <a:fontRef idx="minor">
+            <a:schemeClr val="lt1"/>
+          </a:fontRef>
+        </p:style>
+        <p:txBody>
+          <a:bodyPr rtlCol="0" anchor="ctr"/>
+          <a:lstStyle/>
+          <a:p>
+            <a:pPr algn="ctr"/>
+          </a:p>
+        </p:txBody>
+      </p:sp>
+      <p:sp>
+        <p:nvSpPr>
+          <p:cNvPr id="9" name="TextBox 8"/>
+          <p:cNvSpPr txBox="1"/>
+          <p:nvPr/>
+        </p:nvSpPr>
+        <p:spPr>
+          <a:xfrm>
+            <a:off x="960120" y="2011680"/>
+            <a:ext cx="4937759" cy="457200"/>
+          </a:xfrm>
+          <a:prstGeom prst="rect">
+            <a:avLst/>
+          </a:prstGeom>
+          <a:noFill/>
+        </p:spPr>
+        <p:txBody>
+          <a:bodyPr wrap="none">
+            <a:spAutoFit/>
+          </a:bodyPr>
+          <a:lstStyle/>
+          <a:p>
+            <a:pPr>
+              <a:defRPr sz="1800" b="1">
+                <a:solidFill>
+                  <a:srgbClr val="1A568E"/>
+                </a:solidFill>
+              </a:defRPr>
+            </a:pPr>
+            <a:r>
+              <a:t>spring-boot-starter-web</a:t>
+            </a:r>
+          </a:p>
+        </p:txBody>
+      </p:sp>
+      <p:sp>
+        <p:nvSpPr>
+          <p:cNvPr id="10" name="TextBox 9"/>
+          <p:cNvSpPr txBox="1"/>
+          <p:nvPr/>
+        </p:nvSpPr>
+        <p:spPr>
+          <a:xfrm>
+            <a:off x="960120" y="2423160"/>
+            <a:ext cx="4937759" cy="502920"/>
           </a:xfrm>
           <a:prstGeom prst="rect">
             <a:avLst/>
@@ -6788,111 +8341,118 @@
           <a:p>
             <a:pPr>
               <a:spcAft>
-                <a:spcPts val="800"/>
+                <a:spcPts val="400"/>
               </a:spcAft>
-              <a:defRPr sz="1600">
-                <a:solidFill>
-                  <a:srgbClr val="2C3E50"/>
-                </a:solidFill>
-                <a:latin typeface="맑은 고딕"/>
-              </a:defRPr>
-            </a:pPr>
-            <a:r>
-              <a:t>• JDK 21 (LTS)</a:t>
-            </a:r>
-          </a:p>
-          <a:p>
-            <a:pPr>
-              <a:spcAft>
-                <a:spcPts val="800"/>
-              </a:spcAft>
-              <a:defRPr sz="1600">
-                <a:solidFill>
-                  <a:srgbClr val="2C3E50"/>
-                </a:solidFill>
-                <a:latin typeface="맑은 고딕"/>
-              </a:defRPr>
-            </a:pPr>
-            <a:r>
-              <a:t>• Spring Boot 3.5.x</a:t>
-            </a:r>
-          </a:p>
-          <a:p>
-            <a:pPr>
-              <a:spcAft>
-                <a:spcPts val="800"/>
-              </a:spcAft>
-              <a:defRPr sz="1600">
-                <a:solidFill>
-                  <a:srgbClr val="2C3E50"/>
-                </a:solidFill>
-                <a:latin typeface="맑은 고딕"/>
-              </a:defRPr>
-            </a:pPr>
-            <a:r>
-              <a:t>• Thymeleaf (서버 사이드 템플릿)</a:t>
-            </a:r>
-          </a:p>
-          <a:p>
-            <a:pPr>
-              <a:spcAft>
-                <a:spcPts val="800"/>
-              </a:spcAft>
-              <a:defRPr sz="1600">
-                <a:solidFill>
-                  <a:srgbClr val="2C3E50"/>
-                </a:solidFill>
-                <a:latin typeface="맑은 고딕"/>
-              </a:defRPr>
-            </a:pPr>
-            <a:r>
-              <a:t>• Tomcat 10.1 (내장 WAS)</a:t>
-            </a:r>
-          </a:p>
-          <a:p>
-            <a:pPr>
-              <a:spcAft>
-                <a:spcPts val="800"/>
-              </a:spcAft>
-              <a:defRPr sz="1600">
-                <a:solidFill>
-                  <a:srgbClr val="2C3E50"/>
-                </a:solidFill>
-                <a:latin typeface="맑은 고딕"/>
-              </a:defRPr>
-            </a:pPr>
-            <a:r>
-              <a:t>• MySQL 8 (RDBMS)</a:t>
-            </a:r>
-          </a:p>
-          <a:p>
-            <a:pPr>
-              <a:spcAft>
-                <a:spcPts val="800"/>
-              </a:spcAft>
-              <a:defRPr sz="1600">
-                <a:solidFill>
-                  <a:srgbClr val="2C3E50"/>
-                </a:solidFill>
-                <a:latin typeface="맑은 고딕"/>
-              </a:defRPr>
-            </a:pPr>
-            <a:r>
-              <a:t>• Gradle (빌드 도구)</a:t>
-            </a:r>
-          </a:p>
-        </p:txBody>
-      </p:sp>
-      <p:sp>
-        <p:nvSpPr>
-          <p:cNvPr id="6" name="TextBox 5"/>
+              <a:defRPr sz="1300">
+                <a:solidFill>
+                  <a:srgbClr val="64748B"/>
+                </a:solidFill>
+              </a:defRPr>
+            </a:pPr>
+            <a:r>
+              <a:t>REST API · MVC · 내장 Tomcat</a:t>
+            </a:r>
+          </a:p>
+        </p:txBody>
+      </p:sp>
+      <p:sp>
+        <p:nvSpPr>
+          <p:cNvPr id="11" name="Rounded Rectangle 10"/>
+          <p:cNvSpPr/>
+          <p:nvPr/>
+        </p:nvSpPr>
+        <p:spPr>
+          <a:xfrm>
+            <a:off x="6309359" y="1828800"/>
+            <a:ext cx="5303520" cy="1234440"/>
+          </a:xfrm>
+          <a:prstGeom prst="roundRect">
+            <a:avLst/>
+          </a:prstGeom>
+          <a:solidFill>
+            <a:srgbClr val="FFFFFF"/>
+          </a:solidFill>
+          <a:ln w="12700">
+            <a:solidFill>
+              <a:srgbClr val="E2E8F0"/>
+            </a:solidFill>
+          </a:ln>
+        </p:spPr>
+        <p:style>
+          <a:lnRef idx="1">
+            <a:schemeClr val="accent1"/>
+          </a:lnRef>
+          <a:fillRef idx="3">
+            <a:schemeClr val="accent1"/>
+          </a:fillRef>
+          <a:effectRef idx="2">
+            <a:schemeClr val="accent1"/>
+          </a:effectRef>
+          <a:fontRef idx="minor">
+            <a:schemeClr val="lt1"/>
+          </a:fontRef>
+        </p:style>
+        <p:txBody>
+          <a:bodyPr rtlCol="0" anchor="ctr"/>
+          <a:lstStyle/>
+          <a:p>
+            <a:pPr algn="ctr"/>
+          </a:p>
+        </p:txBody>
+      </p:sp>
+      <p:sp>
+        <p:nvSpPr>
+          <p:cNvPr id="12" name="Rectangle 11"/>
+          <p:cNvSpPr/>
+          <p:nvPr/>
+        </p:nvSpPr>
+        <p:spPr>
+          <a:xfrm>
+            <a:off x="6309359" y="1828800"/>
+            <a:ext cx="73152" cy="1234440"/>
+          </a:xfrm>
+          <a:prstGeom prst="rect">
+            <a:avLst/>
+          </a:prstGeom>
+          <a:solidFill>
+            <a:srgbClr val="2E86AB"/>
+          </a:solidFill>
+          <a:ln>
+            <a:noFill/>
+          </a:ln>
+        </p:spPr>
+        <p:style>
+          <a:lnRef idx="1">
+            <a:schemeClr val="accent1"/>
+          </a:lnRef>
+          <a:fillRef idx="3">
+            <a:schemeClr val="accent1"/>
+          </a:fillRef>
+          <a:effectRef idx="2">
+            <a:schemeClr val="accent1"/>
+          </a:effectRef>
+          <a:fontRef idx="minor">
+            <a:schemeClr val="lt1"/>
+          </a:fontRef>
+        </p:style>
+        <p:txBody>
+          <a:bodyPr rtlCol="0" anchor="ctr"/>
+          <a:lstStyle/>
+          <a:p>
+            <a:pPr algn="ctr"/>
+          </a:p>
+        </p:txBody>
+      </p:sp>
+      <p:sp>
+        <p:nvSpPr>
+          <p:cNvPr id="13" name="TextBox 12"/>
           <p:cNvSpPr txBox="1"/>
           <p:nvPr/>
         </p:nvSpPr>
         <p:spPr>
           <a:xfrm>
-            <a:off x="4754880" y="1188720"/>
-            <a:ext cx="3840480" cy="457200"/>
+            <a:off x="6537959" y="2011680"/>
+            <a:ext cx="4937759" cy="457200"/>
           </a:xfrm>
           <a:prstGeom prst="rect">
             <a:avLst/>
@@ -6906,29 +8466,28 @@
           <a:lstStyle/>
           <a:p>
             <a:pPr>
-              <a:defRPr sz="2000" b="1">
-                <a:solidFill>
-                  <a:srgbClr val="009688"/>
-                </a:solidFill>
-                <a:latin typeface="맑은 고딕"/>
-              </a:defRPr>
-            </a:pPr>
-            <a:r>
-              <a:t>Spring 의존성 (DI)</a:t>
-            </a:r>
-          </a:p>
-        </p:txBody>
-      </p:sp>
-      <p:sp>
-        <p:nvSpPr>
-          <p:cNvPr id="7" name="TextBox 6"/>
+              <a:defRPr sz="1800" b="1">
+                <a:solidFill>
+                  <a:srgbClr val="1A568E"/>
+                </a:solidFill>
+              </a:defRPr>
+            </a:pPr>
+            <a:r>
+              <a:t>spring-boot-starter-security</a:t>
+            </a:r>
+          </a:p>
+        </p:txBody>
+      </p:sp>
+      <p:sp>
+        <p:nvSpPr>
+          <p:cNvPr id="14" name="TextBox 13"/>
           <p:cNvSpPr txBox="1"/>
           <p:nvPr/>
         </p:nvSpPr>
         <p:spPr>
           <a:xfrm>
-            <a:off x="4754880" y="1645920"/>
-            <a:ext cx="3840480" cy="4389120"/>
+            <a:off x="6537959" y="2423160"/>
+            <a:ext cx="4937759" cy="502920"/>
           </a:xfrm>
           <a:prstGeom prst="rect">
             <a:avLst/>
@@ -6943,97 +8502,660 @@
           <a:p>
             <a:pPr>
               <a:spcAft>
-                <a:spcPts val="800"/>
+                <a:spcPts val="400"/>
               </a:spcAft>
-              <a:defRPr sz="1600">
-                <a:solidFill>
-                  <a:srgbClr val="2C3E50"/>
-                </a:solidFill>
-                <a:latin typeface="맑은 고딕"/>
-              </a:defRPr>
-            </a:pPr>
-            <a:r>
-              <a:t>• spring-boot-starter-web</a:t>
-            </a:r>
-          </a:p>
+              <a:defRPr sz="1300">
+                <a:solidFill>
+                  <a:srgbClr val="64748B"/>
+                </a:solidFill>
+              </a:defRPr>
+            </a:pPr>
+            <a:r>
+              <a:t>인증/인가 · BCrypt 암호화</a:t>
+            </a:r>
+          </a:p>
+        </p:txBody>
+      </p:sp>
+      <p:sp>
+        <p:nvSpPr>
+          <p:cNvPr id="15" name="Rounded Rectangle 14"/>
+          <p:cNvSpPr/>
+          <p:nvPr/>
+        </p:nvSpPr>
+        <p:spPr>
+          <a:xfrm>
+            <a:off x="731520" y="3246120"/>
+            <a:ext cx="5303520" cy="1234440"/>
+          </a:xfrm>
+          <a:prstGeom prst="roundRect">
+            <a:avLst/>
+          </a:prstGeom>
+          <a:solidFill>
+            <a:srgbClr val="FFFFFF"/>
+          </a:solidFill>
+          <a:ln w="12700">
+            <a:solidFill>
+              <a:srgbClr val="E2E8F0"/>
+            </a:solidFill>
+          </a:ln>
+        </p:spPr>
+        <p:style>
+          <a:lnRef idx="1">
+            <a:schemeClr val="accent1"/>
+          </a:lnRef>
+          <a:fillRef idx="3">
+            <a:schemeClr val="accent1"/>
+          </a:fillRef>
+          <a:effectRef idx="2">
+            <a:schemeClr val="accent1"/>
+          </a:effectRef>
+          <a:fontRef idx="minor">
+            <a:schemeClr val="lt1"/>
+          </a:fontRef>
+        </p:style>
+        <p:txBody>
+          <a:bodyPr rtlCol="0" anchor="ctr"/>
+          <a:lstStyle/>
+          <a:p>
+            <a:pPr algn="ctr"/>
+          </a:p>
+        </p:txBody>
+      </p:sp>
+      <p:sp>
+        <p:nvSpPr>
+          <p:cNvPr id="16" name="Rectangle 15"/>
+          <p:cNvSpPr/>
+          <p:nvPr/>
+        </p:nvSpPr>
+        <p:spPr>
+          <a:xfrm>
+            <a:off x="731520" y="3246120"/>
+            <a:ext cx="73152" cy="1234440"/>
+          </a:xfrm>
+          <a:prstGeom prst="rect">
+            <a:avLst/>
+          </a:prstGeom>
+          <a:solidFill>
+            <a:srgbClr val="00A87E"/>
+          </a:solidFill>
+          <a:ln>
+            <a:noFill/>
+          </a:ln>
+        </p:spPr>
+        <p:style>
+          <a:lnRef idx="1">
+            <a:schemeClr val="accent1"/>
+          </a:lnRef>
+          <a:fillRef idx="3">
+            <a:schemeClr val="accent1"/>
+          </a:fillRef>
+          <a:effectRef idx="2">
+            <a:schemeClr val="accent1"/>
+          </a:effectRef>
+          <a:fontRef idx="minor">
+            <a:schemeClr val="lt1"/>
+          </a:fontRef>
+        </p:style>
+        <p:txBody>
+          <a:bodyPr rtlCol="0" anchor="ctr"/>
+          <a:lstStyle/>
+          <a:p>
+            <a:pPr algn="ctr"/>
+          </a:p>
+        </p:txBody>
+      </p:sp>
+      <p:sp>
+        <p:nvSpPr>
+          <p:cNvPr id="17" name="TextBox 16"/>
+          <p:cNvSpPr txBox="1"/>
+          <p:nvPr/>
+        </p:nvSpPr>
+        <p:spPr>
+          <a:xfrm>
+            <a:off x="960120" y="3429000"/>
+            <a:ext cx="4937759" cy="457200"/>
+          </a:xfrm>
+          <a:prstGeom prst="rect">
+            <a:avLst/>
+          </a:prstGeom>
+          <a:noFill/>
+        </p:spPr>
+        <p:txBody>
+          <a:bodyPr wrap="none">
+            <a:spAutoFit/>
+          </a:bodyPr>
+          <a:lstStyle/>
+          <a:p>
+            <a:pPr>
+              <a:defRPr sz="1800" b="1">
+                <a:solidFill>
+                  <a:srgbClr val="1A568E"/>
+                </a:solidFill>
+              </a:defRPr>
+            </a:pPr>
+            <a:r>
+              <a:t>spring-boot-starter-thymeleaf</a:t>
+            </a:r>
+          </a:p>
+        </p:txBody>
+      </p:sp>
+      <p:sp>
+        <p:nvSpPr>
+          <p:cNvPr id="18" name="TextBox 17"/>
+          <p:cNvSpPr txBox="1"/>
+          <p:nvPr/>
+        </p:nvSpPr>
+        <p:spPr>
+          <a:xfrm>
+            <a:off x="960120" y="3840480"/>
+            <a:ext cx="4937759" cy="502920"/>
+          </a:xfrm>
+          <a:prstGeom prst="rect">
+            <a:avLst/>
+          </a:prstGeom>
+          <a:noFill/>
+        </p:spPr>
+        <p:txBody>
+          <a:bodyPr wrap="square">
+            <a:spAutoFit/>
+          </a:bodyPr>
+          <a:lstStyle/>
           <a:p>
             <a:pPr>
               <a:spcAft>
-                <a:spcPts val="800"/>
+                <a:spcPts val="400"/>
               </a:spcAft>
-              <a:defRPr sz="1600">
-                <a:solidFill>
-                  <a:srgbClr val="2C3E50"/>
-                </a:solidFill>
-                <a:latin typeface="맑은 고딕"/>
-              </a:defRPr>
-            </a:pPr>
-            <a:r>
-              <a:t>• spring-boot-starter-security (BCrypt)</a:t>
-            </a:r>
-          </a:p>
+              <a:defRPr sz="1300">
+                <a:solidFill>
+                  <a:srgbClr val="64748B"/>
+                </a:solidFill>
+              </a:defRPr>
+            </a:pPr>
+            <a:r>
+              <a:t>서버 사이드 템플릿 렌더링</a:t>
+            </a:r>
+          </a:p>
+        </p:txBody>
+      </p:sp>
+      <p:sp>
+        <p:nvSpPr>
+          <p:cNvPr id="19" name="Rounded Rectangle 18"/>
+          <p:cNvSpPr/>
+          <p:nvPr/>
+        </p:nvSpPr>
+        <p:spPr>
+          <a:xfrm>
+            <a:off x="6309359" y="3246120"/>
+            <a:ext cx="5303520" cy="1234440"/>
+          </a:xfrm>
+          <a:prstGeom prst="roundRect">
+            <a:avLst/>
+          </a:prstGeom>
+          <a:solidFill>
+            <a:srgbClr val="FFFFFF"/>
+          </a:solidFill>
+          <a:ln w="12700">
+            <a:solidFill>
+              <a:srgbClr val="E2E8F0"/>
+            </a:solidFill>
+          </a:ln>
+        </p:spPr>
+        <p:style>
+          <a:lnRef idx="1">
+            <a:schemeClr val="accent1"/>
+          </a:lnRef>
+          <a:fillRef idx="3">
+            <a:schemeClr val="accent1"/>
+          </a:fillRef>
+          <a:effectRef idx="2">
+            <a:schemeClr val="accent1"/>
+          </a:effectRef>
+          <a:fontRef idx="minor">
+            <a:schemeClr val="lt1"/>
+          </a:fontRef>
+        </p:style>
+        <p:txBody>
+          <a:bodyPr rtlCol="0" anchor="ctr"/>
+          <a:lstStyle/>
+          <a:p>
+            <a:pPr algn="ctr"/>
+          </a:p>
+        </p:txBody>
+      </p:sp>
+      <p:sp>
+        <p:nvSpPr>
+          <p:cNvPr id="20" name="Rectangle 19"/>
+          <p:cNvSpPr/>
+          <p:nvPr/>
+        </p:nvSpPr>
+        <p:spPr>
+          <a:xfrm>
+            <a:off x="6309359" y="3246120"/>
+            <a:ext cx="73152" cy="1234440"/>
+          </a:xfrm>
+          <a:prstGeom prst="rect">
+            <a:avLst/>
+          </a:prstGeom>
+          <a:solidFill>
+            <a:srgbClr val="1A568E"/>
+          </a:solidFill>
+          <a:ln>
+            <a:noFill/>
+          </a:ln>
+        </p:spPr>
+        <p:style>
+          <a:lnRef idx="1">
+            <a:schemeClr val="accent1"/>
+          </a:lnRef>
+          <a:fillRef idx="3">
+            <a:schemeClr val="accent1"/>
+          </a:fillRef>
+          <a:effectRef idx="2">
+            <a:schemeClr val="accent1"/>
+          </a:effectRef>
+          <a:fontRef idx="minor">
+            <a:schemeClr val="lt1"/>
+          </a:fontRef>
+        </p:style>
+        <p:txBody>
+          <a:bodyPr rtlCol="0" anchor="ctr"/>
+          <a:lstStyle/>
+          <a:p>
+            <a:pPr algn="ctr"/>
+          </a:p>
+        </p:txBody>
+      </p:sp>
+      <p:sp>
+        <p:nvSpPr>
+          <p:cNvPr id="21" name="TextBox 20"/>
+          <p:cNvSpPr txBox="1"/>
+          <p:nvPr/>
+        </p:nvSpPr>
+        <p:spPr>
+          <a:xfrm>
+            <a:off x="6537959" y="3429000"/>
+            <a:ext cx="4937759" cy="457200"/>
+          </a:xfrm>
+          <a:prstGeom prst="rect">
+            <a:avLst/>
+          </a:prstGeom>
+          <a:noFill/>
+        </p:spPr>
+        <p:txBody>
+          <a:bodyPr wrap="none">
+            <a:spAutoFit/>
+          </a:bodyPr>
+          <a:lstStyle/>
+          <a:p>
+            <a:pPr>
+              <a:defRPr sz="1800" b="1">
+                <a:solidFill>
+                  <a:srgbClr val="1A568E"/>
+                </a:solidFill>
+              </a:defRPr>
+            </a:pPr>
+            <a:r>
+              <a:t>mysql-connector-j</a:t>
+            </a:r>
+          </a:p>
+        </p:txBody>
+      </p:sp>
+      <p:sp>
+        <p:nvSpPr>
+          <p:cNvPr id="22" name="TextBox 21"/>
+          <p:cNvSpPr txBox="1"/>
+          <p:nvPr/>
+        </p:nvSpPr>
+        <p:spPr>
+          <a:xfrm>
+            <a:off x="6537959" y="3840480"/>
+            <a:ext cx="4937759" cy="502920"/>
+          </a:xfrm>
+          <a:prstGeom prst="rect">
+            <a:avLst/>
+          </a:prstGeom>
+          <a:noFill/>
+        </p:spPr>
+        <p:txBody>
+          <a:bodyPr wrap="square">
+            <a:spAutoFit/>
+          </a:bodyPr>
+          <a:lstStyle/>
           <a:p>
             <a:pPr>
               <a:spcAft>
-                <a:spcPts val="800"/>
+                <a:spcPts val="400"/>
               </a:spcAft>
-              <a:defRPr sz="1600">
-                <a:solidFill>
-                  <a:srgbClr val="2C3E50"/>
-                </a:solidFill>
-                <a:latin typeface="맑은 고딕"/>
-              </a:defRPr>
-            </a:pPr>
-            <a:r>
-              <a:t>• spring-boot-starter-thymeleaf</a:t>
-            </a:r>
-          </a:p>
+              <a:defRPr sz="1300">
+                <a:solidFill>
+                  <a:srgbClr val="64748B"/>
+                </a:solidFill>
+              </a:defRPr>
+            </a:pPr>
+            <a:r>
+              <a:t>MySQL 8 JDBC 드라이버</a:t>
+            </a:r>
+          </a:p>
+        </p:txBody>
+      </p:sp>
+      <p:sp>
+        <p:nvSpPr>
+          <p:cNvPr id="23" name="Rounded Rectangle 22"/>
+          <p:cNvSpPr/>
+          <p:nvPr/>
+        </p:nvSpPr>
+        <p:spPr>
+          <a:xfrm>
+            <a:off x="731520" y="4663440"/>
+            <a:ext cx="5303520" cy="1234440"/>
+          </a:xfrm>
+          <a:prstGeom prst="roundRect">
+            <a:avLst/>
+          </a:prstGeom>
+          <a:solidFill>
+            <a:srgbClr val="FFFFFF"/>
+          </a:solidFill>
+          <a:ln w="12700">
+            <a:solidFill>
+              <a:srgbClr val="E2E8F0"/>
+            </a:solidFill>
+          </a:ln>
+        </p:spPr>
+        <p:style>
+          <a:lnRef idx="1">
+            <a:schemeClr val="accent1"/>
+          </a:lnRef>
+          <a:fillRef idx="3">
+            <a:schemeClr val="accent1"/>
+          </a:fillRef>
+          <a:effectRef idx="2">
+            <a:schemeClr val="accent1"/>
+          </a:effectRef>
+          <a:fontRef idx="minor">
+            <a:schemeClr val="lt1"/>
+          </a:fontRef>
+        </p:style>
+        <p:txBody>
+          <a:bodyPr rtlCol="0" anchor="ctr"/>
+          <a:lstStyle/>
+          <a:p>
+            <a:pPr algn="ctr"/>
+          </a:p>
+        </p:txBody>
+      </p:sp>
+      <p:sp>
+        <p:nvSpPr>
+          <p:cNvPr id="24" name="Rectangle 23"/>
+          <p:cNvSpPr/>
+          <p:nvPr/>
+        </p:nvSpPr>
+        <p:spPr>
+          <a:xfrm>
+            <a:off x="731520" y="4663440"/>
+            <a:ext cx="73152" cy="1234440"/>
+          </a:xfrm>
+          <a:prstGeom prst="rect">
+            <a:avLst/>
+          </a:prstGeom>
+          <a:solidFill>
+            <a:srgbClr val="2E86AB"/>
+          </a:solidFill>
+          <a:ln>
+            <a:noFill/>
+          </a:ln>
+        </p:spPr>
+        <p:style>
+          <a:lnRef idx="1">
+            <a:schemeClr val="accent1"/>
+          </a:lnRef>
+          <a:fillRef idx="3">
+            <a:schemeClr val="accent1"/>
+          </a:fillRef>
+          <a:effectRef idx="2">
+            <a:schemeClr val="accent1"/>
+          </a:effectRef>
+          <a:fontRef idx="minor">
+            <a:schemeClr val="lt1"/>
+          </a:fontRef>
+        </p:style>
+        <p:txBody>
+          <a:bodyPr rtlCol="0" anchor="ctr"/>
+          <a:lstStyle/>
+          <a:p>
+            <a:pPr algn="ctr"/>
+          </a:p>
+        </p:txBody>
+      </p:sp>
+      <p:sp>
+        <p:nvSpPr>
+          <p:cNvPr id="25" name="TextBox 24"/>
+          <p:cNvSpPr txBox="1"/>
+          <p:nvPr/>
+        </p:nvSpPr>
+        <p:spPr>
+          <a:xfrm>
+            <a:off x="960120" y="4846320"/>
+            <a:ext cx="4937759" cy="457200"/>
+          </a:xfrm>
+          <a:prstGeom prst="rect">
+            <a:avLst/>
+          </a:prstGeom>
+          <a:noFill/>
+        </p:spPr>
+        <p:txBody>
+          <a:bodyPr wrap="none">
+            <a:spAutoFit/>
+          </a:bodyPr>
+          <a:lstStyle/>
+          <a:p>
+            <a:pPr>
+              <a:defRPr sz="1800" b="1">
+                <a:solidFill>
+                  <a:srgbClr val="1A568E"/>
+                </a:solidFill>
+              </a:defRPr>
+            </a:pPr>
+            <a:r>
+              <a:t>spring-boot-starter-jdbc</a:t>
+            </a:r>
+          </a:p>
+        </p:txBody>
+      </p:sp>
+      <p:sp>
+        <p:nvSpPr>
+          <p:cNvPr id="26" name="TextBox 25"/>
+          <p:cNvSpPr txBox="1"/>
+          <p:nvPr/>
+        </p:nvSpPr>
+        <p:spPr>
+          <a:xfrm>
+            <a:off x="960120" y="5257800"/>
+            <a:ext cx="4937759" cy="502920"/>
+          </a:xfrm>
+          <a:prstGeom prst="rect">
+            <a:avLst/>
+          </a:prstGeom>
+          <a:noFill/>
+        </p:spPr>
+        <p:txBody>
+          <a:bodyPr wrap="square">
+            <a:spAutoFit/>
+          </a:bodyPr>
+          <a:lstStyle/>
           <a:p>
             <a:pPr>
               <a:spcAft>
-                <a:spcPts val="800"/>
+                <a:spcPts val="400"/>
               </a:spcAft>
-              <a:defRPr sz="1600">
-                <a:solidFill>
-                  <a:srgbClr val="2C3E50"/>
-                </a:solidFill>
-                <a:latin typeface="맑은 고딕"/>
-              </a:defRPr>
-            </a:pPr>
-            <a:r>
-              <a:t>• mysql-connector-j</a:t>
-            </a:r>
-          </a:p>
+              <a:defRPr sz="1300">
+                <a:solidFill>
+                  <a:srgbClr val="64748B"/>
+                </a:solidFill>
+              </a:defRPr>
+            </a:pPr>
+            <a:r>
+              <a:t>JdbcTemplate · SQL 실행</a:t>
+            </a:r>
+          </a:p>
+        </p:txBody>
+      </p:sp>
+      <p:sp>
+        <p:nvSpPr>
+          <p:cNvPr id="27" name="Rounded Rectangle 26"/>
+          <p:cNvSpPr/>
+          <p:nvPr/>
+        </p:nvSpPr>
+        <p:spPr>
+          <a:xfrm>
+            <a:off x="6309359" y="4663440"/>
+            <a:ext cx="5303520" cy="1234440"/>
+          </a:xfrm>
+          <a:prstGeom prst="roundRect">
+            <a:avLst/>
+          </a:prstGeom>
+          <a:solidFill>
+            <a:srgbClr val="FFFFFF"/>
+          </a:solidFill>
+          <a:ln w="12700">
+            <a:solidFill>
+              <a:srgbClr val="E2E8F0"/>
+            </a:solidFill>
+          </a:ln>
+        </p:spPr>
+        <p:style>
+          <a:lnRef idx="1">
+            <a:schemeClr val="accent1"/>
+          </a:lnRef>
+          <a:fillRef idx="3">
+            <a:schemeClr val="accent1"/>
+          </a:fillRef>
+          <a:effectRef idx="2">
+            <a:schemeClr val="accent1"/>
+          </a:effectRef>
+          <a:fontRef idx="minor">
+            <a:schemeClr val="lt1"/>
+          </a:fontRef>
+        </p:style>
+        <p:txBody>
+          <a:bodyPr rtlCol="0" anchor="ctr"/>
+          <a:lstStyle/>
+          <a:p>
+            <a:pPr algn="ctr"/>
+          </a:p>
+        </p:txBody>
+      </p:sp>
+      <p:sp>
+        <p:nvSpPr>
+          <p:cNvPr id="28" name="Rectangle 27"/>
+          <p:cNvSpPr/>
+          <p:nvPr/>
+        </p:nvSpPr>
+        <p:spPr>
+          <a:xfrm>
+            <a:off x="6309359" y="4663440"/>
+            <a:ext cx="73152" cy="1234440"/>
+          </a:xfrm>
+          <a:prstGeom prst="rect">
+            <a:avLst/>
+          </a:prstGeom>
+          <a:solidFill>
+            <a:srgbClr val="00A87E"/>
+          </a:solidFill>
+          <a:ln>
+            <a:noFill/>
+          </a:ln>
+        </p:spPr>
+        <p:style>
+          <a:lnRef idx="1">
+            <a:schemeClr val="accent1"/>
+          </a:lnRef>
+          <a:fillRef idx="3">
+            <a:schemeClr val="accent1"/>
+          </a:fillRef>
+          <a:effectRef idx="2">
+            <a:schemeClr val="accent1"/>
+          </a:effectRef>
+          <a:fontRef idx="minor">
+            <a:schemeClr val="lt1"/>
+          </a:fontRef>
+        </p:style>
+        <p:txBody>
+          <a:bodyPr rtlCol="0" anchor="ctr"/>
+          <a:lstStyle/>
+          <a:p>
+            <a:pPr algn="ctr"/>
+          </a:p>
+        </p:txBody>
+      </p:sp>
+      <p:sp>
+        <p:nvSpPr>
+          <p:cNvPr id="29" name="TextBox 28"/>
+          <p:cNvSpPr txBox="1"/>
+          <p:nvPr/>
+        </p:nvSpPr>
+        <p:spPr>
+          <a:xfrm>
+            <a:off x="6537959" y="4846320"/>
+            <a:ext cx="4937759" cy="457200"/>
+          </a:xfrm>
+          <a:prstGeom prst="rect">
+            <a:avLst/>
+          </a:prstGeom>
+          <a:noFill/>
+        </p:spPr>
+        <p:txBody>
+          <a:bodyPr wrap="none">
+            <a:spAutoFit/>
+          </a:bodyPr>
+          <a:lstStyle/>
+          <a:p>
+            <a:pPr>
+              <a:defRPr sz="1800" b="1">
+                <a:solidFill>
+                  <a:srgbClr val="1A568E"/>
+                </a:solidFill>
+              </a:defRPr>
+            </a:pPr>
+            <a:r>
+              <a:t>lombok</a:t>
+            </a:r>
+          </a:p>
+        </p:txBody>
+      </p:sp>
+      <p:sp>
+        <p:nvSpPr>
+          <p:cNvPr id="30" name="TextBox 29"/>
+          <p:cNvSpPr txBox="1"/>
+          <p:nvPr/>
+        </p:nvSpPr>
+        <p:spPr>
+          <a:xfrm>
+            <a:off x="6537959" y="5257800"/>
+            <a:ext cx="4937759" cy="502920"/>
+          </a:xfrm>
+          <a:prstGeom prst="rect">
+            <a:avLst/>
+          </a:prstGeom>
+          <a:noFill/>
+        </p:spPr>
+        <p:txBody>
+          <a:bodyPr wrap="square">
+            <a:spAutoFit/>
+          </a:bodyPr>
+          <a:lstStyle/>
           <a:p>
             <a:pPr>
               <a:spcAft>
-                <a:spcPts val="800"/>
+                <a:spcPts val="400"/>
               </a:spcAft>
-              <a:defRPr sz="1600">
-                <a:solidFill>
-                  <a:srgbClr val="2C3E50"/>
-                </a:solidFill>
-                <a:latin typeface="맑은 고딕"/>
-              </a:defRPr>
-            </a:pPr>
-            <a:r>
-              <a:t>• lombok</a:t>
-            </a:r>
-          </a:p>
-          <a:p>
-            <a:pPr>
-              <a:spcAft>
-                <a:spcPts val="800"/>
-              </a:spcAft>
-              <a:defRPr sz="1600">
-                <a:solidFill>
-                  <a:srgbClr val="2C3E50"/>
-                </a:solidFill>
-                <a:latin typeface="맑은 고딕"/>
-              </a:defRPr>
-            </a:pPr>
-            <a:r>
-              <a:t>• spring-boot-starter-jdbc (JdbcTemplate)</a:t>
+              <a:defRPr sz="1300">
+                <a:solidFill>
+                  <a:srgbClr val="64748B"/>
+                </a:solidFill>
+              </a:defRPr>
+            </a:pPr>
+            <a:r>
+              <a:t>보일러플레이트 코드 자동 생성</a:t>
             </a:r>
           </a:p>
         </p:txBody>
@@ -7049,14 +9171,6 @@
 <file path=ppt/slides/slide9.xml><?xml version="1.0" encoding="utf-8"?>
 <p:sld xmlns:a="http://schemas.openxmlformats.org/drawingml/2006/main" xmlns:p="http://schemas.openxmlformats.org/presentationml/2006/main" xmlns:r="http://schemas.openxmlformats.org/officeDocument/2006/relationships">
   <p:cSld>
-    <p:bg>
-      <p:bgPr>
-        <a:solidFill>
-          <a:srgbClr val="F0F4F8"/>
-        </a:solidFill>
-        <a:effectLst/>
-      </p:bgPr>
-    </p:bg>
     <p:spTree>
       <p:nvGrpSpPr>
         <p:cNvPr id="1" name=""/>
@@ -7073,13 +9187,13 @@
         <p:spPr>
           <a:xfrm>
             <a:off x="0" y="0"/>
-            <a:ext cx="9144000" cy="1005840"/>
+            <a:ext cx="12191695" cy="6858000"/>
           </a:xfrm>
           <a:prstGeom prst="rect">
             <a:avLst/>
           </a:prstGeom>
           <a:solidFill>
-            <a:srgbClr val="1A3A5C"/>
+            <a:srgbClr val="F8FAFC"/>
           </a:solidFill>
           <a:ln>
             <a:noFill/>
@@ -7109,14 +9223,57 @@
       </p:sp>
       <p:sp>
         <p:nvSpPr>
-          <p:cNvPr id="3" name="TextBox 2"/>
+          <p:cNvPr id="3" name="Rectangle 2"/>
+          <p:cNvSpPr/>
+          <p:nvPr/>
+        </p:nvSpPr>
+        <p:spPr>
+          <a:xfrm>
+            <a:off x="0" y="0"/>
+            <a:ext cx="12191695" cy="109728"/>
+          </a:xfrm>
+          <a:prstGeom prst="rect">
+            <a:avLst/>
+          </a:prstGeom>
+          <a:solidFill>
+            <a:srgbClr val="1A568E"/>
+          </a:solidFill>
+          <a:ln>
+            <a:noFill/>
+          </a:ln>
+        </p:spPr>
+        <p:style>
+          <a:lnRef idx="1">
+            <a:schemeClr val="accent1"/>
+          </a:lnRef>
+          <a:fillRef idx="3">
+            <a:schemeClr val="accent1"/>
+          </a:fillRef>
+          <a:effectRef idx="2">
+            <a:schemeClr val="accent1"/>
+          </a:effectRef>
+          <a:fontRef idx="minor">
+            <a:schemeClr val="lt1"/>
+          </a:fontRef>
+        </p:style>
+        <p:txBody>
+          <a:bodyPr rtlCol="0" anchor="ctr"/>
+          <a:lstStyle/>
+          <a:p>
+            <a:pPr algn="ctr"/>
+          </a:p>
+        </p:txBody>
+      </p:sp>
+      <p:sp>
+        <p:nvSpPr>
+          <p:cNvPr id="4" name="TextBox 3"/>
           <p:cNvSpPr txBox="1"/>
           <p:nvPr/>
         </p:nvSpPr>
         <p:spPr>
           <a:xfrm>
-            <a:off x="457200" y="201168"/>
-            <a:ext cx="8229600" cy="640080"/>
+            <a:off x="731520" y="457200"/>
+            <a:ext cx="10515600" cy="914400"/>
           </a:xfrm>
           <a:prstGeom prst="rect">
             <a:avLst/>
@@ -7130,29 +9287,28 @@
           <a:lstStyle/>
           <a:p>
             <a:pPr>
-              <a:defRPr sz="2800" b="1">
-                <a:solidFill>
-                  <a:srgbClr val="FFFFFF"/>
-                </a:solidFill>
-                <a:latin typeface="맑은 고딕"/>
-              </a:defRPr>
-            </a:pPr>
-            <a:r>
-              <a:t>7. RPA + AI (Python) 기술 스택</a:t>
-            </a:r>
-          </a:p>
-        </p:txBody>
-      </p:sp>
-      <p:sp>
-        <p:nvSpPr>
-          <p:cNvPr id="4" name="TextBox 3"/>
+              <a:defRPr sz="3200" b="1">
+                <a:solidFill>
+                  <a:srgbClr val="1A568E"/>
+                </a:solidFill>
+              </a:defRPr>
+            </a:pPr>
+            <a:r>
+              <a:t>RPA · AI 분석</a:t>
+            </a:r>
+          </a:p>
+        </p:txBody>
+      </p:sp>
+      <p:sp>
+        <p:nvSpPr>
+          <p:cNvPr id="5" name="TextBox 4"/>
           <p:cNvSpPr txBox="1"/>
           <p:nvPr/>
         </p:nvSpPr>
         <p:spPr>
           <a:xfrm>
-            <a:off x="457200" y="1188720"/>
-            <a:ext cx="3840480" cy="457200"/>
+            <a:off x="731520" y="1234440"/>
+            <a:ext cx="10515600" cy="457200"/>
           </a:xfrm>
           <a:prstGeom prst="rect">
             <a:avLst/>
@@ -7166,29 +9322,186 @@
           <a:lstStyle/>
           <a:p>
             <a:pPr>
-              <a:defRPr sz="2000" b="1">
-                <a:solidFill>
-                  <a:srgbClr val="009688"/>
-                </a:solidFill>
-                <a:latin typeface="맑은 고딕"/>
-              </a:defRPr>
-            </a:pPr>
-            <a:r>
-              <a:t>Python 패키지</a:t>
-            </a:r>
-          </a:p>
-        </p:txBody>
-      </p:sp>
-      <p:sp>
-        <p:nvSpPr>
-          <p:cNvPr id="5" name="TextBox 4"/>
+              <a:defRPr sz="1600">
+                <a:solidFill>
+                  <a:srgbClr val="64748B"/>
+                </a:solidFill>
+              </a:defRPr>
+            </a:pPr>
+            <a:r>
+              <a:t>Python Automation &amp; Analytics</a:t>
+            </a:r>
+          </a:p>
+        </p:txBody>
+      </p:sp>
+      <p:sp>
+        <p:nvSpPr>
+          <p:cNvPr id="6" name="TextBox 5"/>
           <p:cNvSpPr txBox="1"/>
           <p:nvPr/>
         </p:nvSpPr>
         <p:spPr>
           <a:xfrm>
-            <a:off x="457200" y="1645920"/>
-            <a:ext cx="3840480" cy="4389120"/>
+            <a:off x="10972800" y="6400800"/>
+            <a:ext cx="1097280" cy="320040"/>
+          </a:xfrm>
+          <a:prstGeom prst="rect">
+            <a:avLst/>
+          </a:prstGeom>
+          <a:noFill/>
+        </p:spPr>
+        <p:txBody>
+          <a:bodyPr wrap="none">
+            <a:spAutoFit/>
+          </a:bodyPr>
+          <a:lstStyle/>
+          <a:p>
+            <a:pPr algn="r">
+              <a:defRPr sz="1100">
+                <a:solidFill>
+                  <a:srgbClr val="64748B"/>
+                </a:solidFill>
+              </a:defRPr>
+            </a:pPr>
+            <a:r>
+              <a:t>9 / 10</a:t>
+            </a:r>
+          </a:p>
+        </p:txBody>
+      </p:sp>
+      <p:sp>
+        <p:nvSpPr>
+          <p:cNvPr id="7" name="Rounded Rectangle 6"/>
+          <p:cNvSpPr/>
+          <p:nvPr/>
+        </p:nvSpPr>
+        <p:spPr>
+          <a:xfrm>
+            <a:off x="731520" y="1828800"/>
+            <a:ext cx="5029200" cy="1828800"/>
+          </a:xfrm>
+          <a:prstGeom prst="roundRect">
+            <a:avLst/>
+          </a:prstGeom>
+          <a:solidFill>
+            <a:srgbClr val="FFFFFF"/>
+          </a:solidFill>
+          <a:ln w="12700">
+            <a:solidFill>
+              <a:srgbClr val="E2E8F0"/>
+            </a:solidFill>
+          </a:ln>
+        </p:spPr>
+        <p:style>
+          <a:lnRef idx="1">
+            <a:schemeClr val="accent1"/>
+          </a:lnRef>
+          <a:fillRef idx="3">
+            <a:schemeClr val="accent1"/>
+          </a:fillRef>
+          <a:effectRef idx="2">
+            <a:schemeClr val="accent1"/>
+          </a:effectRef>
+          <a:fontRef idx="minor">
+            <a:schemeClr val="lt1"/>
+          </a:fontRef>
+        </p:style>
+        <p:txBody>
+          <a:bodyPr rtlCol="0" anchor="ctr"/>
+          <a:lstStyle/>
+          <a:p>
+            <a:pPr algn="ctr"/>
+          </a:p>
+        </p:txBody>
+      </p:sp>
+      <p:sp>
+        <p:nvSpPr>
+          <p:cNvPr id="8" name="Rectangle 7"/>
+          <p:cNvSpPr/>
+          <p:nvPr/>
+        </p:nvSpPr>
+        <p:spPr>
+          <a:xfrm>
+            <a:off x="731520" y="1828800"/>
+            <a:ext cx="73152" cy="1828800"/>
+          </a:xfrm>
+          <a:prstGeom prst="rect">
+            <a:avLst/>
+          </a:prstGeom>
+          <a:solidFill>
+            <a:srgbClr val="1A568E"/>
+          </a:solidFill>
+          <a:ln>
+            <a:noFill/>
+          </a:ln>
+        </p:spPr>
+        <p:style>
+          <a:lnRef idx="1">
+            <a:schemeClr val="accent1"/>
+          </a:lnRef>
+          <a:fillRef idx="3">
+            <a:schemeClr val="accent1"/>
+          </a:fillRef>
+          <a:effectRef idx="2">
+            <a:schemeClr val="accent1"/>
+          </a:effectRef>
+          <a:fontRef idx="minor">
+            <a:schemeClr val="lt1"/>
+          </a:fontRef>
+        </p:style>
+        <p:txBody>
+          <a:bodyPr rtlCol="0" anchor="ctr"/>
+          <a:lstStyle/>
+          <a:p>
+            <a:pPr algn="ctr"/>
+          </a:p>
+        </p:txBody>
+      </p:sp>
+      <p:sp>
+        <p:nvSpPr>
+          <p:cNvPr id="9" name="TextBox 8"/>
+          <p:cNvSpPr txBox="1"/>
+          <p:nvPr/>
+        </p:nvSpPr>
+        <p:spPr>
+          <a:xfrm>
+            <a:off x="960120" y="2011680"/>
+            <a:ext cx="4663440" cy="457200"/>
+          </a:xfrm>
+          <a:prstGeom prst="rect">
+            <a:avLst/>
+          </a:prstGeom>
+          <a:noFill/>
+        </p:spPr>
+        <p:txBody>
+          <a:bodyPr wrap="none">
+            <a:spAutoFit/>
+          </a:bodyPr>
+          <a:lstStyle/>
+          <a:p>
+            <a:pPr>
+              <a:defRPr sz="1800" b="1">
+                <a:solidFill>
+                  <a:srgbClr val="1A568E"/>
+                </a:solidFill>
+              </a:defRPr>
+            </a:pPr>
+            <a:r>
+              <a:t>데이터 처리</a:t>
+            </a:r>
+          </a:p>
+        </p:txBody>
+      </p:sp>
+      <p:sp>
+        <p:nvSpPr>
+          <p:cNvPr id="10" name="TextBox 9"/>
+          <p:cNvSpPr txBox="1"/>
+          <p:nvPr/>
+        </p:nvSpPr>
+        <p:spPr>
+          <a:xfrm>
+            <a:off x="960120" y="2423160"/>
+            <a:ext cx="4663440" cy="1097280"/>
           </a:xfrm>
           <a:prstGeom prst="rect">
             <a:avLst/>
@@ -7203,143 +9516,133 @@
           <a:p>
             <a:pPr>
               <a:spcAft>
-                <a:spcPts val="800"/>
+                <a:spcPts val="400"/>
               </a:spcAft>
-              <a:defRPr sz="1600">
-                <a:solidFill>
-                  <a:srgbClr val="2C3E50"/>
-                </a:solidFill>
-                <a:latin typeface="맑은 고딕"/>
-              </a:defRPr>
-            </a:pPr>
-            <a:r>
-              <a:t>• NumPy — 수치 연산</a:t>
+              <a:defRPr sz="1300">
+                <a:solidFill>
+                  <a:srgbClr val="64748B"/>
+                </a:solidFill>
+              </a:defRPr>
+            </a:pPr>
+            <a:r>
+              <a:t>NumPy — 수치 연산</a:t>
             </a:r>
           </a:p>
           <a:p>
             <a:pPr>
               <a:spcAft>
-                <a:spcPts val="800"/>
+                <a:spcPts val="400"/>
               </a:spcAft>
-              <a:defRPr sz="1600">
-                <a:solidFill>
-                  <a:srgbClr val="2C3E50"/>
-                </a:solidFill>
-                <a:latin typeface="맑은 고딕"/>
-              </a:defRPr>
-            </a:pPr>
-            <a:r>
-              <a:t>• Pandas — 데이터 전처리·분석</a:t>
-            </a:r>
-          </a:p>
-          <a:p>
-            <a:pPr>
-              <a:spcAft>
-                <a:spcPts val="800"/>
-              </a:spcAft>
-              <a:defRPr sz="1600">
-                <a:solidFill>
-                  <a:srgbClr val="2C3E50"/>
-                </a:solidFill>
-                <a:latin typeface="맑은 고딕"/>
-              </a:defRPr>
-            </a:pPr>
-            <a:r>
-              <a:t>• Matplotlib — 기본 시각화</a:t>
-            </a:r>
-          </a:p>
-          <a:p>
-            <a:pPr>
-              <a:spcAft>
-                <a:spcPts val="800"/>
-              </a:spcAft>
-              <a:defRPr sz="1600">
-                <a:solidFill>
-                  <a:srgbClr val="2C3E50"/>
-                </a:solidFill>
-                <a:latin typeface="맑은 고딕"/>
-              </a:defRPr>
-            </a:pPr>
-            <a:r>
-              <a:t>• Seaborn — 통계 그래프</a:t>
-            </a:r>
-          </a:p>
-          <a:p>
-            <a:pPr>
-              <a:spcAft>
-                <a:spcPts val="800"/>
-              </a:spcAft>
-              <a:defRPr sz="1600">
-                <a:solidFill>
-                  <a:srgbClr val="2C3E50"/>
-                </a:solidFill>
-                <a:latin typeface="맑은 고딕"/>
-              </a:defRPr>
-            </a:pPr>
-            <a:r>
-              <a:t>• Plotly — 인터랙티브 차트</a:t>
-            </a:r>
-          </a:p>
-          <a:p>
-            <a:pPr>
-              <a:spcAft>
-                <a:spcPts val="800"/>
-              </a:spcAft>
-              <a:defRPr sz="1600">
-                <a:solidFill>
-                  <a:srgbClr val="2C3E50"/>
-                </a:solidFill>
-                <a:latin typeface="맑은 고딕"/>
-              </a:defRPr>
-            </a:pPr>
-            <a:r>
-              <a:t>• Requests — HTTP API/웹 요청</a:t>
-            </a:r>
-          </a:p>
-          <a:p>
-            <a:pPr>
-              <a:spcAft>
-                <a:spcPts val="800"/>
-              </a:spcAft>
-              <a:defRPr sz="1600">
-                <a:solidFill>
-                  <a:srgbClr val="2C3E50"/>
-                </a:solidFill>
-                <a:latin typeface="맑은 고딕"/>
-              </a:defRPr>
-            </a:pPr>
-            <a:r>
-              <a:t>• BeautifulSoup — HTML 크롤링</a:t>
-            </a:r>
-          </a:p>
-          <a:p>
-            <a:pPr>
-              <a:spcAft>
-                <a:spcPts val="800"/>
-              </a:spcAft>
-              <a:defRPr sz="1600">
-                <a:solidFill>
-                  <a:srgbClr val="2C3E50"/>
-                </a:solidFill>
-                <a:latin typeface="맑은 고딕"/>
-              </a:defRPr>
-            </a:pPr>
-            <a:r>
-              <a:t>• scikit-learn — ML 예측 모델</a:t>
-            </a:r>
-          </a:p>
-        </p:txBody>
-      </p:sp>
-      <p:sp>
-        <p:nvSpPr>
-          <p:cNvPr id="6" name="TextBox 5"/>
+              <a:defRPr sz="1300">
+                <a:solidFill>
+                  <a:srgbClr val="64748B"/>
+                </a:solidFill>
+              </a:defRPr>
+            </a:pPr>
+            <a:r>
+              <a:t>Pandas — 데이터프레임 분석</a:t>
+            </a:r>
+          </a:p>
+        </p:txBody>
+      </p:sp>
+      <p:sp>
+        <p:nvSpPr>
+          <p:cNvPr id="11" name="Rounded Rectangle 10"/>
+          <p:cNvSpPr/>
+          <p:nvPr/>
+        </p:nvSpPr>
+        <p:spPr>
+          <a:xfrm>
+            <a:off x="6217920" y="1828800"/>
+            <a:ext cx="5029200" cy="1828800"/>
+          </a:xfrm>
+          <a:prstGeom prst="roundRect">
+            <a:avLst/>
+          </a:prstGeom>
+          <a:solidFill>
+            <a:srgbClr val="FFFFFF"/>
+          </a:solidFill>
+          <a:ln w="12700">
+            <a:solidFill>
+              <a:srgbClr val="E2E8F0"/>
+            </a:solidFill>
+          </a:ln>
+        </p:spPr>
+        <p:style>
+          <a:lnRef idx="1">
+            <a:schemeClr val="accent1"/>
+          </a:lnRef>
+          <a:fillRef idx="3">
+            <a:schemeClr val="accent1"/>
+          </a:fillRef>
+          <a:effectRef idx="2">
+            <a:schemeClr val="accent1"/>
+          </a:effectRef>
+          <a:fontRef idx="minor">
+            <a:schemeClr val="lt1"/>
+          </a:fontRef>
+        </p:style>
+        <p:txBody>
+          <a:bodyPr rtlCol="0" anchor="ctr"/>
+          <a:lstStyle/>
+          <a:p>
+            <a:pPr algn="ctr"/>
+          </a:p>
+        </p:txBody>
+      </p:sp>
+      <p:sp>
+        <p:nvSpPr>
+          <p:cNvPr id="12" name="Rectangle 11"/>
+          <p:cNvSpPr/>
+          <p:nvPr/>
+        </p:nvSpPr>
+        <p:spPr>
+          <a:xfrm>
+            <a:off x="6217920" y="1828800"/>
+            <a:ext cx="73152" cy="1828800"/>
+          </a:xfrm>
+          <a:prstGeom prst="rect">
+            <a:avLst/>
+          </a:prstGeom>
+          <a:solidFill>
+            <a:srgbClr val="2E86AB"/>
+          </a:solidFill>
+          <a:ln>
+            <a:noFill/>
+          </a:ln>
+        </p:spPr>
+        <p:style>
+          <a:lnRef idx="1">
+            <a:schemeClr val="accent1"/>
+          </a:lnRef>
+          <a:fillRef idx="3">
+            <a:schemeClr val="accent1"/>
+          </a:fillRef>
+          <a:effectRef idx="2">
+            <a:schemeClr val="accent1"/>
+          </a:effectRef>
+          <a:fontRef idx="minor">
+            <a:schemeClr val="lt1"/>
+          </a:fontRef>
+        </p:style>
+        <p:txBody>
+          <a:bodyPr rtlCol="0" anchor="ctr"/>
+          <a:lstStyle/>
+          <a:p>
+            <a:pPr algn="ctr"/>
+          </a:p>
+        </p:txBody>
+      </p:sp>
+      <p:sp>
+        <p:nvSpPr>
+          <p:cNvPr id="13" name="TextBox 12"/>
           <p:cNvSpPr txBox="1"/>
           <p:nvPr/>
         </p:nvSpPr>
         <p:spPr>
           <a:xfrm>
-            <a:off x="4754880" y="1188720"/>
-            <a:ext cx="3840480" cy="457200"/>
+            <a:off x="6446520" y="2011680"/>
+            <a:ext cx="4663440" cy="457200"/>
           </a:xfrm>
           <a:prstGeom prst="rect">
             <a:avLst/>
@@ -7353,29 +9656,28 @@
           <a:lstStyle/>
           <a:p>
             <a:pPr>
-              <a:defRPr sz="2000" b="1">
-                <a:solidFill>
-                  <a:srgbClr val="009688"/>
-                </a:solidFill>
-                <a:latin typeface="맑은 고딕"/>
-              </a:defRPr>
-            </a:pPr>
-            <a:r>
-              <a:t>활용 시나리오</a:t>
-            </a:r>
-          </a:p>
-        </p:txBody>
-      </p:sp>
-      <p:sp>
-        <p:nvSpPr>
-          <p:cNvPr id="7" name="TextBox 6"/>
+              <a:defRPr sz="1800" b="1">
+                <a:solidFill>
+                  <a:srgbClr val="1A568E"/>
+                </a:solidFill>
+              </a:defRPr>
+            </a:pPr>
+            <a:r>
+              <a:t>시각화</a:t>
+            </a:r>
+          </a:p>
+        </p:txBody>
+      </p:sp>
+      <p:sp>
+        <p:nvSpPr>
+          <p:cNvPr id="14" name="TextBox 13"/>
           <p:cNvSpPr txBox="1"/>
           <p:nvPr/>
         </p:nvSpPr>
         <p:spPr>
           <a:xfrm>
-            <a:off x="4754880" y="1645920"/>
-            <a:ext cx="3840480" cy="4389120"/>
+            <a:off x="6446520" y="2423160"/>
+            <a:ext cx="4663440" cy="1097280"/>
           </a:xfrm>
           <a:prstGeom prst="rect">
             <a:avLst/>
@@ -7390,97 +9692,383 @@
           <a:p>
             <a:pPr>
               <a:spcAft>
-                <a:spcPts val="800"/>
+                <a:spcPts val="400"/>
               </a:spcAft>
-              <a:defRPr sz="1600">
-                <a:solidFill>
-                  <a:srgbClr val="2C3E50"/>
-                </a:solidFill>
-                <a:latin typeface="맑은 고딕"/>
-              </a:defRPr>
-            </a:pPr>
-            <a:r>
-              <a:t>• 외부 부동산 사이트 매물 자동 수집 (RPA)</a:t>
+              <a:defRPr sz="1300">
+                <a:solidFill>
+                  <a:srgbClr val="64748B"/>
+                </a:solidFill>
+              </a:defRPr>
+            </a:pPr>
+            <a:r>
+              <a:t>Matplotlib · Seaborn — 차트/그래프</a:t>
             </a:r>
           </a:p>
           <a:p>
             <a:pPr>
               <a:spcAft>
-                <a:spcPts val="800"/>
+                <a:spcPts val="400"/>
               </a:spcAft>
-              <a:defRPr sz="1600">
-                <a:solidFill>
-                  <a:srgbClr val="2C3E50"/>
-                </a:solidFill>
-                <a:latin typeface="맑은 고딕"/>
-              </a:defRPr>
-            </a:pPr>
-            <a:r>
-              <a:t>• 지역별 시세·거래량 데이터 분석</a:t>
-            </a:r>
-          </a:p>
+              <a:defRPr sz="1300">
+                <a:solidFill>
+                  <a:srgbClr val="64748B"/>
+                </a:solidFill>
+              </a:defRPr>
+            </a:pPr>
+            <a:r>
+              <a:t>Plotly — 인터랙티브 대시보드</a:t>
+            </a:r>
+          </a:p>
+        </p:txBody>
+      </p:sp>
+      <p:sp>
+        <p:nvSpPr>
+          <p:cNvPr id="15" name="Rounded Rectangle 14"/>
+          <p:cNvSpPr/>
+          <p:nvPr/>
+        </p:nvSpPr>
+        <p:spPr>
+          <a:xfrm>
+            <a:off x="731520" y="3931920"/>
+            <a:ext cx="5029200" cy="1828800"/>
+          </a:xfrm>
+          <a:prstGeom prst="roundRect">
+            <a:avLst/>
+          </a:prstGeom>
+          <a:solidFill>
+            <a:srgbClr val="FFFFFF"/>
+          </a:solidFill>
+          <a:ln w="12700">
+            <a:solidFill>
+              <a:srgbClr val="E2E8F0"/>
+            </a:solidFill>
+          </a:ln>
+        </p:spPr>
+        <p:style>
+          <a:lnRef idx="1">
+            <a:schemeClr val="accent1"/>
+          </a:lnRef>
+          <a:fillRef idx="3">
+            <a:schemeClr val="accent1"/>
+          </a:fillRef>
+          <a:effectRef idx="2">
+            <a:schemeClr val="accent1"/>
+          </a:effectRef>
+          <a:fontRef idx="minor">
+            <a:schemeClr val="lt1"/>
+          </a:fontRef>
+        </p:style>
+        <p:txBody>
+          <a:bodyPr rtlCol="0" anchor="ctr"/>
+          <a:lstStyle/>
+          <a:p>
+            <a:pPr algn="ctr"/>
+          </a:p>
+        </p:txBody>
+      </p:sp>
+      <p:sp>
+        <p:nvSpPr>
+          <p:cNvPr id="16" name="Rectangle 15"/>
+          <p:cNvSpPr/>
+          <p:nvPr/>
+        </p:nvSpPr>
+        <p:spPr>
+          <a:xfrm>
+            <a:off x="731520" y="3931920"/>
+            <a:ext cx="73152" cy="1828800"/>
+          </a:xfrm>
+          <a:prstGeom prst="rect">
+            <a:avLst/>
+          </a:prstGeom>
+          <a:solidFill>
+            <a:srgbClr val="00A87E"/>
+          </a:solidFill>
+          <a:ln>
+            <a:noFill/>
+          </a:ln>
+        </p:spPr>
+        <p:style>
+          <a:lnRef idx="1">
+            <a:schemeClr val="accent1"/>
+          </a:lnRef>
+          <a:fillRef idx="3">
+            <a:schemeClr val="accent1"/>
+          </a:fillRef>
+          <a:effectRef idx="2">
+            <a:schemeClr val="accent1"/>
+          </a:effectRef>
+          <a:fontRef idx="minor">
+            <a:schemeClr val="lt1"/>
+          </a:fontRef>
+        </p:style>
+        <p:txBody>
+          <a:bodyPr rtlCol="0" anchor="ctr"/>
+          <a:lstStyle/>
+          <a:p>
+            <a:pPr algn="ctr"/>
+          </a:p>
+        </p:txBody>
+      </p:sp>
+      <p:sp>
+        <p:nvSpPr>
+          <p:cNvPr id="17" name="TextBox 16"/>
+          <p:cNvSpPr txBox="1"/>
+          <p:nvPr/>
+        </p:nvSpPr>
+        <p:spPr>
+          <a:xfrm>
+            <a:off x="960120" y="4114800"/>
+            <a:ext cx="4663440" cy="457200"/>
+          </a:xfrm>
+          <a:prstGeom prst="rect">
+            <a:avLst/>
+          </a:prstGeom>
+          <a:noFill/>
+        </p:spPr>
+        <p:txBody>
+          <a:bodyPr wrap="none">
+            <a:spAutoFit/>
+          </a:bodyPr>
+          <a:lstStyle/>
+          <a:p>
+            <a:pPr>
+              <a:defRPr sz="1800" b="1">
+                <a:solidFill>
+                  <a:srgbClr val="1A568E"/>
+                </a:solidFill>
+              </a:defRPr>
+            </a:pPr>
+            <a:r>
+              <a:t>수집 &amp; ML</a:t>
+            </a:r>
+          </a:p>
+        </p:txBody>
+      </p:sp>
+      <p:sp>
+        <p:nvSpPr>
+          <p:cNvPr id="18" name="TextBox 17"/>
+          <p:cNvSpPr txBox="1"/>
+          <p:nvPr/>
+        </p:nvSpPr>
+        <p:spPr>
+          <a:xfrm>
+            <a:off x="960120" y="4526280"/>
+            <a:ext cx="4663440" cy="1097280"/>
+          </a:xfrm>
+          <a:prstGeom prst="rect">
+            <a:avLst/>
+          </a:prstGeom>
+          <a:noFill/>
+        </p:spPr>
+        <p:txBody>
+          <a:bodyPr wrap="square">
+            <a:spAutoFit/>
+          </a:bodyPr>
+          <a:lstStyle/>
           <a:p>
             <a:pPr>
               <a:spcAft>
-                <a:spcPts val="800"/>
+                <a:spcPts val="400"/>
               </a:spcAft>
-              <a:defRPr sz="1600">
-                <a:solidFill>
-                  <a:srgbClr val="2C3E50"/>
-                </a:solidFill>
-                <a:latin typeface="맑은 고딕"/>
-              </a:defRPr>
-            </a:pPr>
-            <a:r>
-              <a:t>• 매물 가격 예측 모델 (회귀/분류)</a:t>
+              <a:defRPr sz="1300">
+                <a:solidFill>
+                  <a:srgbClr val="64748B"/>
+                </a:solidFill>
+              </a:defRPr>
+            </a:pPr>
+            <a:r>
+              <a:t>Requests · BeautifulSoup — 웹 크롤링</a:t>
             </a:r>
           </a:p>
           <a:p>
             <a:pPr>
               <a:spcAft>
-                <a:spcPts val="800"/>
+                <a:spcPts val="400"/>
               </a:spcAft>
-              <a:defRPr sz="1600">
-                <a:solidFill>
-                  <a:srgbClr val="2C3E50"/>
-                </a:solidFill>
-                <a:latin typeface="맑은 고딕"/>
-              </a:defRPr>
-            </a:pPr>
-            <a:r>
-              <a:t>• 관리자 대시보드 시각화 리포트</a:t>
-            </a:r>
-          </a:p>
+              <a:defRPr sz="1300">
+                <a:solidFill>
+                  <a:srgbClr val="64748B"/>
+                </a:solidFill>
+              </a:defRPr>
+            </a:pPr>
+            <a:r>
+              <a:t>Scikit-learn — 예측 모델 · 분류</a:t>
+            </a:r>
+          </a:p>
+        </p:txBody>
+      </p:sp>
+      <p:sp>
+        <p:nvSpPr>
+          <p:cNvPr id="19" name="Rounded Rectangle 18"/>
+          <p:cNvSpPr/>
+          <p:nvPr/>
+        </p:nvSpPr>
+        <p:spPr>
+          <a:xfrm>
+            <a:off x="6217920" y="3931920"/>
+            <a:ext cx="5029200" cy="1828800"/>
+          </a:xfrm>
+          <a:prstGeom prst="roundRect">
+            <a:avLst/>
+          </a:prstGeom>
+          <a:solidFill>
+            <a:srgbClr val="FFFFFF"/>
+          </a:solidFill>
+          <a:ln w="12700">
+            <a:solidFill>
+              <a:srgbClr val="E2E8F0"/>
+            </a:solidFill>
+          </a:ln>
+        </p:spPr>
+        <p:style>
+          <a:lnRef idx="1">
+            <a:schemeClr val="accent1"/>
+          </a:lnRef>
+          <a:fillRef idx="3">
+            <a:schemeClr val="accent1"/>
+          </a:fillRef>
+          <a:effectRef idx="2">
+            <a:schemeClr val="accent1"/>
+          </a:effectRef>
+          <a:fontRef idx="minor">
+            <a:schemeClr val="lt1"/>
+          </a:fontRef>
+        </p:style>
+        <p:txBody>
+          <a:bodyPr rtlCol="0" anchor="ctr"/>
+          <a:lstStyle/>
+          <a:p>
+            <a:pPr algn="ctr"/>
+          </a:p>
+        </p:txBody>
+      </p:sp>
+      <p:sp>
+        <p:nvSpPr>
+          <p:cNvPr id="20" name="Rectangle 19"/>
+          <p:cNvSpPr/>
+          <p:nvPr/>
+        </p:nvSpPr>
+        <p:spPr>
+          <a:xfrm>
+            <a:off x="6217920" y="3931920"/>
+            <a:ext cx="73152" cy="1828800"/>
+          </a:xfrm>
+          <a:prstGeom prst="rect">
+            <a:avLst/>
+          </a:prstGeom>
+          <a:solidFill>
+            <a:srgbClr val="7C3AED"/>
+          </a:solidFill>
+          <a:ln>
+            <a:noFill/>
+          </a:ln>
+        </p:spPr>
+        <p:style>
+          <a:lnRef idx="1">
+            <a:schemeClr val="accent1"/>
+          </a:lnRef>
+          <a:fillRef idx="3">
+            <a:schemeClr val="accent1"/>
+          </a:fillRef>
+          <a:effectRef idx="2">
+            <a:schemeClr val="accent1"/>
+          </a:effectRef>
+          <a:fontRef idx="minor">
+            <a:schemeClr val="lt1"/>
+          </a:fontRef>
+        </p:style>
+        <p:txBody>
+          <a:bodyPr rtlCol="0" anchor="ctr"/>
+          <a:lstStyle/>
+          <a:p>
+            <a:pPr algn="ctr"/>
+          </a:p>
+        </p:txBody>
+      </p:sp>
+      <p:sp>
+        <p:nvSpPr>
+          <p:cNvPr id="21" name="TextBox 20"/>
+          <p:cNvSpPr txBox="1"/>
+          <p:nvPr/>
+        </p:nvSpPr>
+        <p:spPr>
+          <a:xfrm>
+            <a:off x="6446520" y="4114800"/>
+            <a:ext cx="4663440" cy="457200"/>
+          </a:xfrm>
+          <a:prstGeom prst="rect">
+            <a:avLst/>
+          </a:prstGeom>
+          <a:noFill/>
+        </p:spPr>
+        <p:txBody>
+          <a:bodyPr wrap="none">
+            <a:spAutoFit/>
+          </a:bodyPr>
+          <a:lstStyle/>
+          <a:p>
+            <a:pPr>
+              <a:defRPr sz="1800" b="1">
+                <a:solidFill>
+                  <a:srgbClr val="1A568E"/>
+                </a:solidFill>
+              </a:defRPr>
+            </a:pPr>
+            <a:r>
+              <a:t>활용 시나리오</a:t>
+            </a:r>
+          </a:p>
+        </p:txBody>
+      </p:sp>
+      <p:sp>
+        <p:nvSpPr>
+          <p:cNvPr id="22" name="TextBox 21"/>
+          <p:cNvSpPr txBox="1"/>
+          <p:nvPr/>
+        </p:nvSpPr>
+        <p:spPr>
+          <a:xfrm>
+            <a:off x="6446520" y="4526280"/>
+            <a:ext cx="4663440" cy="1097280"/>
+          </a:xfrm>
+          <a:prstGeom prst="rect">
+            <a:avLst/>
+          </a:prstGeom>
+          <a:noFill/>
+        </p:spPr>
+        <p:txBody>
+          <a:bodyPr wrap="square">
+            <a:spAutoFit/>
+          </a:bodyPr>
+          <a:lstStyle/>
           <a:p>
             <a:pPr>
               <a:spcAft>
-                <a:spcPts val="800"/>
+                <a:spcPts val="400"/>
               </a:spcAft>
-              <a:defRPr sz="1600">
-                <a:solidFill>
-                  <a:srgbClr val="2C3E50"/>
-                </a:solidFill>
-                <a:latin typeface="맑은 고딕"/>
-              </a:defRPr>
-            </a:pPr>
-            <a:r>
-              <a:t>• 크롤링 데이터 → MySQL/TiDB 적재</a:t>
+              <a:defRPr sz="1300">
+                <a:solidFill>
+                  <a:srgbClr val="64748B"/>
+                </a:solidFill>
+              </a:defRPr>
+            </a:pPr>
+            <a:r>
+              <a:t>매물 시세 트렌드 자동 수집 (RPA)</a:t>
             </a:r>
           </a:p>
           <a:p>
             <a:pPr>
               <a:spcAft>
-                <a:spcPts val="800"/>
+                <a:spcPts val="400"/>
               </a:spcAft>
-              <a:defRPr sz="1600">
-                <a:solidFill>
-                  <a:srgbClr val="2C3E50"/>
-                </a:solidFill>
-                <a:latin typeface="맑은 고딕"/>
-              </a:defRPr>
-            </a:pPr>
-            <a:r>
-              <a:t>• 정기 배치 스케줄링 연동</a:t>
+              <a:defRPr sz="1300">
+                <a:solidFill>
+                  <a:srgbClr val="64748B"/>
+                </a:solidFill>
+              </a:defRPr>
+            </a:pPr>
+            <a:r>
+              <a:t>지역별 가격 예측 · 시각화 리포트</a:t>
             </a:r>
           </a:p>
         </p:txBody>
